--- a/docs/business/AI_MA_新規事業_レビューと提案.pptx
+++ b/docs/business/AI_MA_新規事業_レビューと提案.pptx
@@ -30,9 +30,16 @@
     <p:sldId id="278" r:id="rId24"/>
     <p:sldId id="279" r:id="rId25"/>
     <p:sldId id="280" r:id="rId26"/>
+    <p:sldId id="281" r:id="rId27"/>
+    <p:sldId id="282" r:id="rId28"/>
+    <p:sldId id="283" r:id="rId29"/>
+    <p:sldId id="284" r:id="rId30"/>
+    <p:sldId id="285" r:id="rId31"/>
+    <p:sldId id="286" r:id="rId32"/>
+    <p:sldId id="287" r:id="rId33"/>
   </p:sldIdLst>
   <p:notesMasterIdLst>
-    <p:notesMasterId r:id="rId27"/>
+    <p:notesMasterId r:id="rId34"/>
   </p:notesMasterIdLst>
   <p:sldSz cx="12192000" cy="6858000"/>
   <p:notesSz cx="6858000" cy="12192000"/>
@@ -131,14 +138,14 @@
   <p:extLst>
     <p:ext uri="{521415D9-36F7-43E2-AB2F-B90AF26B5E84}">
       <p14:sectionLst xmlns:p14="http://schemas.microsoft.com/office/powerpoint/2010/main">
-        <p14:section name="導入" id="{92e785db-865e-b4a2-1954-c75fb35a5106}">
+        <p14:section name="導入" id="{86204ad4-1357-b747-65d6-94920019be3a}">
           <p14:sldIdLst>
             <p14:sldId id="256"/>
             <p14:sldId id="257"/>
             <p14:sldId id="258"/>
           </p14:sldIdLst>
         </p14:section>
-        <p14:section name="ダメ出し" id="{39cf4c60-0f9d-f984-17ae-7b72208ae729}">
+        <p14:section name="ダメ出し" id="{bc4d8f17-6152-6a56-68f0-afddb7fe231d}">
           <p14:sldIdLst>
             <p14:sldId id="259"/>
             <p14:sldId id="260"/>
@@ -150,7 +157,7 @@
             <p14:sldId id="266"/>
           </p14:sldIdLst>
         </p14:section>
-        <p14:section name="ブラッシュアップ" id="{1d50bb45-80b8-5ade-ec64-3177d2624e11}">
+        <p14:section name="ブラッシュアップ" id="{00b9bb73-466c-3048-6ec6-0a70a08a3d61}">
           <p14:sldIdLst>
             <p14:sldId id="267"/>
             <p14:sldId id="268"/>
@@ -167,9 +174,20 @@
             <p14:sldId id="279"/>
           </p14:sldIdLst>
         </p14:section>
-        <p14:section name="まとめ" id="{97aa5f0c-a70d-f0dd-376d-bf12eb36a1c7}">
+        <p14:section name="指導型モデル" id="{3cf799c3-ec5f-4141-0f9c-1a43eadfe9c0}">
           <p14:sldIdLst>
             <p14:sldId id="280"/>
+            <p14:sldId id="281"/>
+            <p14:sldId id="282"/>
+            <p14:sldId id="283"/>
+            <p14:sldId id="284"/>
+            <p14:sldId id="285"/>
+            <p14:sldId id="286"/>
+          </p14:sldIdLst>
+        </p14:section>
+        <p14:section name="まとめ" id="{21e8c655-aa71-c9a1-1a43-dbe8b7b329ca}">
+          <p14:sldIdLst>
+            <p14:sldId id="287"/>
           </p14:sldIdLst>
         </p14:section>
       </p14:sectionLst>
@@ -2657,6 +2675,358 @@
 </p:notes>
 </file>
 
+<file path=ppt/notesSlides/notesSlide26.xml><?xml version="1.0" encoding="utf-8"?>
+<p:notes xmlns:a="http://schemas.openxmlformats.org/drawingml/2006/main" xmlns:r="http://schemas.openxmlformats.org/officeDocument/2006/relationships" xmlns:p="http://schemas.openxmlformats.org/presentationml/2006/main">
+  <p:cSld>
+    <p:spTree>
+      <p:nvGrpSpPr>
+        <p:cNvPr id="1" name=""/>
+        <p:cNvGrpSpPr/>
+        <p:nvPr/>
+      </p:nvGrpSpPr>
+      <p:grpSpPr>
+        <a:xfrm>
+          <a:off x="0" y="0"/>
+          <a:ext cx="0" cy="0"/>
+          <a:chOff x="0" y="0"/>
+          <a:chExt cx="0" cy="0"/>
+        </a:xfrm>
+      </p:grpSpPr>
+      <p:sp>
+        <p:nvSpPr>
+          <p:cNvPr id="2" name="Slide Image Placeholder 1"/>
+          <p:cNvSpPr>
+            <a:spLocks noGrp="1" noRot="1" noChangeAspect="1"/>
+          </p:cNvSpPr>
+          <p:nvPr>
+            <p:ph type="sldImg"/>
+          </p:nvPr>
+        </p:nvSpPr>
+        <p:spPr/>
+      </p:sp>
+      <p:sp>
+        <p:nvSpPr>
+          <p:cNvPr id="3" name="Notes Placeholder 2"/>
+          <p:cNvSpPr>
+            <a:spLocks noGrp="1"/>
+          </p:cNvSpPr>
+          <p:nvPr>
+            <p:ph type="body" idx="1"/>
+          </p:nvPr>
+        </p:nvSpPr>
+        <p:spPr/>
+        <p:txBody>
+          <a:bodyPr/>
+          <a:lstStyle/>
+          <a:p>
+            <a:r>
+              <a:rPr lang="en-US" dirty="0"/>
+              <a:t/>
+            </a:r>
+            <a:endParaRPr lang="en-US" dirty="0"/>
+          </a:p>
+        </p:txBody>
+      </p:sp>
+      <p:sp>
+        <p:nvSpPr>
+          <p:cNvPr id="4" name="Slide Number Placeholder 3"/>
+          <p:cNvSpPr>
+            <a:spLocks noGrp="1"/>
+          </p:cNvSpPr>
+          <p:nvPr>
+            <p:ph type="sldNum" sz="quarter" idx="10"/>
+          </p:nvPr>
+        </p:nvSpPr>
+        <p:spPr/>
+        <p:txBody>
+          <a:bodyPr/>
+          <a:lstStyle/>
+          <a:p>
+            <a:fld id="{F7021451-1387-4CA6-816F-3879F97B5CBC}" type="slidenum">
+              <a:rPr lang="en-US"/>
+              <a:t>26</a:t>
+            </a:fld>
+            <a:endParaRPr lang="en-US"/>
+          </a:p>
+        </p:txBody>
+      </p:sp>
+    </p:spTree>
+    <p:extLst>
+      <p:ext uri="{BB962C8B-B14F-4D97-AF65-F5344CB8AC3E}">
+        <p14:creationId xmlns:p14="http://schemas.microsoft.com/office/powerpoint/2010/main" val="1024086991"/>
+      </p:ext>
+    </p:extLst>
+  </p:cSld>
+  <p:clrMapOvr>
+    <a:masterClrMapping/>
+  </p:clrMapOvr>
+</p:notes>
+</file>
+
+<file path=ppt/notesSlides/notesSlide27.xml><?xml version="1.0" encoding="utf-8"?>
+<p:notes xmlns:a="http://schemas.openxmlformats.org/drawingml/2006/main" xmlns:r="http://schemas.openxmlformats.org/officeDocument/2006/relationships" xmlns:p="http://schemas.openxmlformats.org/presentationml/2006/main">
+  <p:cSld>
+    <p:spTree>
+      <p:nvGrpSpPr>
+        <p:cNvPr id="1" name=""/>
+        <p:cNvGrpSpPr/>
+        <p:nvPr/>
+      </p:nvGrpSpPr>
+      <p:grpSpPr>
+        <a:xfrm>
+          <a:off x="0" y="0"/>
+          <a:ext cx="0" cy="0"/>
+          <a:chOff x="0" y="0"/>
+          <a:chExt cx="0" cy="0"/>
+        </a:xfrm>
+      </p:grpSpPr>
+      <p:sp>
+        <p:nvSpPr>
+          <p:cNvPr id="2" name="Slide Image Placeholder 1"/>
+          <p:cNvSpPr>
+            <a:spLocks noGrp="1" noRot="1" noChangeAspect="1"/>
+          </p:cNvSpPr>
+          <p:nvPr>
+            <p:ph type="sldImg"/>
+          </p:nvPr>
+        </p:nvSpPr>
+        <p:spPr/>
+      </p:sp>
+      <p:sp>
+        <p:nvSpPr>
+          <p:cNvPr id="3" name="Notes Placeholder 2"/>
+          <p:cNvSpPr>
+            <a:spLocks noGrp="1"/>
+          </p:cNvSpPr>
+          <p:nvPr>
+            <p:ph type="body" idx="1"/>
+          </p:nvPr>
+        </p:nvSpPr>
+        <p:spPr/>
+        <p:txBody>
+          <a:bodyPr/>
+          <a:lstStyle/>
+          <a:p>
+            <a:r>
+              <a:rPr lang="en-US" dirty="0"/>
+              <a:t/>
+            </a:r>
+            <a:endParaRPr lang="en-US" dirty="0"/>
+          </a:p>
+        </p:txBody>
+      </p:sp>
+      <p:sp>
+        <p:nvSpPr>
+          <p:cNvPr id="4" name="Slide Number Placeholder 3"/>
+          <p:cNvSpPr>
+            <a:spLocks noGrp="1"/>
+          </p:cNvSpPr>
+          <p:nvPr>
+            <p:ph type="sldNum" sz="quarter" idx="10"/>
+          </p:nvPr>
+        </p:nvSpPr>
+        <p:spPr/>
+        <p:txBody>
+          <a:bodyPr/>
+          <a:lstStyle/>
+          <a:p>
+            <a:fld id="{F7021451-1387-4CA6-816F-3879F97B5CBC}" type="slidenum">
+              <a:rPr lang="en-US"/>
+              <a:t>27</a:t>
+            </a:fld>
+            <a:endParaRPr lang="en-US"/>
+          </a:p>
+        </p:txBody>
+      </p:sp>
+    </p:spTree>
+    <p:extLst>
+      <p:ext uri="{BB962C8B-B14F-4D97-AF65-F5344CB8AC3E}">
+        <p14:creationId xmlns:p14="http://schemas.microsoft.com/office/powerpoint/2010/main" val="1024086991"/>
+      </p:ext>
+    </p:extLst>
+  </p:cSld>
+  <p:clrMapOvr>
+    <a:masterClrMapping/>
+  </p:clrMapOvr>
+</p:notes>
+</file>
+
+<file path=ppt/notesSlides/notesSlide28.xml><?xml version="1.0" encoding="utf-8"?>
+<p:notes xmlns:a="http://schemas.openxmlformats.org/drawingml/2006/main" xmlns:r="http://schemas.openxmlformats.org/officeDocument/2006/relationships" xmlns:p="http://schemas.openxmlformats.org/presentationml/2006/main">
+  <p:cSld>
+    <p:spTree>
+      <p:nvGrpSpPr>
+        <p:cNvPr id="1" name=""/>
+        <p:cNvGrpSpPr/>
+        <p:nvPr/>
+      </p:nvGrpSpPr>
+      <p:grpSpPr>
+        <a:xfrm>
+          <a:off x="0" y="0"/>
+          <a:ext cx="0" cy="0"/>
+          <a:chOff x="0" y="0"/>
+          <a:chExt cx="0" cy="0"/>
+        </a:xfrm>
+      </p:grpSpPr>
+      <p:sp>
+        <p:nvSpPr>
+          <p:cNvPr id="2" name="Slide Image Placeholder 1"/>
+          <p:cNvSpPr>
+            <a:spLocks noGrp="1" noRot="1" noChangeAspect="1"/>
+          </p:cNvSpPr>
+          <p:nvPr>
+            <p:ph type="sldImg"/>
+          </p:nvPr>
+        </p:nvSpPr>
+        <p:spPr/>
+      </p:sp>
+      <p:sp>
+        <p:nvSpPr>
+          <p:cNvPr id="3" name="Notes Placeholder 2"/>
+          <p:cNvSpPr>
+            <a:spLocks noGrp="1"/>
+          </p:cNvSpPr>
+          <p:nvPr>
+            <p:ph type="body" idx="1"/>
+          </p:nvPr>
+        </p:nvSpPr>
+        <p:spPr/>
+        <p:txBody>
+          <a:bodyPr/>
+          <a:lstStyle/>
+          <a:p>
+            <a:r>
+              <a:rPr lang="en-US" dirty="0"/>
+              <a:t/>
+            </a:r>
+            <a:endParaRPr lang="en-US" dirty="0"/>
+          </a:p>
+        </p:txBody>
+      </p:sp>
+      <p:sp>
+        <p:nvSpPr>
+          <p:cNvPr id="4" name="Slide Number Placeholder 3"/>
+          <p:cNvSpPr>
+            <a:spLocks noGrp="1"/>
+          </p:cNvSpPr>
+          <p:nvPr>
+            <p:ph type="sldNum" sz="quarter" idx="10"/>
+          </p:nvPr>
+        </p:nvSpPr>
+        <p:spPr/>
+        <p:txBody>
+          <a:bodyPr/>
+          <a:lstStyle/>
+          <a:p>
+            <a:fld id="{F7021451-1387-4CA6-816F-3879F97B5CBC}" type="slidenum">
+              <a:rPr lang="en-US"/>
+              <a:t>28</a:t>
+            </a:fld>
+            <a:endParaRPr lang="en-US"/>
+          </a:p>
+        </p:txBody>
+      </p:sp>
+    </p:spTree>
+    <p:extLst>
+      <p:ext uri="{BB962C8B-B14F-4D97-AF65-F5344CB8AC3E}">
+        <p14:creationId xmlns:p14="http://schemas.microsoft.com/office/powerpoint/2010/main" val="1024086991"/>
+      </p:ext>
+    </p:extLst>
+  </p:cSld>
+  <p:clrMapOvr>
+    <a:masterClrMapping/>
+  </p:clrMapOvr>
+</p:notes>
+</file>
+
+<file path=ppt/notesSlides/notesSlide29.xml><?xml version="1.0" encoding="utf-8"?>
+<p:notes xmlns:a="http://schemas.openxmlformats.org/drawingml/2006/main" xmlns:r="http://schemas.openxmlformats.org/officeDocument/2006/relationships" xmlns:p="http://schemas.openxmlformats.org/presentationml/2006/main">
+  <p:cSld>
+    <p:spTree>
+      <p:nvGrpSpPr>
+        <p:cNvPr id="1" name=""/>
+        <p:cNvGrpSpPr/>
+        <p:nvPr/>
+      </p:nvGrpSpPr>
+      <p:grpSpPr>
+        <a:xfrm>
+          <a:off x="0" y="0"/>
+          <a:ext cx="0" cy="0"/>
+          <a:chOff x="0" y="0"/>
+          <a:chExt cx="0" cy="0"/>
+        </a:xfrm>
+      </p:grpSpPr>
+      <p:sp>
+        <p:nvSpPr>
+          <p:cNvPr id="2" name="Slide Image Placeholder 1"/>
+          <p:cNvSpPr>
+            <a:spLocks noGrp="1" noRot="1" noChangeAspect="1"/>
+          </p:cNvSpPr>
+          <p:nvPr>
+            <p:ph type="sldImg"/>
+          </p:nvPr>
+        </p:nvSpPr>
+        <p:spPr/>
+      </p:sp>
+      <p:sp>
+        <p:nvSpPr>
+          <p:cNvPr id="3" name="Notes Placeholder 2"/>
+          <p:cNvSpPr>
+            <a:spLocks noGrp="1"/>
+          </p:cNvSpPr>
+          <p:nvPr>
+            <p:ph type="body" idx="1"/>
+          </p:nvPr>
+        </p:nvSpPr>
+        <p:spPr/>
+        <p:txBody>
+          <a:bodyPr/>
+          <a:lstStyle/>
+          <a:p>
+            <a:r>
+              <a:rPr lang="en-US" dirty="0"/>
+              <a:t/>
+            </a:r>
+            <a:endParaRPr lang="en-US" dirty="0"/>
+          </a:p>
+        </p:txBody>
+      </p:sp>
+      <p:sp>
+        <p:nvSpPr>
+          <p:cNvPr id="4" name="Slide Number Placeholder 3"/>
+          <p:cNvSpPr>
+            <a:spLocks noGrp="1"/>
+          </p:cNvSpPr>
+          <p:nvPr>
+            <p:ph type="sldNum" sz="quarter" idx="10"/>
+          </p:nvPr>
+        </p:nvSpPr>
+        <p:spPr/>
+        <p:txBody>
+          <a:bodyPr/>
+          <a:lstStyle/>
+          <a:p>
+            <a:fld id="{F7021451-1387-4CA6-816F-3879F97B5CBC}" type="slidenum">
+              <a:rPr lang="en-US"/>
+              <a:t>29</a:t>
+            </a:fld>
+            <a:endParaRPr lang="en-US"/>
+          </a:p>
+        </p:txBody>
+      </p:sp>
+    </p:spTree>
+    <p:extLst>
+      <p:ext uri="{BB962C8B-B14F-4D97-AF65-F5344CB8AC3E}">
+        <p14:creationId xmlns:p14="http://schemas.microsoft.com/office/powerpoint/2010/main" val="1024086991"/>
+      </p:ext>
+    </p:extLst>
+  </p:cSld>
+  <p:clrMapOvr>
+    <a:masterClrMapping/>
+  </p:clrMapOvr>
+</p:notes>
+</file>
+
 <file path=ppt/notesSlides/notesSlide3.xml><?xml version="1.0" encoding="utf-8"?>
 <p:notes xmlns:a="http://schemas.openxmlformats.org/drawingml/2006/main" xmlns:r="http://schemas.openxmlformats.org/officeDocument/2006/relationships" xmlns:p="http://schemas.openxmlformats.org/presentationml/2006/main">
   <p:cSld>
@@ -2727,6 +3097,270 @@
             <a:fld id="{F7021451-1387-4CA6-816F-3879F97B5CBC}" type="slidenum">
               <a:rPr lang="en-US"/>
               <a:t>3</a:t>
+            </a:fld>
+            <a:endParaRPr lang="en-US"/>
+          </a:p>
+        </p:txBody>
+      </p:sp>
+    </p:spTree>
+    <p:extLst>
+      <p:ext uri="{BB962C8B-B14F-4D97-AF65-F5344CB8AC3E}">
+        <p14:creationId xmlns:p14="http://schemas.microsoft.com/office/powerpoint/2010/main" val="1024086991"/>
+      </p:ext>
+    </p:extLst>
+  </p:cSld>
+  <p:clrMapOvr>
+    <a:masterClrMapping/>
+  </p:clrMapOvr>
+</p:notes>
+</file>
+
+<file path=ppt/notesSlides/notesSlide30.xml><?xml version="1.0" encoding="utf-8"?>
+<p:notes xmlns:a="http://schemas.openxmlformats.org/drawingml/2006/main" xmlns:r="http://schemas.openxmlformats.org/officeDocument/2006/relationships" xmlns:p="http://schemas.openxmlformats.org/presentationml/2006/main">
+  <p:cSld>
+    <p:spTree>
+      <p:nvGrpSpPr>
+        <p:cNvPr id="1" name=""/>
+        <p:cNvGrpSpPr/>
+        <p:nvPr/>
+      </p:nvGrpSpPr>
+      <p:grpSpPr>
+        <a:xfrm>
+          <a:off x="0" y="0"/>
+          <a:ext cx="0" cy="0"/>
+          <a:chOff x="0" y="0"/>
+          <a:chExt cx="0" cy="0"/>
+        </a:xfrm>
+      </p:grpSpPr>
+      <p:sp>
+        <p:nvSpPr>
+          <p:cNvPr id="2" name="Slide Image Placeholder 1"/>
+          <p:cNvSpPr>
+            <a:spLocks noGrp="1" noRot="1" noChangeAspect="1"/>
+          </p:cNvSpPr>
+          <p:nvPr>
+            <p:ph type="sldImg"/>
+          </p:nvPr>
+        </p:nvSpPr>
+        <p:spPr/>
+      </p:sp>
+      <p:sp>
+        <p:nvSpPr>
+          <p:cNvPr id="3" name="Notes Placeholder 2"/>
+          <p:cNvSpPr>
+            <a:spLocks noGrp="1"/>
+          </p:cNvSpPr>
+          <p:nvPr>
+            <p:ph type="body" idx="1"/>
+          </p:nvPr>
+        </p:nvSpPr>
+        <p:spPr/>
+        <p:txBody>
+          <a:bodyPr/>
+          <a:lstStyle/>
+          <a:p>
+            <a:r>
+              <a:rPr lang="en-US" dirty="0"/>
+              <a:t/>
+            </a:r>
+            <a:endParaRPr lang="en-US" dirty="0"/>
+          </a:p>
+        </p:txBody>
+      </p:sp>
+      <p:sp>
+        <p:nvSpPr>
+          <p:cNvPr id="4" name="Slide Number Placeholder 3"/>
+          <p:cNvSpPr>
+            <a:spLocks noGrp="1"/>
+          </p:cNvSpPr>
+          <p:nvPr>
+            <p:ph type="sldNum" sz="quarter" idx="10"/>
+          </p:nvPr>
+        </p:nvSpPr>
+        <p:spPr/>
+        <p:txBody>
+          <a:bodyPr/>
+          <a:lstStyle/>
+          <a:p>
+            <a:fld id="{F7021451-1387-4CA6-816F-3879F97B5CBC}" type="slidenum">
+              <a:rPr lang="en-US"/>
+              <a:t>30</a:t>
+            </a:fld>
+            <a:endParaRPr lang="en-US"/>
+          </a:p>
+        </p:txBody>
+      </p:sp>
+    </p:spTree>
+    <p:extLst>
+      <p:ext uri="{BB962C8B-B14F-4D97-AF65-F5344CB8AC3E}">
+        <p14:creationId xmlns:p14="http://schemas.microsoft.com/office/powerpoint/2010/main" val="1024086991"/>
+      </p:ext>
+    </p:extLst>
+  </p:cSld>
+  <p:clrMapOvr>
+    <a:masterClrMapping/>
+  </p:clrMapOvr>
+</p:notes>
+</file>
+
+<file path=ppt/notesSlides/notesSlide31.xml><?xml version="1.0" encoding="utf-8"?>
+<p:notes xmlns:a="http://schemas.openxmlformats.org/drawingml/2006/main" xmlns:r="http://schemas.openxmlformats.org/officeDocument/2006/relationships" xmlns:p="http://schemas.openxmlformats.org/presentationml/2006/main">
+  <p:cSld>
+    <p:spTree>
+      <p:nvGrpSpPr>
+        <p:cNvPr id="1" name=""/>
+        <p:cNvGrpSpPr/>
+        <p:nvPr/>
+      </p:nvGrpSpPr>
+      <p:grpSpPr>
+        <a:xfrm>
+          <a:off x="0" y="0"/>
+          <a:ext cx="0" cy="0"/>
+          <a:chOff x="0" y="0"/>
+          <a:chExt cx="0" cy="0"/>
+        </a:xfrm>
+      </p:grpSpPr>
+      <p:sp>
+        <p:nvSpPr>
+          <p:cNvPr id="2" name="Slide Image Placeholder 1"/>
+          <p:cNvSpPr>
+            <a:spLocks noGrp="1" noRot="1" noChangeAspect="1"/>
+          </p:cNvSpPr>
+          <p:nvPr>
+            <p:ph type="sldImg"/>
+          </p:nvPr>
+        </p:nvSpPr>
+        <p:spPr/>
+      </p:sp>
+      <p:sp>
+        <p:nvSpPr>
+          <p:cNvPr id="3" name="Notes Placeholder 2"/>
+          <p:cNvSpPr>
+            <a:spLocks noGrp="1"/>
+          </p:cNvSpPr>
+          <p:nvPr>
+            <p:ph type="body" idx="1"/>
+          </p:nvPr>
+        </p:nvSpPr>
+        <p:spPr/>
+        <p:txBody>
+          <a:bodyPr/>
+          <a:lstStyle/>
+          <a:p>
+            <a:r>
+              <a:rPr lang="en-US" dirty="0"/>
+              <a:t/>
+            </a:r>
+            <a:endParaRPr lang="en-US" dirty="0"/>
+          </a:p>
+        </p:txBody>
+      </p:sp>
+      <p:sp>
+        <p:nvSpPr>
+          <p:cNvPr id="4" name="Slide Number Placeholder 3"/>
+          <p:cNvSpPr>
+            <a:spLocks noGrp="1"/>
+          </p:cNvSpPr>
+          <p:nvPr>
+            <p:ph type="sldNum" sz="quarter" idx="10"/>
+          </p:nvPr>
+        </p:nvSpPr>
+        <p:spPr/>
+        <p:txBody>
+          <a:bodyPr/>
+          <a:lstStyle/>
+          <a:p>
+            <a:fld id="{F7021451-1387-4CA6-816F-3879F97B5CBC}" type="slidenum">
+              <a:rPr lang="en-US"/>
+              <a:t>31</a:t>
+            </a:fld>
+            <a:endParaRPr lang="en-US"/>
+          </a:p>
+        </p:txBody>
+      </p:sp>
+    </p:spTree>
+    <p:extLst>
+      <p:ext uri="{BB962C8B-B14F-4D97-AF65-F5344CB8AC3E}">
+        <p14:creationId xmlns:p14="http://schemas.microsoft.com/office/powerpoint/2010/main" val="1024086991"/>
+      </p:ext>
+    </p:extLst>
+  </p:cSld>
+  <p:clrMapOvr>
+    <a:masterClrMapping/>
+  </p:clrMapOvr>
+</p:notes>
+</file>
+
+<file path=ppt/notesSlides/notesSlide32.xml><?xml version="1.0" encoding="utf-8"?>
+<p:notes xmlns:a="http://schemas.openxmlformats.org/drawingml/2006/main" xmlns:r="http://schemas.openxmlformats.org/officeDocument/2006/relationships" xmlns:p="http://schemas.openxmlformats.org/presentationml/2006/main">
+  <p:cSld>
+    <p:spTree>
+      <p:nvGrpSpPr>
+        <p:cNvPr id="1" name=""/>
+        <p:cNvGrpSpPr/>
+        <p:nvPr/>
+      </p:nvGrpSpPr>
+      <p:grpSpPr>
+        <a:xfrm>
+          <a:off x="0" y="0"/>
+          <a:ext cx="0" cy="0"/>
+          <a:chOff x="0" y="0"/>
+          <a:chExt cx="0" cy="0"/>
+        </a:xfrm>
+      </p:grpSpPr>
+      <p:sp>
+        <p:nvSpPr>
+          <p:cNvPr id="2" name="Slide Image Placeholder 1"/>
+          <p:cNvSpPr>
+            <a:spLocks noGrp="1" noRot="1" noChangeAspect="1"/>
+          </p:cNvSpPr>
+          <p:nvPr>
+            <p:ph type="sldImg"/>
+          </p:nvPr>
+        </p:nvSpPr>
+        <p:spPr/>
+      </p:sp>
+      <p:sp>
+        <p:nvSpPr>
+          <p:cNvPr id="3" name="Notes Placeholder 2"/>
+          <p:cNvSpPr>
+            <a:spLocks noGrp="1"/>
+          </p:cNvSpPr>
+          <p:nvPr>
+            <p:ph type="body" idx="1"/>
+          </p:nvPr>
+        </p:nvSpPr>
+        <p:spPr/>
+        <p:txBody>
+          <a:bodyPr/>
+          <a:lstStyle/>
+          <a:p>
+            <a:r>
+              <a:rPr lang="en-US" dirty="0"/>
+              <a:t/>
+            </a:r>
+            <a:endParaRPr lang="en-US" dirty="0"/>
+          </a:p>
+        </p:txBody>
+      </p:sp>
+      <p:sp>
+        <p:nvSpPr>
+          <p:cNvPr id="4" name="Slide Number Placeholder 3"/>
+          <p:cNvSpPr>
+            <a:spLocks noGrp="1"/>
+          </p:cNvSpPr>
+          <p:nvPr>
+            <p:ph type="sldNum" sz="quarter" idx="10"/>
+          </p:nvPr>
+        </p:nvSpPr>
+        <p:spPr/>
+        <p:txBody>
+          <a:bodyPr/>
+          <a:lstStyle/>
+          <a:p>
+            <a:fld id="{F7021451-1387-4CA6-816F-3879F97B5CBC}" type="slidenum">
+              <a:rPr lang="en-US"/>
+              <a:t>32</a:t>
             </a:fld>
             <a:endParaRPr lang="en-US"/>
           </a:p>
@@ -5905,7 +6539,7 @@
                   <a:schemeClr val="tx2"/>
                 </a:solidFill>
               </a:rPr>
-              <a:t>まず「誰が毎月払うか」を絞る：継続的に買う人だけを狙う</a:t>
+              <a:t>まず「誰が毎月払うか」を絞る：M&amp;A担当を育てたい会社を狙う</a:t>
             </a:r>
             <a:endParaRPr lang="en-US" sz="2600" dirty="0"/>
           </a:p>
@@ -6118,7 +6752,7 @@
                   <a:schemeClr val="tx2"/>
                 </a:solidFill>
               </a:rPr>
-              <a:t>成長志向の中堅・中小企業</a:t>
+              <a:t>M&amp;A担当がいない・育てたい中堅中小企業</a:t>
             </a:r>
             <a:endParaRPr lang="en-US" sz="1600" dirty="0"/>
           </a:p>
@@ -6154,7 +6788,7 @@
                   <a:schemeClr val="accent4"/>
                 </a:solidFill>
               </a:rPr>
-              <a:t>年商10〜100億／連続買収・ロールアップ志向</a:t>
+              <a:t>年商10〜100億／M&amp;Aで成長したい</a:t>
             </a:r>
             <a:endParaRPr lang="en-US" sz="1100" dirty="0"/>
           </a:p>
@@ -6246,7 +6880,7 @@
                   <a:schemeClr val="tx1"/>
                 </a:solidFill>
               </a:rPr>
-              <a:t>社内にM&amp;A部門を持つ代わりとして</a:t>
+              <a:t>担当者を育てながら、社内にM&amp;A部門をつくる代わりとして</a:t>
             </a:r>
             <a:endParaRPr lang="en-US" sz="1300" dirty="0"/>
           </a:p>
@@ -19626,13 +20260,152 @@
           <p:cNvPr id="2" name="Text 0"/>
           <p:cNvSpPr/>
           <p:nvPr>
+            <p:ph idx="100" type="body" hasCustomPrompt="1"/>
+          </p:nvPr>
+        </p:nvSpPr>
+        <p:spPr>
+          <a:xfrm>
+            <a:off x="731520" y="1737360"/>
+            <a:ext cx="3657600" cy="1097280"/>
+          </a:xfrm>
+          <a:prstGeom prst="rect">
+            <a:avLst/>
+          </a:prstGeom>
+          <a:noFill/>
+          <a:ln/>
+        </p:spPr>
+        <p:txBody>
+          <a:bodyPr wrap="square" lIns="0" tIns="0" rIns="0" bIns="0" rtlCol="0"/>
+          <a:lstStyle/>
+          <a:p>
+            <a:pPr indent="0" marL="0">
+              <a:buNone/>
+            </a:pPr>
+            <a:r>
+              <a:rPr lang="en-US" sz="6000" b="1" dirty="0">
+                <a:solidFill>
+                  <a:schemeClr val="accent3"/>
+                </a:solidFill>
+              </a:rPr>
+              <a:t>03</a:t>
+            </a:r>
+            <a:endParaRPr lang="en-US" sz="6000" dirty="0"/>
+          </a:p>
+        </p:txBody>
+      </p:sp>
+      <p:sp>
+        <p:nvSpPr>
+          <p:cNvPr id="3" name="Text 0"/>
+          <p:cNvSpPr/>
+          <p:nvPr>
+            <p:ph idx="101" type="title" hasCustomPrompt="1"/>
+          </p:nvPr>
+        </p:nvSpPr>
+        <p:spPr>
+          <a:xfrm>
+            <a:off x="731520" y="2926080"/>
+            <a:ext cx="10698480" cy="914400"/>
+          </a:xfrm>
+          <a:prstGeom prst="rect">
+            <a:avLst/>
+          </a:prstGeom>
+          <a:noFill/>
+          <a:ln/>
+        </p:spPr>
+        <p:txBody>
+          <a:bodyPr wrap="square" lIns="0" tIns="0" rIns="0" bIns="0" rtlCol="0"/>
+          <a:lstStyle/>
+          <a:p>
+            <a:pPr algn="l" indent="0" marL="0">
+              <a:buNone/>
+            </a:pPr>
+            <a:r>
+              <a:rPr lang="en-US" sz="3600" b="1" dirty="0">
+                <a:solidFill>
+                  <a:schemeClr val="bg1"/>
+                </a:solidFill>
+              </a:rPr>
+              <a:t>改訂版：指導型M&amp;A部門サービス</a:t>
+            </a:r>
+            <a:endParaRPr lang="en-US" sz="3600" dirty="0"/>
+          </a:p>
+        </p:txBody>
+      </p:sp>
+      <p:sp>
+        <p:nvSpPr>
+          <p:cNvPr id="4" name="Text 0"/>
+          <p:cNvSpPr/>
+          <p:nvPr>
+            <p:ph idx="102" type="body" hasCustomPrompt="1"/>
+          </p:nvPr>
+        </p:nvSpPr>
+        <p:spPr>
+          <a:xfrm>
+            <a:off x="731520" y="3931920"/>
+            <a:ext cx="10698480" cy="731520"/>
+          </a:xfrm>
+          <a:prstGeom prst="rect">
+            <a:avLst/>
+          </a:prstGeom>
+          <a:noFill/>
+          <a:ln/>
+        </p:spPr>
+        <p:txBody>
+          <a:bodyPr wrap="square" lIns="0" tIns="0" rIns="0" bIns="0" rtlCol="0"/>
+          <a:lstStyle/>
+          <a:p>
+            <a:pPr indent="0" marL="0">
+              <a:buNone/>
+            </a:pPr>
+            <a:r>
+              <a:rPr lang="en-US" sz="1800" dirty="0">
+                <a:solidFill>
+                  <a:schemeClr val="accent5"/>
+                </a:solidFill>
+              </a:rPr>
+              <a:t>49戦で身につけた手順を、お客様の担当者に移植する</a:t>
+            </a:r>
+            <a:endParaRPr lang="en-US" sz="1800" dirty="0"/>
+          </a:p>
+        </p:txBody>
+      </p:sp>
+    </p:spTree>
+  </p:cSld>
+  <p:clrMapOvr>
+    <a:masterClrMapping/>
+  </p:clrMapOvr>
+</p:sld>
+</file>
+
+<file path=ppt/slides/slide26.xml><?xml version="1.0" encoding="utf-8"?>
+<p:sld xmlns:a="http://schemas.openxmlformats.org/drawingml/2006/main" xmlns:r="http://schemas.openxmlformats.org/officeDocument/2006/relationships" xmlns:p="http://schemas.openxmlformats.org/presentationml/2006/main">
+  <p:cSld name="Slide 26">
+    <p:spTree>
+      <p:nvGrpSpPr>
+        <p:cNvPr id="1" name=""/>
+        <p:cNvGrpSpPr/>
+        <p:nvPr/>
+      </p:nvGrpSpPr>
+      <p:grpSpPr>
+        <a:xfrm>
+          <a:off x="0" y="0"/>
+          <a:ext cx="0" cy="0"/>
+          <a:chOff x="0" y="0"/>
+          <a:chExt cx="0" cy="0"/>
+        </a:xfrm>
+      </p:grpSpPr>
+      <p:sp>
+        <p:nvSpPr>
+          <p:cNvPr id="2" name="Text 0"/>
+          <p:cNvSpPr/>
+          <p:nvPr>
             <p:ph idx="100" type="title" hasCustomPrompt="1"/>
           </p:nvPr>
         </p:nvSpPr>
         <p:spPr>
           <a:xfrm>
-            <a:off x="731520" y="1920240"/>
-            <a:ext cx="10698480" cy="1554480"/>
+            <a:off x="548640" y="320040"/>
+            <a:ext cx="11064240" cy="685800"/>
           </a:xfrm>
           <a:prstGeom prst="rect">
             <a:avLst/>
@@ -19641,21 +20414,21 @@
           <a:ln/>
         </p:spPr>
         <p:txBody>
-          <a:bodyPr wrap="square" lIns="0" tIns="0" rIns="0" bIns="0" rtlCol="0" anchor="b"/>
+          <a:bodyPr wrap="square" lIns="0" tIns="0" rIns="0" bIns="0" rtlCol="0" anchor="ctr"/>
           <a:lstStyle/>
           <a:p>
             <a:pPr algn="l" indent="0" marL="0">
               <a:buNone/>
             </a:pPr>
             <a:r>
-              <a:rPr lang="en-US" sz="4000" b="1" dirty="0">
-                <a:solidFill>
-                  <a:schemeClr val="bg1"/>
-                </a:solidFill>
-              </a:rPr>
-              <a:t>情報を売るな、成果を売れ。</a:t>
-            </a:r>
-            <a:endParaRPr lang="en-US" sz="4000" dirty="0"/>
+              <a:rPr lang="en-US" sz="2600" b="1" dirty="0">
+                <a:solidFill>
+                  <a:schemeClr val="tx2"/>
+                </a:solidFill>
+              </a:rPr>
+              <a:t>創業の理由：M&amp;Aで不幸になる人を、これ以上増やさない</a:t>
+            </a:r>
+            <a:endParaRPr lang="en-US" sz="2600" dirty="0"/>
           </a:p>
         </p:txBody>
       </p:sp>
@@ -19669,8 +20442,8 @@
         </p:nvSpPr>
         <p:spPr>
           <a:xfrm>
-            <a:off x="731520" y="3657600"/>
-            <a:ext cx="10698480" cy="1005840"/>
+            <a:off x="548640" y="1005840"/>
+            <a:ext cx="11064240" cy="411480"/>
           </a:xfrm>
           <a:prstGeom prst="rect">
             <a:avLst/>
@@ -19686,29 +20459,750 @@
               <a:buNone/>
             </a:pPr>
             <a:r>
-              <a:rPr lang="en-US" sz="2000" dirty="0">
+              <a:rPr lang="en-US" sz="1500" dirty="0">
+                <a:solidFill>
+                  <a:schemeClr val="accent4"/>
+                </a:solidFill>
+              </a:rPr>
+              <a:t>49戦して分かったのは、M&amp;Aは才能ではなく手順で勝てるということ</a:t>
+            </a:r>
+            <a:endParaRPr lang="en-US" sz="1500" dirty="0"/>
+          </a:p>
+        </p:txBody>
+      </p:sp>
+      <p:sp>
+        <p:nvSpPr>
+          <p:cNvPr id="4" name="story label 1"/>
+          <p:cNvSpPr/>
+          <p:nvPr/>
+        </p:nvSpPr>
+        <p:spPr>
+          <a:xfrm>
+            <a:off x="548640" y="1645920"/>
+            <a:ext cx="1463040" cy="1024128"/>
+          </a:xfrm>
+          <a:prstGeom prst="roundRect">
+            <a:avLst>
+              <a:gd name="adj" fmla="val 7143"/>
+            </a:avLst>
+          </a:prstGeom>
+          <a:solidFill>
+            <a:schemeClr val="tx2"/>
+          </a:solidFill>
+          <a:ln w="12700">
+            <a:solidFill>
+              <a:schemeClr val="tx2"/>
+            </a:solidFill>
+            <a:prstDash val="solid"/>
+          </a:ln>
+        </p:spPr>
+      </p:sp>
+      <p:sp>
+        <p:nvSpPr>
+          <p:cNvPr id="5" name="Text 3"/>
+          <p:cNvSpPr txBox="1"/>
+          <p:nvPr/>
+        </p:nvSpPr>
+        <p:spPr>
+          <a:xfrm>
+            <a:off x="548640" y="1645920"/>
+            <a:ext cx="1463040" cy="1024128"/>
+          </a:xfrm>
+          <a:prstGeom prst="rect">
+            <a:avLst/>
+          </a:prstGeom>
+          <a:noFill/>
+          <a:ln/>
+        </p:spPr>
+        <p:txBody>
+          <a:bodyPr wrap="square" lIns="0" tIns="0" rIns="0" bIns="0" rtlCol="0" anchor="ctr"/>
+          <a:lstStyle/>
+          <a:p>
+            <a:pPr algn="ctr" indent="0" marL="0">
+              <a:buNone/>
+            </a:pPr>
+            <a:r>
+              <a:rPr lang="en-US" sz="1700" b="1" dirty="0">
+                <a:solidFill>
+                  <a:schemeClr val="bg1"/>
+                </a:solidFill>
+              </a:rPr>
+              <a:t>原体験</a:t>
+            </a:r>
+            <a:endParaRPr lang="en-US" sz="1700" dirty="0"/>
+          </a:p>
+        </p:txBody>
+      </p:sp>
+      <p:sp>
+        <p:nvSpPr>
+          <p:cNvPr id="6" name="story body 1"/>
+          <p:cNvSpPr/>
+          <p:nvPr/>
+        </p:nvSpPr>
+        <p:spPr>
+          <a:xfrm>
+            <a:off x="2148840" y="1645920"/>
+            <a:ext cx="5120640" cy="1024128"/>
+          </a:xfrm>
+          <a:prstGeom prst="roundRect">
+            <a:avLst>
+              <a:gd name="adj" fmla="val 7143"/>
+            </a:avLst>
+          </a:prstGeom>
+          <a:solidFill>
+            <a:schemeClr val="bg2"/>
+          </a:solidFill>
+          <a:ln w="12700">
+            <a:solidFill>
+              <a:schemeClr val="bg2"/>
+            </a:solidFill>
+            <a:prstDash val="solid"/>
+          </a:ln>
+        </p:spPr>
+      </p:sp>
+      <p:sp>
+        <p:nvSpPr>
+          <p:cNvPr id="7" name="Text 5"/>
+          <p:cNvSpPr txBox="1"/>
+          <p:nvPr/>
+        </p:nvSpPr>
+        <p:spPr>
+          <a:xfrm>
+            <a:off x="2377440" y="1645920"/>
+            <a:ext cx="4754880" cy="1024128"/>
+          </a:xfrm>
+          <a:prstGeom prst="rect">
+            <a:avLst/>
+          </a:prstGeom>
+          <a:noFill/>
+          <a:ln/>
+        </p:spPr>
+        <p:txBody>
+          <a:bodyPr wrap="square" lIns="0" tIns="0" rIns="0" bIns="0" rtlCol="0" anchor="ctr"/>
+          <a:lstStyle/>
+          <a:p>
+            <a:pPr indent="0" marL="0">
+              <a:buNone/>
+            </a:pPr>
+            <a:r>
+              <a:rPr lang="en-US" sz="1300" dirty="0">
+                <a:solidFill>
+                  <a:schemeClr val="tx1"/>
+                </a:solidFill>
+              </a:rPr>
+              <a:t>自分も負けた。とんかつ11店舗で−1.40億円、ポータル事業で−1.70億円。幸福度の谷は、いつもM&amp;Aの負けと同じ年にあった</a:t>
+            </a:r>
+            <a:endParaRPr lang="en-US" sz="1300" dirty="0"/>
+          </a:p>
+        </p:txBody>
+      </p:sp>
+      <p:sp>
+        <p:nvSpPr>
+          <p:cNvPr id="8" name="story label 2"/>
+          <p:cNvSpPr/>
+          <p:nvPr/>
+        </p:nvSpPr>
+        <p:spPr>
+          <a:xfrm>
+            <a:off x="548640" y="2807208"/>
+            <a:ext cx="1463040" cy="1024128"/>
+          </a:xfrm>
+          <a:prstGeom prst="roundRect">
+            <a:avLst>
+              <a:gd name="adj" fmla="val 7143"/>
+            </a:avLst>
+          </a:prstGeom>
+          <a:solidFill>
+            <a:schemeClr val="tx2"/>
+          </a:solidFill>
+          <a:ln w="12700">
+            <a:solidFill>
+              <a:schemeClr val="tx2"/>
+            </a:solidFill>
+            <a:prstDash val="solid"/>
+          </a:ln>
+        </p:spPr>
+      </p:sp>
+      <p:sp>
+        <p:nvSpPr>
+          <p:cNvPr id="9" name="Text 7"/>
+          <p:cNvSpPr txBox="1"/>
+          <p:nvPr/>
+        </p:nvSpPr>
+        <p:spPr>
+          <a:xfrm>
+            <a:off x="548640" y="2807208"/>
+            <a:ext cx="1463040" cy="1024128"/>
+          </a:xfrm>
+          <a:prstGeom prst="rect">
+            <a:avLst/>
+          </a:prstGeom>
+          <a:noFill/>
+          <a:ln/>
+        </p:spPr>
+        <p:txBody>
+          <a:bodyPr wrap="square" lIns="0" tIns="0" rIns="0" bIns="0" rtlCol="0" anchor="ctr"/>
+          <a:lstStyle/>
+          <a:p>
+            <a:pPr algn="ctr" indent="0" marL="0">
+              <a:buNone/>
+            </a:pPr>
+            <a:r>
+              <a:rPr lang="en-US" sz="1700" b="1" dirty="0">
+                <a:solidFill>
+                  <a:schemeClr val="bg1"/>
+                </a:solidFill>
+              </a:rPr>
+              <a:t>気づき</a:t>
+            </a:r>
+            <a:endParaRPr lang="en-US" sz="1700" dirty="0"/>
+          </a:p>
+        </p:txBody>
+      </p:sp>
+      <p:sp>
+        <p:nvSpPr>
+          <p:cNvPr id="10" name="story body 2"/>
+          <p:cNvSpPr/>
+          <p:nvPr/>
+        </p:nvSpPr>
+        <p:spPr>
+          <a:xfrm>
+            <a:off x="2148840" y="2807208"/>
+            <a:ext cx="5120640" cy="1024128"/>
+          </a:xfrm>
+          <a:prstGeom prst="roundRect">
+            <a:avLst>
+              <a:gd name="adj" fmla="val 7143"/>
+            </a:avLst>
+          </a:prstGeom>
+          <a:solidFill>
+            <a:schemeClr val="bg2"/>
+          </a:solidFill>
+          <a:ln w="12700">
+            <a:solidFill>
+              <a:schemeClr val="bg2"/>
+            </a:solidFill>
+            <a:prstDash val="solid"/>
+          </a:ln>
+        </p:spPr>
+      </p:sp>
+      <p:sp>
+        <p:nvSpPr>
+          <p:cNvPr id="11" name="Text 9"/>
+          <p:cNvSpPr txBox="1"/>
+          <p:nvPr/>
+        </p:nvSpPr>
+        <p:spPr>
+          <a:xfrm>
+            <a:off x="2377440" y="2807208"/>
+            <a:ext cx="4754880" cy="1024128"/>
+          </a:xfrm>
+          <a:prstGeom prst="rect">
+            <a:avLst/>
+          </a:prstGeom>
+          <a:noFill/>
+          <a:ln/>
+        </p:spPr>
+        <p:txBody>
+          <a:bodyPr wrap="square" lIns="0" tIns="0" rIns="0" bIns="0" rtlCol="0" anchor="ctr"/>
+          <a:lstStyle/>
+          <a:p>
+            <a:pPr indent="0" marL="0">
+              <a:buNone/>
+            </a:pPr>
+            <a:r>
+              <a:rPr lang="en-US" sz="1300" dirty="0">
+                <a:solidFill>
+                  <a:schemeClr val="tx1"/>
+                </a:solidFill>
+              </a:rPr>
+              <a:t>負けた理由は才能ではなく、手順を飛ばしたこと。値づけ・PMI責任者・売る時期を、買う前に決めていなかった</a:t>
+            </a:r>
+            <a:endParaRPr lang="en-US" sz="1300" dirty="0"/>
+          </a:p>
+        </p:txBody>
+      </p:sp>
+      <p:sp>
+        <p:nvSpPr>
+          <p:cNvPr id="12" name="story label 3"/>
+          <p:cNvSpPr/>
+          <p:nvPr/>
+        </p:nvSpPr>
+        <p:spPr>
+          <a:xfrm>
+            <a:off x="548640" y="3968496"/>
+            <a:ext cx="1463040" cy="1024128"/>
+          </a:xfrm>
+          <a:prstGeom prst="roundRect">
+            <a:avLst>
+              <a:gd name="adj" fmla="val 7143"/>
+            </a:avLst>
+          </a:prstGeom>
+          <a:solidFill>
+            <a:schemeClr val="tx2"/>
+          </a:solidFill>
+          <a:ln w="12700">
+            <a:solidFill>
+              <a:schemeClr val="tx2"/>
+            </a:solidFill>
+            <a:prstDash val="solid"/>
+          </a:ln>
+        </p:spPr>
+      </p:sp>
+      <p:sp>
+        <p:nvSpPr>
+          <p:cNvPr id="13" name="Text 11"/>
+          <p:cNvSpPr txBox="1"/>
+          <p:nvPr/>
+        </p:nvSpPr>
+        <p:spPr>
+          <a:xfrm>
+            <a:off x="548640" y="3968496"/>
+            <a:ext cx="1463040" cy="1024128"/>
+          </a:xfrm>
+          <a:prstGeom prst="rect">
+            <a:avLst/>
+          </a:prstGeom>
+          <a:noFill/>
+          <a:ln/>
+        </p:spPr>
+        <p:txBody>
+          <a:bodyPr wrap="square" lIns="0" tIns="0" rIns="0" bIns="0" rtlCol="0" anchor="ctr"/>
+          <a:lstStyle/>
+          <a:p>
+            <a:pPr algn="ctr" indent="0" marL="0">
+              <a:buNone/>
+            </a:pPr>
+            <a:r>
+              <a:rPr lang="en-US" sz="1700" b="1" dirty="0">
+                <a:solidFill>
+                  <a:schemeClr val="bg1"/>
+                </a:solidFill>
+              </a:rPr>
+              <a:t>問題</a:t>
+            </a:r>
+            <a:endParaRPr lang="en-US" sz="1700" dirty="0"/>
+          </a:p>
+        </p:txBody>
+      </p:sp>
+      <p:sp>
+        <p:nvSpPr>
+          <p:cNvPr id="14" name="story body 3"/>
+          <p:cNvSpPr/>
+          <p:nvPr/>
+        </p:nvSpPr>
+        <p:spPr>
+          <a:xfrm>
+            <a:off x="2148840" y="3968496"/>
+            <a:ext cx="5120640" cy="1024128"/>
+          </a:xfrm>
+          <a:prstGeom prst="roundRect">
+            <a:avLst>
+              <a:gd name="adj" fmla="val 7143"/>
+            </a:avLst>
+          </a:prstGeom>
+          <a:solidFill>
+            <a:schemeClr val="bg2"/>
+          </a:solidFill>
+          <a:ln w="12700">
+            <a:solidFill>
+              <a:schemeClr val="bg2"/>
+            </a:solidFill>
+            <a:prstDash val="solid"/>
+          </a:ln>
+        </p:spPr>
+      </p:sp>
+      <p:sp>
+        <p:nvSpPr>
+          <p:cNvPr id="15" name="Text 13"/>
+          <p:cNvSpPr txBox="1"/>
+          <p:nvPr/>
+        </p:nvSpPr>
+        <p:spPr>
+          <a:xfrm>
+            <a:off x="2377440" y="3968496"/>
+            <a:ext cx="4754880" cy="1024128"/>
+          </a:xfrm>
+          <a:prstGeom prst="rect">
+            <a:avLst/>
+          </a:prstGeom>
+          <a:noFill/>
+          <a:ln/>
+        </p:spPr>
+        <p:txBody>
+          <a:bodyPr wrap="square" lIns="0" tIns="0" rIns="0" bIns="0" rtlCol="0" anchor="ctr"/>
+          <a:lstStyle/>
+          <a:p>
+            <a:pPr indent="0" marL="0">
+              <a:buNone/>
+            </a:pPr>
+            <a:r>
+              <a:rPr lang="en-US" sz="1300" dirty="0">
+                <a:solidFill>
+                  <a:schemeClr val="tx1"/>
+                </a:solidFill>
+              </a:rPr>
+              <a:t>仲介の仕事は成約まで。買った後に不幸になる買い手を、誰も止めてくれない</a:t>
+            </a:r>
+            <a:endParaRPr lang="en-US" sz="1300" dirty="0"/>
+          </a:p>
+        </p:txBody>
+      </p:sp>
+      <p:sp>
+        <p:nvSpPr>
+          <p:cNvPr id="16" name="story label 4"/>
+          <p:cNvSpPr/>
+          <p:nvPr/>
+        </p:nvSpPr>
+        <p:spPr>
+          <a:xfrm>
+            <a:off x="548640" y="5129784"/>
+            <a:ext cx="1463040" cy="1024128"/>
+          </a:xfrm>
+          <a:prstGeom prst="roundRect">
+            <a:avLst>
+              <a:gd name="adj" fmla="val 7143"/>
+            </a:avLst>
+          </a:prstGeom>
+          <a:solidFill>
+            <a:schemeClr val="accent1"/>
+          </a:solidFill>
+          <a:ln w="12700">
+            <a:solidFill>
+              <a:schemeClr val="accent1"/>
+            </a:solidFill>
+            <a:prstDash val="solid"/>
+          </a:ln>
+        </p:spPr>
+      </p:sp>
+      <p:sp>
+        <p:nvSpPr>
+          <p:cNvPr id="17" name="Text 15"/>
+          <p:cNvSpPr txBox="1"/>
+          <p:nvPr/>
+        </p:nvSpPr>
+        <p:spPr>
+          <a:xfrm>
+            <a:off x="548640" y="5129784"/>
+            <a:ext cx="1463040" cy="1024128"/>
+          </a:xfrm>
+          <a:prstGeom prst="rect">
+            <a:avLst/>
+          </a:prstGeom>
+          <a:noFill/>
+          <a:ln/>
+        </p:spPr>
+        <p:txBody>
+          <a:bodyPr wrap="square" lIns="0" tIns="0" rIns="0" bIns="0" rtlCol="0" anchor="ctr"/>
+          <a:lstStyle/>
+          <a:p>
+            <a:pPr algn="ctr" indent="0" marL="0">
+              <a:buNone/>
+            </a:pPr>
+            <a:r>
+              <a:rPr lang="en-US" sz="1700" b="1" dirty="0">
+                <a:solidFill>
+                  <a:schemeClr val="bg1"/>
+                </a:solidFill>
+              </a:rPr>
+              <a:t>だから</a:t>
+            </a:r>
+            <a:endParaRPr lang="en-US" sz="1700" dirty="0"/>
+          </a:p>
+        </p:txBody>
+      </p:sp>
+      <p:sp>
+        <p:nvSpPr>
+          <p:cNvPr id="18" name="story body 4"/>
+          <p:cNvSpPr/>
+          <p:nvPr/>
+        </p:nvSpPr>
+        <p:spPr>
+          <a:xfrm>
+            <a:off x="2148840" y="5129784"/>
+            <a:ext cx="5120640" cy="1024128"/>
+          </a:xfrm>
+          <a:prstGeom prst="roundRect">
+            <a:avLst>
+              <a:gd name="adj" fmla="val 7143"/>
+            </a:avLst>
+          </a:prstGeom>
+          <a:solidFill>
+            <a:schemeClr val="bg2"/>
+          </a:solidFill>
+          <a:ln w="12700">
+            <a:solidFill>
+              <a:schemeClr val="bg2"/>
+            </a:solidFill>
+            <a:prstDash val="solid"/>
+          </a:ln>
+        </p:spPr>
+      </p:sp>
+      <p:sp>
+        <p:nvSpPr>
+          <p:cNvPr id="19" name="Text 17"/>
+          <p:cNvSpPr txBox="1"/>
+          <p:nvPr/>
+        </p:nvSpPr>
+        <p:spPr>
+          <a:xfrm>
+            <a:off x="2377440" y="5129784"/>
+            <a:ext cx="4754880" cy="1024128"/>
+          </a:xfrm>
+          <a:prstGeom prst="rect">
+            <a:avLst/>
+          </a:prstGeom>
+          <a:noFill/>
+          <a:ln/>
+        </p:spPr>
+        <p:txBody>
+          <a:bodyPr wrap="square" lIns="0" tIns="0" rIns="0" bIns="0" rtlCol="0" anchor="ctr"/>
+          <a:lstStyle/>
+          <a:p>
+            <a:pPr indent="0" marL="0">
+              <a:buNone/>
+            </a:pPr>
+            <a:r>
+              <a:rPr lang="en-US" sz="1300" dirty="0">
+                <a:solidFill>
+                  <a:schemeClr val="tx1"/>
+                </a:solidFill>
+              </a:rPr>
+              <a:t>やり方を教え、買い手の側に立つ。担当者が自分で勝てるようになるまで伴走する</a:t>
+            </a:r>
+            <a:endParaRPr lang="en-US" sz="1300" dirty="0"/>
+          </a:p>
+        </p:txBody>
+      </p:sp>
+      <p:sp>
+        <p:nvSpPr>
+          <p:cNvPr id="20" name="founder quote"/>
+          <p:cNvSpPr/>
+          <p:nvPr/>
+        </p:nvSpPr>
+        <p:spPr>
+          <a:xfrm>
+            <a:off x="7589520" y="1645920"/>
+            <a:ext cx="4023360" cy="4507992"/>
+          </a:xfrm>
+          <a:prstGeom prst="roundRect">
+            <a:avLst>
+              <a:gd name="adj" fmla="val 1818"/>
+            </a:avLst>
+          </a:prstGeom>
+          <a:solidFill>
+            <a:schemeClr val="tx2"/>
+          </a:solidFill>
+          <a:ln w="12700">
+            <a:solidFill>
+              <a:schemeClr val="tx2"/>
+            </a:solidFill>
+            <a:prstDash val="solid"/>
+          </a:ln>
+        </p:spPr>
+      </p:sp>
+      <p:sp>
+        <p:nvSpPr>
+          <p:cNvPr id="21" name="Text 19"/>
+          <p:cNvSpPr txBox="1"/>
+          <p:nvPr/>
+        </p:nvSpPr>
+        <p:spPr>
+          <a:xfrm>
+            <a:off x="7909560" y="1874520"/>
+            <a:ext cx="3474720" cy="4114800"/>
+          </a:xfrm>
+          <a:prstGeom prst="rect">
+            <a:avLst/>
+          </a:prstGeom>
+          <a:noFill/>
+          <a:ln/>
+        </p:spPr>
+        <p:txBody>
+          <a:bodyPr wrap="square" lIns="0" tIns="0" rIns="0" bIns="0" rtlCol="0" anchor="t"/>
+          <a:lstStyle/>
+          <a:p>
+            <a:pPr indent="0" marL="0">
+              <a:buNone/>
+            </a:pPr>
+            <a:r>
+              <a:rPr lang="en-US" sz="2200" b="1" dirty="0">
+                <a:solidFill>
+                  <a:schemeClr val="bg1"/>
+                </a:solidFill>
+              </a:rPr>
+              <a:t>やり方さえ知っていれば、</a:t>
+            </a:r>
+            <a:endParaRPr lang="en-US" sz="1400" dirty="0"/>
+          </a:p>
+          <a:p>
+            <a:pPr indent="0" marL="0">
+              <a:buNone/>
+            </a:pPr>
+            <a:r>
+              <a:rPr lang="en-US" sz="2200" b="1" dirty="0">
+                <a:solidFill>
+                  <a:schemeClr val="accent3"/>
+                </a:solidFill>
+              </a:rPr>
+              <a:t>M&amp;Aは成功できる。</a:t>
+            </a:r>
+            <a:endParaRPr lang="en-US" sz="1400" dirty="0"/>
+          </a:p>
+          <a:p>
+            <a:pPr indent="0" marL="0">
+              <a:buNone/>
+            </a:pPr>
+            <a:r>
+              <a:rPr lang="en-US" sz="1000" dirty="0">
+                <a:solidFill>
+                  <a:schemeClr val="tx1"/>
+                </a:solidFill>
+              </a:rPr>
+              <a:t> </a:t>
+            </a:r>
+            <a:endParaRPr lang="en-US" sz="1400" dirty="0"/>
+          </a:p>
+          <a:p>
+            <a:pPr indent="0" marL="0">
+              <a:buNone/>
+            </a:pPr>
+            <a:r>
+              <a:rPr lang="en-US" sz="1400" dirty="0">
+                <a:solidFill>
+                  <a:schemeClr val="bg1"/>
+                </a:solidFill>
+              </a:rPr>
+              <a:t>失敗して不幸になる人を増やしたくない。成功してほしい。その手順を、自分の49戦の勝ちと負けから全部渡します。</a:t>
+            </a:r>
+            <a:endParaRPr lang="en-US" sz="1400" dirty="0"/>
+          </a:p>
+          <a:p>
+            <a:pPr indent="0" marL="0">
+              <a:buNone/>
+            </a:pPr>
+            <a:r>
+              <a:rPr lang="en-US" sz="1000" dirty="0">
+                <a:solidFill>
+                  <a:schemeClr val="tx1"/>
+                </a:solidFill>
+              </a:rPr>
+              <a:t> </a:t>
+            </a:r>
+            <a:endParaRPr lang="en-US" sz="1400" dirty="0"/>
+          </a:p>
+          <a:p>
+            <a:pPr indent="0" marL="0">
+              <a:buNone/>
+            </a:pPr>
+            <a:r>
+              <a:rPr lang="en-US" sz="1500" b="1" dirty="0">
                 <a:solidFill>
                   <a:schemeClr val="accent5"/>
                 </a:solidFill>
               </a:rPr>
-              <a:t>買い手の味方として、良い会社を適正価格で買い、成果を出すところまで</a:t>
-            </a:r>
-            <a:endParaRPr lang="en-US" sz="2000" dirty="0"/>
-          </a:p>
-        </p:txBody>
-      </p:sp>
-      <p:sp>
-        <p:nvSpPr>
-          <p:cNvPr id="4" name="Text 0"/>
+              <a:t>中野 邦人</a:t>
+            </a:r>
+            <a:endParaRPr lang="en-US" sz="1400" dirty="0"/>
+          </a:p>
+          <a:p>
+            <a:pPr indent="0" marL="0">
+              <a:buNone/>
+            </a:pPr>
+            <a:r>
+              <a:rPr lang="en-US" sz="1100" dirty="0">
+                <a:solidFill>
+                  <a:schemeClr val="accent5"/>
+                </a:solidFill>
+              </a:rPr>
+              <a:t>株式会社WineBank 代表取締役／株式会社あどばる 代表取締役会長</a:t>
+            </a:r>
+            <a:endParaRPr lang="en-US" sz="1400" dirty="0"/>
+          </a:p>
+        </p:txBody>
+      </p:sp>
+      <p:sp>
+        <p:nvSpPr>
+          <p:cNvPr id="25" name="Slide Number Placeholder 0"/>
+          <p:cNvSpPr>
+            <a:spLocks noGrp="1"/>
+          </p:cNvSpPr>
+          <p:nvPr>
+            <p:ph type="sldNum" sz="quarter" idx="4294967295"/>
+          </p:nvPr>
+        </p:nvSpPr>
+        <p:spPr>
+          <a:xfrm>
+            <a:off x="11155680" y="6419088"/>
+            <a:ext cx="457200" cy="274320"/>
+          </a:xfrm>
+          <a:prstGeom prst="rect">
+            <a:avLst/>
+          </a:prstGeom>
+          <a:extLst>
+            <a:ext uri="{C572A759-6A51-4108-AA02-DFA0A04FC94B}">
+              <ma14:wrappingTextBoxFlag xmlns:ma14="http://schemas.microsoft.com/office/mac/drawingml/2011/main" val="0"/>
+            </a:ext>
+          </a:extLst>
+        </p:spPr>
+        <p:txBody>
+          <a:bodyPr/>
+          <a:lstStyle>
+            <a:lvl1pPr>
+              <a:defRPr sz="900">
+                <a:solidFill>
+                  <a:schemeClr val="accent4"/>
+                </a:solidFill>
+              </a:defRPr>
+            </a:lvl1pPr>
+          </a:lstStyle>
+          <a:p>
+            <a:pPr algn="r"/>
+            <a:fld id="{F7021451-1387-4CA6-816F-3879F97B5CBC}" type="slidenum">
+              <a:rPr b="0" lang="en-US"/>
+              <a:t>26</a:t>
+            </a:fld>
+            <a:endParaRPr lang="en-US"/>
+          </a:p>
+        </p:txBody>
+      </p:sp>
+    </p:spTree>
+  </p:cSld>
+  <p:clrMapOvr>
+    <a:masterClrMapping/>
+  </p:clrMapOvr>
+</p:sld>
+</file>
+
+<file path=ppt/slides/slide27.xml><?xml version="1.0" encoding="utf-8"?>
+<p:sld xmlns:a="http://schemas.openxmlformats.org/drawingml/2006/main" xmlns:r="http://schemas.openxmlformats.org/officeDocument/2006/relationships" xmlns:p="http://schemas.openxmlformats.org/presentationml/2006/main">
+  <p:cSld name="Slide 27">
+    <p:spTree>
+      <p:nvGrpSpPr>
+        <p:cNvPr id="1" name=""/>
+        <p:cNvGrpSpPr/>
+        <p:nvPr/>
+      </p:nvGrpSpPr>
+      <p:grpSpPr>
+        <a:xfrm>
+          <a:off x="0" y="0"/>
+          <a:ext cx="0" cy="0"/>
+          <a:chOff x="0" y="0"/>
+          <a:chExt cx="0" cy="0"/>
+        </a:xfrm>
+      </p:grpSpPr>
+      <p:sp>
+        <p:nvSpPr>
+          <p:cNvPr id="2" name="Text 0"/>
           <p:cNvSpPr/>
           <p:nvPr>
-            <p:ph idx="102" type="body" hasCustomPrompt="1"/>
+            <p:ph idx="100" type="title" hasCustomPrompt="1"/>
           </p:nvPr>
         </p:nvSpPr>
         <p:spPr>
           <a:xfrm>
-            <a:off x="731520" y="5760720"/>
-            <a:ext cx="10698480" cy="457200"/>
+            <a:off x="548640" y="320040"/>
+            <a:ext cx="11064240" cy="685800"/>
           </a:xfrm>
           <a:prstGeom prst="rect">
             <a:avLst/>
@@ -19717,21 +21211,3520 @@
           <a:ln/>
         </p:spPr>
         <p:txBody>
-          <a:bodyPr wrap="square" lIns="0" tIns="0" rIns="0" bIns="0" rtlCol="0"/>
+          <a:bodyPr wrap="square" lIns="0" tIns="0" rIns="0" bIns="0" rtlCol="0" anchor="ctr"/>
+          <a:lstStyle/>
+          <a:p>
+            <a:pPr algn="l" indent="0" marL="0">
+              <a:buNone/>
+            </a:pPr>
+            <a:r>
+              <a:rPr lang="en-US" sz="2600" b="1" dirty="0">
+                <a:solidFill>
+                  <a:schemeClr val="tx2"/>
+                </a:solidFill>
+              </a:rPr>
+              <a:t>信用の裏付け：49戦の実績（勝ちも負けも、すべて自社の実案件）</a:t>
+            </a:r>
+            <a:endParaRPr lang="en-US" sz="2600" dirty="0"/>
+          </a:p>
+        </p:txBody>
+      </p:sp>
+      <p:sp>
+        <p:nvSpPr>
+          <p:cNvPr id="3" name="Text 0"/>
+          <p:cNvSpPr/>
+          <p:nvPr>
+            <p:ph idx="101" type="body" hasCustomPrompt="1"/>
+          </p:nvPr>
+        </p:nvSpPr>
+        <p:spPr>
+          <a:xfrm>
+            <a:off x="548640" y="1005840"/>
+            <a:ext cx="11064240" cy="411480"/>
+          </a:xfrm>
+          <a:prstGeom prst="rect">
+            <a:avLst/>
+          </a:prstGeom>
+          <a:noFill/>
+          <a:ln/>
+        </p:spPr>
+        <p:txBody>
+          <a:bodyPr wrap="square" lIns="0" tIns="0" rIns="0" bIns="0" rtlCol="0" anchor="t"/>
           <a:lstStyle/>
           <a:p>
             <a:pPr indent="0" marL="0">
               <a:buNone/>
             </a:pPr>
             <a:r>
+              <a:rPr lang="en-US" sz="1500" dirty="0">
+                <a:solidFill>
+                  <a:schemeClr val="accent4"/>
+                </a:solidFill>
+              </a:rPr>
+              <a:t>2011年3月〜現在。仲介ではなく、自分のお金で買い、売り、立て直してきた</a:t>
+            </a:r>
+            <a:endParaRPr lang="en-US" sz="1500" dirty="0"/>
+          </a:p>
+        </p:txBody>
+      </p:sp>
+      <p:sp>
+        <p:nvSpPr>
+          <p:cNvPr id="4" name="record 1"/>
+          <p:cNvSpPr/>
+          <p:nvPr/>
+        </p:nvSpPr>
+        <p:spPr>
+          <a:xfrm>
+            <a:off x="548640" y="1645920"/>
+            <a:ext cx="2606040" cy="2057400"/>
+          </a:xfrm>
+          <a:prstGeom prst="roundRect">
+            <a:avLst>
+              <a:gd name="adj" fmla="val 3556"/>
+            </a:avLst>
+          </a:prstGeom>
+          <a:solidFill>
+            <a:schemeClr val="bg2"/>
+          </a:solidFill>
+          <a:ln w="12700">
+            <a:solidFill>
+              <a:schemeClr val="bg2"/>
+            </a:solidFill>
+            <a:prstDash val="solid"/>
+          </a:ln>
+        </p:spPr>
+      </p:sp>
+      <p:sp>
+        <p:nvSpPr>
+          <p:cNvPr id="5" name="Text 3"/>
+          <p:cNvSpPr txBox="1"/>
+          <p:nvPr/>
+        </p:nvSpPr>
+        <p:spPr>
+          <a:xfrm>
+            <a:off x="731520" y="1783080"/>
+            <a:ext cx="2240280" cy="914400"/>
+          </a:xfrm>
+          <a:prstGeom prst="rect">
+            <a:avLst/>
+          </a:prstGeom>
+          <a:noFill/>
+          <a:ln/>
+        </p:spPr>
+        <p:txBody>
+          <a:bodyPr wrap="square" lIns="0" tIns="0" rIns="0" bIns="0" rtlCol="0" anchor="ctr"/>
+          <a:lstStyle/>
+          <a:p>
+            <a:pPr algn="ctr" indent="0" marL="0">
+              <a:buNone/>
+            </a:pPr>
+            <a:r>
+              <a:rPr lang="en-US" sz="3800" b="1" dirty="0">
+                <a:solidFill>
+                  <a:schemeClr val="tx2"/>
+                </a:solidFill>
+              </a:rPr>
+              <a:t>約50</a:t>
+            </a:r>
+            <a:pPr algn="ctr" indent="0" marL="0">
+              <a:buNone/>
+            </a:pPr>
+            <a:r>
+              <a:rPr lang="en-US" sz="1500" b="1" dirty="0">
+                <a:solidFill>
+                  <a:schemeClr val="tx2"/>
+                </a:solidFill>
+              </a:rPr>
+              <a:t>案件</a:t>
+            </a:r>
+            <a:endParaRPr lang="en-US" sz="1400" dirty="0"/>
+          </a:p>
+        </p:txBody>
+      </p:sp>
+      <p:sp>
+        <p:nvSpPr>
+          <p:cNvPr id="6" name="Text 4"/>
+          <p:cNvSpPr txBox="1"/>
+          <p:nvPr/>
+        </p:nvSpPr>
+        <p:spPr>
+          <a:xfrm>
+            <a:off x="731520" y="2743200"/>
+            <a:ext cx="2240280" cy="868680"/>
+          </a:xfrm>
+          <a:prstGeom prst="rect">
+            <a:avLst/>
+          </a:prstGeom>
+          <a:noFill/>
+          <a:ln/>
+        </p:spPr>
+        <p:txBody>
+          <a:bodyPr wrap="square" lIns="0" tIns="0" rIns="0" bIns="0" rtlCol="0" anchor="t"/>
+          <a:lstStyle/>
+          <a:p>
+            <a:pPr algn="ctr" indent="0" marL="0">
+              <a:buNone/>
+            </a:pPr>
+            <a:r>
               <a:rPr lang="en-US" sz="1200" dirty="0">
                 <a:solidFill>
-                  <a:schemeClr val="bg2"/>
-                </a:solidFill>
-              </a:rPr>
-              <a:t>Confidential｜検討用ドラフト</a:t>
+                  <a:schemeClr val="accent4"/>
+                </a:solidFill>
+              </a:rPr>
+              <a:t>買収28／売却21／出資2</a:t>
             </a:r>
             <a:endParaRPr lang="en-US" sz="1200" dirty="0"/>
+          </a:p>
+        </p:txBody>
+      </p:sp>
+      <p:sp>
+        <p:nvSpPr>
+          <p:cNvPr id="7" name="record 2"/>
+          <p:cNvSpPr/>
+          <p:nvPr/>
+        </p:nvSpPr>
+        <p:spPr>
+          <a:xfrm>
+            <a:off x="3346704" y="1645920"/>
+            <a:ext cx="2606040" cy="2057400"/>
+          </a:xfrm>
+          <a:prstGeom prst="roundRect">
+            <a:avLst>
+              <a:gd name="adj" fmla="val 3556"/>
+            </a:avLst>
+          </a:prstGeom>
+          <a:solidFill>
+            <a:schemeClr val="bg2"/>
+          </a:solidFill>
+          <a:ln w="12700">
+            <a:solidFill>
+              <a:schemeClr val="bg2"/>
+            </a:solidFill>
+            <a:prstDash val="solid"/>
+          </a:ln>
+        </p:spPr>
+      </p:sp>
+      <p:sp>
+        <p:nvSpPr>
+          <p:cNvPr id="8" name="Text 6"/>
+          <p:cNvSpPr txBox="1"/>
+          <p:nvPr/>
+        </p:nvSpPr>
+        <p:spPr>
+          <a:xfrm>
+            <a:off x="3529584" y="1783080"/>
+            <a:ext cx="2240280" cy="914400"/>
+          </a:xfrm>
+          <a:prstGeom prst="rect">
+            <a:avLst/>
+          </a:prstGeom>
+          <a:noFill/>
+          <a:ln/>
+        </p:spPr>
+        <p:txBody>
+          <a:bodyPr wrap="square" lIns="0" tIns="0" rIns="0" bIns="0" rtlCol="0" anchor="ctr"/>
+          <a:lstStyle/>
+          <a:p>
+            <a:pPr algn="ctr" indent="0" marL="0">
+              <a:buNone/>
+            </a:pPr>
+            <a:r>
+              <a:rPr lang="en-US" sz="3800" b="1" dirty="0">
+                <a:solidFill>
+                  <a:schemeClr val="tx2"/>
+                </a:solidFill>
+              </a:rPr>
+              <a:t>25.2</a:t>
+            </a:r>
+            <a:pPr algn="ctr" indent="0" marL="0">
+              <a:buNone/>
+            </a:pPr>
+            <a:r>
+              <a:rPr lang="en-US" sz="1500" b="1" dirty="0">
+                <a:solidFill>
+                  <a:schemeClr val="tx2"/>
+                </a:solidFill>
+              </a:rPr>
+              <a:t>億円</a:t>
+            </a:r>
+            <a:endParaRPr lang="en-US" sz="1400" dirty="0"/>
+          </a:p>
+        </p:txBody>
+      </p:sp>
+      <p:sp>
+        <p:nvSpPr>
+          <p:cNvPr id="9" name="Text 7"/>
+          <p:cNvSpPr txBox="1"/>
+          <p:nvPr/>
+        </p:nvSpPr>
+        <p:spPr>
+          <a:xfrm>
+            <a:off x="3529584" y="2743200"/>
+            <a:ext cx="2240280" cy="868680"/>
+          </a:xfrm>
+          <a:prstGeom prst="rect">
+            <a:avLst/>
+          </a:prstGeom>
+          <a:noFill/>
+          <a:ln/>
+        </p:spPr>
+        <p:txBody>
+          <a:bodyPr wrap="square" lIns="0" tIns="0" rIns="0" bIns="0" rtlCol="0" anchor="t"/>
+          <a:lstStyle/>
+          <a:p>
+            <a:pPr algn="ctr" indent="0" marL="0">
+              <a:buNone/>
+            </a:pPr>
+            <a:r>
+              <a:rPr lang="en-US" sz="1200" dirty="0">
+                <a:solidFill>
+                  <a:schemeClr val="accent4"/>
+                </a:solidFill>
+              </a:rPr>
+              <a:t>支払った買収総額（回収 16.7億円）</a:t>
+            </a:r>
+            <a:endParaRPr lang="en-US" sz="1200" dirty="0"/>
+          </a:p>
+        </p:txBody>
+      </p:sp>
+      <p:sp>
+        <p:nvSpPr>
+          <p:cNvPr id="10" name="record 3"/>
+          <p:cNvSpPr/>
+          <p:nvPr/>
+        </p:nvSpPr>
+        <p:spPr>
+          <a:xfrm>
+            <a:off x="6144768" y="1645920"/>
+            <a:ext cx="2606040" cy="2057400"/>
+          </a:xfrm>
+          <a:prstGeom prst="roundRect">
+            <a:avLst>
+              <a:gd name="adj" fmla="val 3556"/>
+            </a:avLst>
+          </a:prstGeom>
+          <a:solidFill>
+            <a:schemeClr val="bg2"/>
+          </a:solidFill>
+          <a:ln w="12700">
+            <a:solidFill>
+              <a:schemeClr val="bg2"/>
+            </a:solidFill>
+            <a:prstDash val="solid"/>
+          </a:ln>
+        </p:spPr>
+      </p:sp>
+      <p:sp>
+        <p:nvSpPr>
+          <p:cNvPr id="11" name="Text 9"/>
+          <p:cNvSpPr txBox="1"/>
+          <p:nvPr/>
+        </p:nvSpPr>
+        <p:spPr>
+          <a:xfrm>
+            <a:off x="6327648" y="1783080"/>
+            <a:ext cx="2240280" cy="914400"/>
+          </a:xfrm>
+          <a:prstGeom prst="rect">
+            <a:avLst/>
+          </a:prstGeom>
+          <a:noFill/>
+          <a:ln/>
+        </p:spPr>
+        <p:txBody>
+          <a:bodyPr wrap="square" lIns="0" tIns="0" rIns="0" bIns="0" rtlCol="0" anchor="ctr"/>
+          <a:lstStyle/>
+          <a:p>
+            <a:pPr algn="ctr" indent="0" marL="0">
+              <a:buNone/>
+            </a:pPr>
+            <a:r>
+              <a:rPr lang="en-US" sz="3800" b="1" dirty="0">
+                <a:solidFill>
+                  <a:schemeClr val="tx2"/>
+                </a:solidFill>
+              </a:rPr>
+              <a:t>0.34</a:t>
+            </a:r>
+            <a:pPr algn="ctr" indent="0" marL="0">
+              <a:buNone/>
+            </a:pPr>
+            <a:r>
+              <a:rPr lang="en-US" sz="1500" b="1" dirty="0">
+                <a:solidFill>
+                  <a:schemeClr val="tx2"/>
+                </a:solidFill>
+              </a:rPr>
+              <a:t>倍</a:t>
+            </a:r>
+            <a:endParaRPr lang="en-US" sz="1400" dirty="0"/>
+          </a:p>
+        </p:txBody>
+      </p:sp>
+      <p:sp>
+        <p:nvSpPr>
+          <p:cNvPr id="12" name="Text 10"/>
+          <p:cNvSpPr txBox="1"/>
+          <p:nvPr/>
+        </p:nvSpPr>
+        <p:spPr>
+          <a:xfrm>
+            <a:off x="6327648" y="2743200"/>
+            <a:ext cx="2240280" cy="868680"/>
+          </a:xfrm>
+          <a:prstGeom prst="rect">
+            <a:avLst/>
+          </a:prstGeom>
+          <a:noFill/>
+          <a:ln/>
+        </p:spPr>
+        <p:txBody>
+          <a:bodyPr wrap="square" lIns="0" tIns="0" rIns="0" bIns="0" rtlCol="0" anchor="t"/>
+          <a:lstStyle/>
+          <a:p>
+            <a:pPr algn="ctr" indent="0" marL="0">
+              <a:buNone/>
+            </a:pPr>
+            <a:r>
+              <a:rPr lang="en-US" sz="1200" dirty="0">
+                <a:solidFill>
+                  <a:schemeClr val="accent4"/>
+                </a:solidFill>
+              </a:rPr>
+              <a:t>売上高倍率。売上74億円分の事業を25.2億円で取得</a:t>
+            </a:r>
+            <a:endParaRPr lang="en-US" sz="1200" dirty="0"/>
+          </a:p>
+        </p:txBody>
+      </p:sp>
+      <p:sp>
+        <p:nvSpPr>
+          <p:cNvPr id="13" name="record 4"/>
+          <p:cNvSpPr/>
+          <p:nvPr/>
+        </p:nvSpPr>
+        <p:spPr>
+          <a:xfrm>
+            <a:off x="8942832" y="1645920"/>
+            <a:ext cx="2606040" cy="2057400"/>
+          </a:xfrm>
+          <a:prstGeom prst="roundRect">
+            <a:avLst>
+              <a:gd name="adj" fmla="val 3556"/>
+            </a:avLst>
+          </a:prstGeom>
+          <a:solidFill>
+            <a:schemeClr val="bg2"/>
+          </a:solidFill>
+          <a:ln w="12700">
+            <a:solidFill>
+              <a:schemeClr val="bg2"/>
+            </a:solidFill>
+            <a:prstDash val="solid"/>
+          </a:ln>
+        </p:spPr>
+      </p:sp>
+      <p:sp>
+        <p:nvSpPr>
+          <p:cNvPr id="14" name="Text 12"/>
+          <p:cNvSpPr txBox="1"/>
+          <p:nvPr/>
+        </p:nvSpPr>
+        <p:spPr>
+          <a:xfrm>
+            <a:off x="9125712" y="1783080"/>
+            <a:ext cx="2240280" cy="914400"/>
+          </a:xfrm>
+          <a:prstGeom prst="rect">
+            <a:avLst/>
+          </a:prstGeom>
+          <a:noFill/>
+          <a:ln/>
+        </p:spPr>
+        <p:txBody>
+          <a:bodyPr wrap="square" lIns="0" tIns="0" rIns="0" bIns="0" rtlCol="0" anchor="ctr"/>
+          <a:lstStyle/>
+          <a:p>
+            <a:pPr algn="ctr" indent="0" marL="0">
+              <a:buNone/>
+            </a:pPr>
+            <a:r>
+              <a:rPr lang="en-US" sz="3800" b="1" dirty="0">
+                <a:solidFill>
+                  <a:schemeClr val="tx2"/>
+                </a:solidFill>
+              </a:rPr>
+              <a:t>2.9</a:t>
+            </a:r>
+            <a:pPr algn="ctr" indent="0" marL="0">
+              <a:buNone/>
+            </a:pPr>
+            <a:r>
+              <a:rPr lang="en-US" sz="1500" b="1" dirty="0">
+                <a:solidFill>
+                  <a:schemeClr val="tx2"/>
+                </a:solidFill>
+              </a:rPr>
+              <a:t>倍</a:t>
+            </a:r>
+            <a:endParaRPr lang="en-US" sz="1400" dirty="0"/>
+          </a:p>
+        </p:txBody>
+      </p:sp>
+      <p:sp>
+        <p:nvSpPr>
+          <p:cNvPr id="15" name="Text 13"/>
+          <p:cNvSpPr txBox="1"/>
+          <p:nvPr/>
+        </p:nvSpPr>
+        <p:spPr>
+          <a:xfrm>
+            <a:off x="9125712" y="2743200"/>
+            <a:ext cx="2240280" cy="868680"/>
+          </a:xfrm>
+          <a:prstGeom prst="rect">
+            <a:avLst/>
+          </a:prstGeom>
+          <a:noFill/>
+          <a:ln/>
+        </p:spPr>
+        <p:txBody>
+          <a:bodyPr wrap="square" lIns="0" tIns="0" rIns="0" bIns="0" rtlCol="0" anchor="t"/>
+          <a:lstStyle/>
+          <a:p>
+            <a:pPr algn="ctr" indent="0" marL="0">
+              <a:buNone/>
+            </a:pPr>
+            <a:r>
+              <a:rPr lang="en-US" sz="1200" dirty="0">
+                <a:solidFill>
+                  <a:schemeClr val="accent4"/>
+                </a:solidFill>
+              </a:rPr>
+              <a:t>グループ売上 23億円（2019）→ 66億円（2026予想）</a:t>
+            </a:r>
+            <a:endParaRPr lang="en-US" sz="1200" dirty="0"/>
+          </a:p>
+        </p:txBody>
+      </p:sp>
+      <p:sp>
+        <p:nvSpPr>
+          <p:cNvPr id="16" name="phase record 1"/>
+          <p:cNvSpPr/>
+          <p:nvPr/>
+        </p:nvSpPr>
+        <p:spPr>
+          <a:xfrm>
+            <a:off x="548640" y="3931920"/>
+            <a:ext cx="5440680" cy="1783080"/>
+          </a:xfrm>
+          <a:prstGeom prst="roundRect">
+            <a:avLst>
+              <a:gd name="adj" fmla="val 4103"/>
+            </a:avLst>
+          </a:prstGeom>
+          <a:solidFill>
+            <a:schemeClr val="bg2"/>
+          </a:solidFill>
+          <a:ln w="19050">
+            <a:solidFill>
+              <a:schemeClr val="accent2"/>
+            </a:solidFill>
+            <a:prstDash val="solid"/>
+          </a:ln>
+        </p:spPr>
+      </p:sp>
+      <p:sp>
+        <p:nvSpPr>
+          <p:cNvPr id="17" name="Text 15"/>
+          <p:cNvSpPr txBox="1"/>
+          <p:nvPr/>
+        </p:nvSpPr>
+        <p:spPr>
+          <a:xfrm>
+            <a:off x="822960" y="4069080"/>
+            <a:ext cx="4937760" cy="411480"/>
+          </a:xfrm>
+          <a:prstGeom prst="rect">
+            <a:avLst/>
+          </a:prstGeom>
+          <a:noFill/>
+          <a:ln/>
+        </p:spPr>
+        <p:txBody>
+          <a:bodyPr wrap="square" lIns="0" tIns="0" rIns="0" bIns="0" rtlCol="0" anchor="t"/>
+          <a:lstStyle/>
+          <a:p>
+            <a:pPr indent="0" marL="0">
+              <a:buNone/>
+            </a:pPr>
+            <a:r>
+              <a:rPr lang="en-US" sz="1600" b="1" dirty="0">
+                <a:solidFill>
+                  <a:schemeClr val="accent2"/>
+                </a:solidFill>
+              </a:rPr>
+              <a:t>第1期 2011–2019：授業料を払った</a:t>
+            </a:r>
+            <a:endParaRPr lang="en-US" sz="1600" dirty="0"/>
+          </a:p>
+        </p:txBody>
+      </p:sp>
+      <p:sp>
+        <p:nvSpPr>
+          <p:cNvPr id="18" name="Text 16"/>
+          <p:cNvSpPr txBox="1"/>
+          <p:nvPr/>
+        </p:nvSpPr>
+        <p:spPr>
+          <a:xfrm>
+            <a:off x="822960" y="4526280"/>
+            <a:ext cx="4937760" cy="1097280"/>
+          </a:xfrm>
+          <a:prstGeom prst="rect">
+            <a:avLst/>
+          </a:prstGeom>
+          <a:noFill/>
+          <a:ln/>
+        </p:spPr>
+        <p:txBody>
+          <a:bodyPr wrap="square" lIns="0" tIns="0" rIns="0" bIns="0" rtlCol="0" anchor="t"/>
+          <a:lstStyle/>
+          <a:p>
+            <a:pPr indent="0" marL="0">
+              <a:buNone/>
+            </a:pPr>
+            <a:r>
+              <a:rPr lang="en-US" sz="1300" dirty="0">
+                <a:solidFill>
+                  <a:schemeClr val="tx1"/>
+                </a:solidFill>
+              </a:rPr>
+              <a:t>10.8億円を投じて、回収5.3億＋事業利益4.1億＝9.4億円。規模を「数」で獲りにいき、前半は赤字</a:t>
+            </a:r>
+            <a:endParaRPr lang="en-US" sz="1300" dirty="0"/>
+          </a:p>
+        </p:txBody>
+      </p:sp>
+      <p:sp>
+        <p:nvSpPr>
+          <p:cNvPr id="19" name="phase record 2"/>
+          <p:cNvSpPr/>
+          <p:nvPr/>
+        </p:nvSpPr>
+        <p:spPr>
+          <a:xfrm>
+            <a:off x="6172200" y="3931920"/>
+            <a:ext cx="5440680" cy="1783080"/>
+          </a:xfrm>
+          <a:prstGeom prst="roundRect">
+            <a:avLst>
+              <a:gd name="adj" fmla="val 4103"/>
+            </a:avLst>
+          </a:prstGeom>
+          <a:solidFill>
+            <a:schemeClr val="bg2"/>
+          </a:solidFill>
+          <a:ln w="19050">
+            <a:solidFill>
+              <a:schemeClr val="accent1"/>
+            </a:solidFill>
+            <a:prstDash val="solid"/>
+          </a:ln>
+        </p:spPr>
+      </p:sp>
+      <p:sp>
+        <p:nvSpPr>
+          <p:cNvPr id="20" name="Text 18"/>
+          <p:cNvSpPr txBox="1"/>
+          <p:nvPr/>
+        </p:nvSpPr>
+        <p:spPr>
+          <a:xfrm>
+            <a:off x="6446520" y="4069080"/>
+            <a:ext cx="4937760" cy="411480"/>
+          </a:xfrm>
+          <a:prstGeom prst="rect">
+            <a:avLst/>
+          </a:prstGeom>
+          <a:noFill/>
+          <a:ln/>
+        </p:spPr>
+        <p:txBody>
+          <a:bodyPr wrap="square" lIns="0" tIns="0" rIns="0" bIns="0" rtlCol="0" anchor="t"/>
+          <a:lstStyle/>
+          <a:p>
+            <a:pPr indent="0" marL="0">
+              <a:buNone/>
+            </a:pPr>
+            <a:r>
+              <a:rPr lang="en-US" sz="1600" b="1" dirty="0">
+                <a:solidFill>
+                  <a:schemeClr val="accent1"/>
+                </a:solidFill>
+              </a:rPr>
+              <a:t>第2期 2020–：買った瞬間に勝つ</a:t>
+            </a:r>
+            <a:endParaRPr lang="en-US" sz="1600" dirty="0"/>
+          </a:p>
+        </p:txBody>
+      </p:sp>
+      <p:sp>
+        <p:nvSpPr>
+          <p:cNvPr id="21" name="Text 19"/>
+          <p:cNvSpPr txBox="1"/>
+          <p:nvPr/>
+        </p:nvSpPr>
+        <p:spPr>
+          <a:xfrm>
+            <a:off x="6446520" y="4526280"/>
+            <a:ext cx="4937760" cy="1097280"/>
+          </a:xfrm>
+          <a:prstGeom prst="rect">
+            <a:avLst/>
+          </a:prstGeom>
+          <a:noFill/>
+          <a:ln/>
+        </p:spPr>
+        <p:txBody>
+          <a:bodyPr wrap="square" lIns="0" tIns="0" rIns="0" bIns="0" rtlCol="0" anchor="t"/>
+          <a:lstStyle/>
+          <a:p>
+            <a:pPr indent="0" marL="0">
+              <a:buNone/>
+            </a:pPr>
+            <a:r>
+              <a:rPr lang="en-US" sz="1300" dirty="0">
+                <a:solidFill>
+                  <a:schemeClr val="tx1"/>
+                </a:solidFill>
+              </a:rPr>
+              <a:t>14.4億円の投資で、純資産15.9億円を取得。「純資産＞買収額」に絞っただけで損益構造が反転</a:t>
+            </a:r>
+            <a:endParaRPr lang="en-US" sz="1300" dirty="0"/>
+          </a:p>
+        </p:txBody>
+      </p:sp>
+      <p:sp>
+        <p:nvSpPr>
+          <p:cNvPr id="22" name="Text 20"/>
+          <p:cNvSpPr txBox="1"/>
+          <p:nvPr/>
+        </p:nvSpPr>
+        <p:spPr>
+          <a:xfrm>
+            <a:off x="548640" y="5897880"/>
+            <a:ext cx="11064240" cy="274320"/>
+          </a:xfrm>
+          <a:prstGeom prst="rect">
+            <a:avLst/>
+          </a:prstGeom>
+          <a:noFill/>
+          <a:ln/>
+        </p:spPr>
+        <p:txBody>
+          <a:bodyPr wrap="square" lIns="0" tIns="0" rIns="0" bIns="0" rtlCol="0" anchor="t"/>
+          <a:lstStyle/>
+          <a:p>
+            <a:pPr indent="0" marL="0">
+              <a:buNone/>
+            </a:pPr>
+            <a:r>
+              <a:rPr lang="en-US" sz="1000" dirty="0">
+                <a:solidFill>
+                  <a:schemeClr val="accent4"/>
+                </a:solidFill>
+              </a:rPr>
+              <a:t>出典：中野邦人 M&amp;A勝敗一覧表、グループ売上管理表（自社実データ）／NIB第56回月例会 講演資料（2026年10月）</a:t>
+            </a:r>
+            <a:endParaRPr lang="en-US" sz="1000" dirty="0"/>
+          </a:p>
+        </p:txBody>
+      </p:sp>
+      <p:sp>
+        <p:nvSpPr>
+          <p:cNvPr id="25" name="Slide Number Placeholder 0"/>
+          <p:cNvSpPr>
+            <a:spLocks noGrp="1"/>
+          </p:cNvSpPr>
+          <p:nvPr>
+            <p:ph type="sldNum" sz="quarter" idx="4294967295"/>
+          </p:nvPr>
+        </p:nvSpPr>
+        <p:spPr>
+          <a:xfrm>
+            <a:off x="11155680" y="6419088"/>
+            <a:ext cx="457200" cy="274320"/>
+          </a:xfrm>
+          <a:prstGeom prst="rect">
+            <a:avLst/>
+          </a:prstGeom>
+          <a:extLst>
+            <a:ext uri="{C572A759-6A51-4108-AA02-DFA0A04FC94B}">
+              <ma14:wrappingTextBoxFlag xmlns:ma14="http://schemas.microsoft.com/office/mac/drawingml/2011/main" val="0"/>
+            </a:ext>
+          </a:extLst>
+        </p:spPr>
+        <p:txBody>
+          <a:bodyPr/>
+          <a:lstStyle>
+            <a:lvl1pPr>
+              <a:defRPr sz="900">
+                <a:solidFill>
+                  <a:schemeClr val="accent4"/>
+                </a:solidFill>
+              </a:defRPr>
+            </a:lvl1pPr>
+          </a:lstStyle>
+          <a:p>
+            <a:pPr algn="r"/>
+            <a:fld id="{F7021451-1387-4CA6-816F-3879F97B5CBC}" type="slidenum">
+              <a:rPr b="0" lang="en-US"/>
+              <a:t>27</a:t>
+            </a:fld>
+            <a:endParaRPr lang="en-US"/>
+          </a:p>
+        </p:txBody>
+      </p:sp>
+    </p:spTree>
+  </p:cSld>
+  <p:clrMapOvr>
+    <a:masterClrMapping/>
+  </p:clrMapOvr>
+</p:sld>
+</file>
+
+<file path=ppt/slides/slide28.xml><?xml version="1.0" encoding="utf-8"?>
+<p:sld xmlns:a="http://schemas.openxmlformats.org/drawingml/2006/main" xmlns:r="http://schemas.openxmlformats.org/officeDocument/2006/relationships" xmlns:p="http://schemas.openxmlformats.org/presentationml/2006/main">
+  <p:cSld name="Slide 28">
+    <p:spTree>
+      <p:nvGrpSpPr>
+        <p:cNvPr id="1" name=""/>
+        <p:cNvGrpSpPr/>
+        <p:nvPr/>
+      </p:nvGrpSpPr>
+      <p:grpSpPr>
+        <a:xfrm>
+          <a:off x="0" y="0"/>
+          <a:ext cx="0" cy="0"/>
+          <a:chOff x="0" y="0"/>
+          <a:chExt cx="0" cy="0"/>
+        </a:xfrm>
+      </p:grpSpPr>
+      <p:sp>
+        <p:nvSpPr>
+          <p:cNvPr id="2" name="Text 0"/>
+          <p:cNvSpPr/>
+          <p:nvPr>
+            <p:ph idx="100" type="title" hasCustomPrompt="1"/>
+          </p:nvPr>
+        </p:nvSpPr>
+        <p:spPr>
+          <a:xfrm>
+            <a:off x="548640" y="320040"/>
+            <a:ext cx="11064240" cy="685800"/>
+          </a:xfrm>
+          <a:prstGeom prst="rect">
+            <a:avLst/>
+          </a:prstGeom>
+          <a:noFill/>
+          <a:ln/>
+        </p:spPr>
+        <p:txBody>
+          <a:bodyPr wrap="square" lIns="0" tIns="0" rIns="0" bIns="0" rtlCol="0" anchor="ctr"/>
+          <a:lstStyle/>
+          <a:p>
+            <a:pPr algn="l" indent="0" marL="0">
+              <a:buNone/>
+            </a:pPr>
+            <a:r>
+              <a:rPr lang="en-US" sz="2600" b="1" dirty="0">
+                <a:solidFill>
+                  <a:schemeClr val="tx2"/>
+                </a:solidFill>
+              </a:rPr>
+              <a:t>勝ち筋5原則を、そのままサービスの判断基準にする</a:t>
+            </a:r>
+            <a:endParaRPr lang="en-US" sz="2600" dirty="0"/>
+          </a:p>
+        </p:txBody>
+      </p:sp>
+      <p:sp>
+        <p:nvSpPr>
+          <p:cNvPr id="3" name="Text 0"/>
+          <p:cNvSpPr/>
+          <p:nvPr>
+            <p:ph idx="101" type="body" hasCustomPrompt="1"/>
+          </p:nvPr>
+        </p:nvSpPr>
+        <p:spPr>
+          <a:xfrm>
+            <a:off x="548640" y="1005840"/>
+            <a:ext cx="11064240" cy="411480"/>
+          </a:xfrm>
+          <a:prstGeom prst="rect">
+            <a:avLst/>
+          </a:prstGeom>
+          <a:noFill/>
+          <a:ln/>
+        </p:spPr>
+        <p:txBody>
+          <a:bodyPr wrap="square" lIns="0" tIns="0" rIns="0" bIns="0" rtlCol="0" anchor="t"/>
+          <a:lstStyle/>
+          <a:p>
+            <a:pPr indent="0" marL="0">
+              <a:buNone/>
+            </a:pPr>
+            <a:r>
+              <a:rPr lang="en-US" sz="1500" dirty="0">
+                <a:solidFill>
+                  <a:schemeClr val="accent4"/>
+                </a:solidFill>
+              </a:rPr>
+              <a:t>他社が真似できないのは、AIではなく「49戦の負けから作ったルール」</a:t>
+            </a:r>
+            <a:endParaRPr lang="en-US" sz="1500" dirty="0"/>
+          </a:p>
+        </p:txBody>
+      </p:sp>
+      <p:graphicFrame>
+        <p:nvGraphicFramePr>
+          <p:cNvPr id="29" name="playbook table"/>
+          <p:cNvGraphicFramePr>
+            <a:graphicFrameLocks noGrp="1"/>
+          </p:cNvGraphicFramePr>
+          <p:nvPr>
+            <p:extLst>
+              <p:ext uri="{D42A27DB-BD31-4B8C-83A1-F6EECF244321}">
+                <p14:modId xmlns:p14="http://schemas.microsoft.com/office/powerpoint/2010/main" val="1579011935"/>
+              </p:ext>
+            </p:extLst>
+          </p:nvPr>
+        </p:nvGraphicFramePr>
+        <p:xfrm>
+          <a:off x="548640" y="1645920"/>
+          <a:ext cx="11064240" cy="914400"/>
+        </p:xfrm>
+        <a:graphic>
+          <a:graphicData uri="http://schemas.openxmlformats.org/drawingml/2006/table">
+            <a:tbl>
+              <a:tblPr/>
+              <a:tblGrid>
+                <a:gridCol w="640080"/>
+                <a:gridCol w="3291840"/>
+                <a:gridCol w="3200400"/>
+                <a:gridCol w="3931920"/>
+              </a:tblGrid>
+              <a:tr h="731520">
+                <a:tc>
+                  <a:txBody>
+                    <a:bodyPr/>
+                    <a:lstStyle/>
+                    <a:p>
+                      <a:pPr indent="0" marL="0">
+                        <a:buNone/>
+                      </a:pPr>
+                      <a:endParaRPr lang="en-US" sz="1300" dirty="0"/>
+                    </a:p>
+                  </a:txBody>
+                  <a:tcPr marL="109728" marR="109728" marT="36576" marB="36576" anchor="ctr">
+                    <a:lnL w="9525" cap="flat" cmpd="sng" algn="ctr">
+                      <a:solidFill>
+                        <a:srgbClr val="D5DCDA"/>
+                      </a:solidFill>
+                      <a:prstDash val="solid"/>
+                      <a:round/>
+                      <a:headEnd type="none" w="med" len="med"/>
+                      <a:tailEnd type="none" w="med" len="med"/>
+                    </a:lnL>
+                    <a:lnR w="9525" cap="flat" cmpd="sng" algn="ctr">
+                      <a:solidFill>
+                        <a:srgbClr val="D5DCDA"/>
+                      </a:solidFill>
+                      <a:prstDash val="solid"/>
+                      <a:round/>
+                      <a:headEnd type="none" w="med" len="med"/>
+                      <a:tailEnd type="none" w="med" len="med"/>
+                    </a:lnR>
+                    <a:lnT w="9525" cap="flat" cmpd="sng" algn="ctr">
+                      <a:solidFill>
+                        <a:srgbClr val="D5DCDA"/>
+                      </a:solidFill>
+                      <a:prstDash val="solid"/>
+                      <a:round/>
+                      <a:headEnd type="none" w="med" len="med"/>
+                      <a:tailEnd type="none" w="med" len="med"/>
+                    </a:lnT>
+                    <a:lnB w="9525" cap="flat" cmpd="sng" algn="ctr">
+                      <a:solidFill>
+                        <a:srgbClr val="D5DCDA"/>
+                      </a:solidFill>
+                      <a:prstDash val="solid"/>
+                      <a:round/>
+                      <a:headEnd type="none" w="med" len="med"/>
+                      <a:tailEnd type="none" w="med" len="med"/>
+                    </a:lnB>
+                    <a:solidFill>
+                      <a:schemeClr val="tx2"/>
+                    </a:solidFill>
+                  </a:tcPr>
+                </a:tc>
+                <a:tc>
+                  <a:txBody>
+                    <a:bodyPr/>
+                    <a:lstStyle/>
+                    <a:p>
+                      <a:pPr indent="0" marL="0">
+                        <a:buNone/>
+                      </a:pPr>
+                      <a:r>
+                        <a:rPr lang="en-US" sz="1300" b="1" dirty="0">
+                          <a:solidFill>
+                            <a:schemeClr val="bg1"/>
+                          </a:solidFill>
+                        </a:rPr>
+                        <a:t>原則</a:t>
+                      </a:r>
+                      <a:endParaRPr lang="en-US" sz="1300" dirty="0"/>
+                    </a:p>
+                  </a:txBody>
+                  <a:tcPr marL="109728" marR="109728" marT="36576" marB="36576" anchor="ctr">
+                    <a:lnL w="9525" cap="flat" cmpd="sng" algn="ctr">
+                      <a:solidFill>
+                        <a:srgbClr val="D5DCDA"/>
+                      </a:solidFill>
+                      <a:prstDash val="solid"/>
+                      <a:round/>
+                      <a:headEnd type="none" w="med" len="med"/>
+                      <a:tailEnd type="none" w="med" len="med"/>
+                    </a:lnL>
+                    <a:lnR w="9525" cap="flat" cmpd="sng" algn="ctr">
+                      <a:solidFill>
+                        <a:srgbClr val="D5DCDA"/>
+                      </a:solidFill>
+                      <a:prstDash val="solid"/>
+                      <a:round/>
+                      <a:headEnd type="none" w="med" len="med"/>
+                      <a:tailEnd type="none" w="med" len="med"/>
+                    </a:lnR>
+                    <a:lnT w="9525" cap="flat" cmpd="sng" algn="ctr">
+                      <a:solidFill>
+                        <a:srgbClr val="D5DCDA"/>
+                      </a:solidFill>
+                      <a:prstDash val="solid"/>
+                      <a:round/>
+                      <a:headEnd type="none" w="med" len="med"/>
+                      <a:tailEnd type="none" w="med" len="med"/>
+                    </a:lnT>
+                    <a:lnB w="9525" cap="flat" cmpd="sng" algn="ctr">
+                      <a:solidFill>
+                        <a:srgbClr val="D5DCDA"/>
+                      </a:solidFill>
+                      <a:prstDash val="solid"/>
+                      <a:round/>
+                      <a:headEnd type="none" w="med" len="med"/>
+                      <a:tailEnd type="none" w="med" len="med"/>
+                    </a:lnB>
+                    <a:solidFill>
+                      <a:schemeClr val="tx2"/>
+                    </a:solidFill>
+                  </a:tcPr>
+                </a:tc>
+                <a:tc>
+                  <a:txBody>
+                    <a:bodyPr/>
+                    <a:lstStyle/>
+                    <a:p>
+                      <a:pPr indent="0" marL="0">
+                        <a:buNone/>
+                      </a:pPr>
+                      <a:r>
+                        <a:rPr lang="en-US" sz="1300" b="1" dirty="0">
+                          <a:solidFill>
+                            <a:schemeClr val="bg1"/>
+                          </a:solidFill>
+                        </a:rPr>
+                        <a:t>49戦での実例</a:t>
+                      </a:r>
+                      <a:endParaRPr lang="en-US" sz="1300" dirty="0"/>
+                    </a:p>
+                  </a:txBody>
+                  <a:tcPr marL="109728" marR="109728" marT="36576" marB="36576" anchor="ctr">
+                    <a:lnL w="9525" cap="flat" cmpd="sng" algn="ctr">
+                      <a:solidFill>
+                        <a:srgbClr val="D5DCDA"/>
+                      </a:solidFill>
+                      <a:prstDash val="solid"/>
+                      <a:round/>
+                      <a:headEnd type="none" w="med" len="med"/>
+                      <a:tailEnd type="none" w="med" len="med"/>
+                    </a:lnL>
+                    <a:lnR w="9525" cap="flat" cmpd="sng" algn="ctr">
+                      <a:solidFill>
+                        <a:srgbClr val="D5DCDA"/>
+                      </a:solidFill>
+                      <a:prstDash val="solid"/>
+                      <a:round/>
+                      <a:headEnd type="none" w="med" len="med"/>
+                      <a:tailEnd type="none" w="med" len="med"/>
+                    </a:lnR>
+                    <a:lnT w="9525" cap="flat" cmpd="sng" algn="ctr">
+                      <a:solidFill>
+                        <a:srgbClr val="D5DCDA"/>
+                      </a:solidFill>
+                      <a:prstDash val="solid"/>
+                      <a:round/>
+                      <a:headEnd type="none" w="med" len="med"/>
+                      <a:tailEnd type="none" w="med" len="med"/>
+                    </a:lnT>
+                    <a:lnB w="9525" cap="flat" cmpd="sng" algn="ctr">
+                      <a:solidFill>
+                        <a:srgbClr val="D5DCDA"/>
+                      </a:solidFill>
+                      <a:prstDash val="solid"/>
+                      <a:round/>
+                      <a:headEnd type="none" w="med" len="med"/>
+                      <a:tailEnd type="none" w="med" len="med"/>
+                    </a:lnB>
+                    <a:solidFill>
+                      <a:schemeClr val="tx2"/>
+                    </a:solidFill>
+                  </a:tcPr>
+                </a:tc>
+                <a:tc>
+                  <a:txBody>
+                    <a:bodyPr/>
+                    <a:lstStyle/>
+                    <a:p>
+                      <a:pPr indent="0" marL="0">
+                        <a:buNone/>
+                      </a:pPr>
+                      <a:r>
+                        <a:rPr lang="en-US" sz="1300" b="1" dirty="0">
+                          <a:solidFill>
+                            <a:schemeClr val="bg1"/>
+                          </a:solidFill>
+                        </a:rPr>
+                        <a:t>サービスでの実装</a:t>
+                      </a:r>
+                      <a:endParaRPr lang="en-US" sz="1300" dirty="0"/>
+                    </a:p>
+                  </a:txBody>
+                  <a:tcPr marL="109728" marR="109728" marT="36576" marB="36576" anchor="ctr">
+                    <a:lnL w="9525" cap="flat" cmpd="sng" algn="ctr">
+                      <a:solidFill>
+                        <a:srgbClr val="D5DCDA"/>
+                      </a:solidFill>
+                      <a:prstDash val="solid"/>
+                      <a:round/>
+                      <a:headEnd type="none" w="med" len="med"/>
+                      <a:tailEnd type="none" w="med" len="med"/>
+                    </a:lnL>
+                    <a:lnR w="9525" cap="flat" cmpd="sng" algn="ctr">
+                      <a:solidFill>
+                        <a:srgbClr val="D5DCDA"/>
+                      </a:solidFill>
+                      <a:prstDash val="solid"/>
+                      <a:round/>
+                      <a:headEnd type="none" w="med" len="med"/>
+                      <a:tailEnd type="none" w="med" len="med"/>
+                    </a:lnR>
+                    <a:lnT w="9525" cap="flat" cmpd="sng" algn="ctr">
+                      <a:solidFill>
+                        <a:srgbClr val="D5DCDA"/>
+                      </a:solidFill>
+                      <a:prstDash val="solid"/>
+                      <a:round/>
+                      <a:headEnd type="none" w="med" len="med"/>
+                      <a:tailEnd type="none" w="med" len="med"/>
+                    </a:lnT>
+                    <a:lnB w="9525" cap="flat" cmpd="sng" algn="ctr">
+                      <a:solidFill>
+                        <a:srgbClr val="D5DCDA"/>
+                      </a:solidFill>
+                      <a:prstDash val="solid"/>
+                      <a:round/>
+                      <a:headEnd type="none" w="med" len="med"/>
+                      <a:tailEnd type="none" w="med" len="med"/>
+                    </a:lnB>
+                    <a:solidFill>
+                      <a:schemeClr val="tx2"/>
+                    </a:solidFill>
+                  </a:tcPr>
+                </a:tc>
+              </a:tr>
+              <a:tr h="731520">
+                <a:tc>
+                  <a:txBody>
+                    <a:bodyPr/>
+                    <a:lstStyle/>
+                    <a:p>
+                      <a:pPr algn="ctr" indent="0" marL="0">
+                        <a:buNone/>
+                      </a:pPr>
+                      <a:r>
+                        <a:rPr lang="en-US" sz="1600" b="1" dirty="0">
+                          <a:solidFill>
+                            <a:schemeClr val="accent1"/>
+                          </a:solidFill>
+                        </a:rPr>
+                        <a:t>01</a:t>
+                      </a:r>
+                      <a:endParaRPr lang="en-US" sz="1600" dirty="0"/>
+                    </a:p>
+                  </a:txBody>
+                  <a:tcPr marL="109728" marR="109728" marT="36576" marB="36576" anchor="ctr">
+                    <a:lnL w="9525" cap="flat" cmpd="sng" algn="ctr">
+                      <a:solidFill>
+                        <a:srgbClr val="D5DCDA"/>
+                      </a:solidFill>
+                      <a:prstDash val="solid"/>
+                      <a:round/>
+                      <a:headEnd type="none" w="med" len="med"/>
+                      <a:tailEnd type="none" w="med" len="med"/>
+                    </a:lnL>
+                    <a:lnR w="9525" cap="flat" cmpd="sng" algn="ctr">
+                      <a:solidFill>
+                        <a:srgbClr val="D5DCDA"/>
+                      </a:solidFill>
+                      <a:prstDash val="solid"/>
+                      <a:round/>
+                      <a:headEnd type="none" w="med" len="med"/>
+                      <a:tailEnd type="none" w="med" len="med"/>
+                    </a:lnR>
+                    <a:lnT w="9525" cap="flat" cmpd="sng" algn="ctr">
+                      <a:solidFill>
+                        <a:srgbClr val="D5DCDA"/>
+                      </a:solidFill>
+                      <a:prstDash val="solid"/>
+                      <a:round/>
+                      <a:headEnd type="none" w="med" len="med"/>
+                      <a:tailEnd type="none" w="med" len="med"/>
+                    </a:lnT>
+                    <a:lnB w="9525" cap="flat" cmpd="sng" algn="ctr">
+                      <a:solidFill>
+                        <a:srgbClr val="D5DCDA"/>
+                      </a:solidFill>
+                      <a:prstDash val="solid"/>
+                      <a:round/>
+                      <a:headEnd type="none" w="med" len="med"/>
+                      <a:tailEnd type="none" w="med" len="med"/>
+                    </a:lnB>
+                  </a:tcPr>
+                </a:tc>
+                <a:tc>
+                  <a:txBody>
+                    <a:bodyPr/>
+                    <a:lstStyle/>
+                    <a:p>
+                      <a:pPr indent="0" marL="0">
+                        <a:buNone/>
+                      </a:pPr>
+                      <a:r>
+                        <a:rPr lang="en-US" sz="1300" b="1" dirty="0">
+                          <a:solidFill>
+                            <a:schemeClr val="tx1"/>
+                          </a:solidFill>
+                        </a:rPr>
+                        <a:t>純資産を下回る価格でしか買わない</a:t>
+                      </a:r>
+                      <a:endParaRPr lang="en-US" sz="1300" dirty="0"/>
+                    </a:p>
+                  </a:txBody>
+                  <a:tcPr marL="109728" marR="109728" marT="36576" marB="36576" anchor="ctr">
+                    <a:lnL w="9525" cap="flat" cmpd="sng" algn="ctr">
+                      <a:solidFill>
+                        <a:srgbClr val="D5DCDA"/>
+                      </a:solidFill>
+                      <a:prstDash val="solid"/>
+                      <a:round/>
+                      <a:headEnd type="none" w="med" len="med"/>
+                      <a:tailEnd type="none" w="med" len="med"/>
+                    </a:lnL>
+                    <a:lnR w="9525" cap="flat" cmpd="sng" algn="ctr">
+                      <a:solidFill>
+                        <a:srgbClr val="D5DCDA"/>
+                      </a:solidFill>
+                      <a:prstDash val="solid"/>
+                      <a:round/>
+                      <a:headEnd type="none" w="med" len="med"/>
+                      <a:tailEnd type="none" w="med" len="med"/>
+                    </a:lnR>
+                    <a:lnT w="9525" cap="flat" cmpd="sng" algn="ctr">
+                      <a:solidFill>
+                        <a:srgbClr val="D5DCDA"/>
+                      </a:solidFill>
+                      <a:prstDash val="solid"/>
+                      <a:round/>
+                      <a:headEnd type="none" w="med" len="med"/>
+                      <a:tailEnd type="none" w="med" len="med"/>
+                    </a:lnT>
+                    <a:lnB w="9525" cap="flat" cmpd="sng" algn="ctr">
+                      <a:solidFill>
+                        <a:srgbClr val="D5DCDA"/>
+                      </a:solidFill>
+                      <a:prstDash val="solid"/>
+                      <a:round/>
+                      <a:headEnd type="none" w="med" len="med"/>
+                      <a:tailEnd type="none" w="med" len="med"/>
+                    </a:lnB>
+                  </a:tcPr>
+                </a:tc>
+                <a:tc>
+                  <a:txBody>
+                    <a:bodyPr/>
+                    <a:lstStyle/>
+                    <a:p>
+                      <a:pPr indent="0" marL="0">
+                        <a:buNone/>
+                      </a:pPr>
+                      <a:r>
+                        <a:rPr lang="en-US" sz="1300" dirty="0">
+                          <a:solidFill>
+                            <a:schemeClr val="accent4"/>
+                          </a:solidFill>
+                        </a:rPr>
+                        <a:t>アピシウス：8.2億円で純資産13.0億円</a:t>
+                      </a:r>
+                      <a:endParaRPr lang="en-US" sz="1300" dirty="0"/>
+                    </a:p>
+                  </a:txBody>
+                  <a:tcPr marL="109728" marR="109728" marT="36576" marB="36576" anchor="ctr">
+                    <a:lnL w="9525" cap="flat" cmpd="sng" algn="ctr">
+                      <a:solidFill>
+                        <a:srgbClr val="D5DCDA"/>
+                      </a:solidFill>
+                      <a:prstDash val="solid"/>
+                      <a:round/>
+                      <a:headEnd type="none" w="med" len="med"/>
+                      <a:tailEnd type="none" w="med" len="med"/>
+                    </a:lnL>
+                    <a:lnR w="9525" cap="flat" cmpd="sng" algn="ctr">
+                      <a:solidFill>
+                        <a:srgbClr val="D5DCDA"/>
+                      </a:solidFill>
+                      <a:prstDash val="solid"/>
+                      <a:round/>
+                      <a:headEnd type="none" w="med" len="med"/>
+                      <a:tailEnd type="none" w="med" len="med"/>
+                    </a:lnR>
+                    <a:lnT w="9525" cap="flat" cmpd="sng" algn="ctr">
+                      <a:solidFill>
+                        <a:srgbClr val="D5DCDA"/>
+                      </a:solidFill>
+                      <a:prstDash val="solid"/>
+                      <a:round/>
+                      <a:headEnd type="none" w="med" len="med"/>
+                      <a:tailEnd type="none" w="med" len="med"/>
+                    </a:lnT>
+                    <a:lnB w="9525" cap="flat" cmpd="sng" algn="ctr">
+                      <a:solidFill>
+                        <a:srgbClr val="D5DCDA"/>
+                      </a:solidFill>
+                      <a:prstDash val="solid"/>
+                      <a:round/>
+                      <a:headEnd type="none" w="med" len="med"/>
+                      <a:tailEnd type="none" w="med" len="med"/>
+                    </a:lnB>
+                  </a:tcPr>
+                </a:tc>
+                <a:tc>
+                  <a:txBody>
+                    <a:bodyPr/>
+                    <a:lstStyle/>
+                    <a:p>
+                      <a:pPr indent="0" marL="0">
+                        <a:buNone/>
+                      </a:pPr>
+                      <a:r>
+                        <a:rPr lang="en-US" sz="1300" dirty="0">
+                          <a:solidFill>
+                            <a:schemeClr val="tx1"/>
+                          </a:solidFill>
+                        </a:rPr>
+                        <a:t>AIがBS/PLと企業概要書から純資産・適正価格を算出し、入口で足切り</a:t>
+                      </a:r>
+                      <a:endParaRPr lang="en-US" sz="1300" dirty="0"/>
+                    </a:p>
+                  </a:txBody>
+                  <a:tcPr marL="109728" marR="109728" marT="36576" marB="36576" anchor="ctr">
+                    <a:lnL w="9525" cap="flat" cmpd="sng" algn="ctr">
+                      <a:solidFill>
+                        <a:srgbClr val="D5DCDA"/>
+                      </a:solidFill>
+                      <a:prstDash val="solid"/>
+                      <a:round/>
+                      <a:headEnd type="none" w="med" len="med"/>
+                      <a:tailEnd type="none" w="med" len="med"/>
+                    </a:lnL>
+                    <a:lnR w="9525" cap="flat" cmpd="sng" algn="ctr">
+                      <a:solidFill>
+                        <a:srgbClr val="D5DCDA"/>
+                      </a:solidFill>
+                      <a:prstDash val="solid"/>
+                      <a:round/>
+                      <a:headEnd type="none" w="med" len="med"/>
+                      <a:tailEnd type="none" w="med" len="med"/>
+                    </a:lnR>
+                    <a:lnT w="9525" cap="flat" cmpd="sng" algn="ctr">
+                      <a:solidFill>
+                        <a:srgbClr val="D5DCDA"/>
+                      </a:solidFill>
+                      <a:prstDash val="solid"/>
+                      <a:round/>
+                      <a:headEnd type="none" w="med" len="med"/>
+                      <a:tailEnd type="none" w="med" len="med"/>
+                    </a:lnT>
+                    <a:lnB w="9525" cap="flat" cmpd="sng" algn="ctr">
+                      <a:solidFill>
+                        <a:srgbClr val="D5DCDA"/>
+                      </a:solidFill>
+                      <a:prstDash val="solid"/>
+                      <a:round/>
+                      <a:headEnd type="none" w="med" len="med"/>
+                      <a:tailEnd type="none" w="med" len="med"/>
+                    </a:lnB>
+                  </a:tcPr>
+                </a:tc>
+              </a:tr>
+              <a:tr h="731520">
+                <a:tc>
+                  <a:txBody>
+                    <a:bodyPr/>
+                    <a:lstStyle/>
+                    <a:p>
+                      <a:pPr algn="ctr" indent="0" marL="0">
+                        <a:buNone/>
+                      </a:pPr>
+                      <a:r>
+                        <a:rPr lang="en-US" sz="1600" b="1" dirty="0">
+                          <a:solidFill>
+                            <a:schemeClr val="accent1"/>
+                          </a:solidFill>
+                        </a:rPr>
+                        <a:t>02</a:t>
+                      </a:r>
+                      <a:endParaRPr lang="en-US" sz="1600" dirty="0"/>
+                    </a:p>
+                  </a:txBody>
+                  <a:tcPr marL="109728" marR="109728" marT="36576" marB="36576" anchor="ctr">
+                    <a:lnL w="9525" cap="flat" cmpd="sng" algn="ctr">
+                      <a:solidFill>
+                        <a:srgbClr val="D5DCDA"/>
+                      </a:solidFill>
+                      <a:prstDash val="solid"/>
+                      <a:round/>
+                      <a:headEnd type="none" w="med" len="med"/>
+                      <a:tailEnd type="none" w="med" len="med"/>
+                    </a:lnL>
+                    <a:lnR w="9525" cap="flat" cmpd="sng" algn="ctr">
+                      <a:solidFill>
+                        <a:srgbClr val="D5DCDA"/>
+                      </a:solidFill>
+                      <a:prstDash val="solid"/>
+                      <a:round/>
+                      <a:headEnd type="none" w="med" len="med"/>
+                      <a:tailEnd type="none" w="med" len="med"/>
+                    </a:lnR>
+                    <a:lnT w="9525" cap="flat" cmpd="sng" algn="ctr">
+                      <a:solidFill>
+                        <a:srgbClr val="D5DCDA"/>
+                      </a:solidFill>
+                      <a:prstDash val="solid"/>
+                      <a:round/>
+                      <a:headEnd type="none" w="med" len="med"/>
+                      <a:tailEnd type="none" w="med" len="med"/>
+                    </a:lnT>
+                    <a:lnB w="9525" cap="flat" cmpd="sng" algn="ctr">
+                      <a:solidFill>
+                        <a:srgbClr val="D5DCDA"/>
+                      </a:solidFill>
+                      <a:prstDash val="solid"/>
+                      <a:round/>
+                      <a:headEnd type="none" w="med" len="med"/>
+                      <a:tailEnd type="none" w="med" len="med"/>
+                    </a:lnB>
+                  </a:tcPr>
+                </a:tc>
+                <a:tc>
+                  <a:txBody>
+                    <a:bodyPr/>
+                    <a:lstStyle/>
+                    <a:p>
+                      <a:pPr indent="0" marL="0">
+                        <a:buNone/>
+                      </a:pPr>
+                      <a:r>
+                        <a:rPr lang="en-US" sz="1300" b="1" dirty="0">
+                          <a:solidFill>
+                            <a:schemeClr val="tx1"/>
+                          </a:solidFill>
+                        </a:rPr>
+                        <a:t>自分で見つける。仲介から始めない</a:t>
+                      </a:r>
+                      <a:endParaRPr lang="en-US" sz="1300" dirty="0"/>
+                    </a:p>
+                  </a:txBody>
+                  <a:tcPr marL="109728" marR="109728" marT="36576" marB="36576" anchor="ctr">
+                    <a:lnL w="9525" cap="flat" cmpd="sng" algn="ctr">
+                      <a:solidFill>
+                        <a:srgbClr val="D5DCDA"/>
+                      </a:solidFill>
+                      <a:prstDash val="solid"/>
+                      <a:round/>
+                      <a:headEnd type="none" w="med" len="med"/>
+                      <a:tailEnd type="none" w="med" len="med"/>
+                    </a:lnL>
+                    <a:lnR w="9525" cap="flat" cmpd="sng" algn="ctr">
+                      <a:solidFill>
+                        <a:srgbClr val="D5DCDA"/>
+                      </a:solidFill>
+                      <a:prstDash val="solid"/>
+                      <a:round/>
+                      <a:headEnd type="none" w="med" len="med"/>
+                      <a:tailEnd type="none" w="med" len="med"/>
+                    </a:lnR>
+                    <a:lnT w="9525" cap="flat" cmpd="sng" algn="ctr">
+                      <a:solidFill>
+                        <a:srgbClr val="D5DCDA"/>
+                      </a:solidFill>
+                      <a:prstDash val="solid"/>
+                      <a:round/>
+                      <a:headEnd type="none" w="med" len="med"/>
+                      <a:tailEnd type="none" w="med" len="med"/>
+                    </a:lnT>
+                    <a:lnB w="9525" cap="flat" cmpd="sng" algn="ctr">
+                      <a:solidFill>
+                        <a:srgbClr val="D5DCDA"/>
+                      </a:solidFill>
+                      <a:prstDash val="solid"/>
+                      <a:round/>
+                      <a:headEnd type="none" w="med" len="med"/>
+                      <a:tailEnd type="none" w="med" len="med"/>
+                    </a:lnB>
+                  </a:tcPr>
+                </a:tc>
+                <a:tc>
+                  <a:txBody>
+                    <a:bodyPr/>
+                    <a:lstStyle/>
+                    <a:p>
+                      <a:pPr indent="0" marL="0">
+                        <a:buNone/>
+                      </a:pPr>
+                      <a:r>
+                        <a:rPr lang="en-US" sz="1300" dirty="0">
+                          <a:solidFill>
+                            <a:schemeClr val="accent4"/>
+                          </a:solidFill>
+                        </a:rPr>
+                        <a:t>約50案件の発掘はほぼ自分。仲介経由は3割以下</a:t>
+                      </a:r>
+                      <a:endParaRPr lang="en-US" sz="1300" dirty="0"/>
+                    </a:p>
+                  </a:txBody>
+                  <a:tcPr marL="109728" marR="109728" marT="36576" marB="36576" anchor="ctr">
+                    <a:lnL w="9525" cap="flat" cmpd="sng" algn="ctr">
+                      <a:solidFill>
+                        <a:srgbClr val="D5DCDA"/>
+                      </a:solidFill>
+                      <a:prstDash val="solid"/>
+                      <a:round/>
+                      <a:headEnd type="none" w="med" len="med"/>
+                      <a:tailEnd type="none" w="med" len="med"/>
+                    </a:lnL>
+                    <a:lnR w="9525" cap="flat" cmpd="sng" algn="ctr">
+                      <a:solidFill>
+                        <a:srgbClr val="D5DCDA"/>
+                      </a:solidFill>
+                      <a:prstDash val="solid"/>
+                      <a:round/>
+                      <a:headEnd type="none" w="med" len="med"/>
+                      <a:tailEnd type="none" w="med" len="med"/>
+                    </a:lnR>
+                    <a:lnT w="9525" cap="flat" cmpd="sng" algn="ctr">
+                      <a:solidFill>
+                        <a:srgbClr val="D5DCDA"/>
+                      </a:solidFill>
+                      <a:prstDash val="solid"/>
+                      <a:round/>
+                      <a:headEnd type="none" w="med" len="med"/>
+                      <a:tailEnd type="none" w="med" len="med"/>
+                    </a:lnT>
+                    <a:lnB w="9525" cap="flat" cmpd="sng" algn="ctr">
+                      <a:solidFill>
+                        <a:srgbClr val="D5DCDA"/>
+                      </a:solidFill>
+                      <a:prstDash val="solid"/>
+                      <a:round/>
+                      <a:headEnd type="none" w="med" len="med"/>
+                      <a:tailEnd type="none" w="med" len="med"/>
+                    </a:lnB>
+                  </a:tcPr>
+                </a:tc>
+                <a:tc>
+                  <a:txBody>
+                    <a:bodyPr/>
+                    <a:lstStyle/>
+                    <a:p>
+                      <a:pPr indent="0" marL="0">
+                        <a:buNone/>
+                      </a:pPr>
+                      <a:r>
+                        <a:rPr lang="en-US" sz="1300" dirty="0">
+                          <a:solidFill>
+                            <a:schemeClr val="tx1"/>
+                          </a:solidFill>
+                        </a:rPr>
+                        <a:t>買収方針から候補企業を逆算し、直接打診のやり方を指導</a:t>
+                      </a:r>
+                      <a:endParaRPr lang="en-US" sz="1300" dirty="0"/>
+                    </a:p>
+                  </a:txBody>
+                  <a:tcPr marL="109728" marR="109728" marT="36576" marB="36576" anchor="ctr">
+                    <a:lnL w="9525" cap="flat" cmpd="sng" algn="ctr">
+                      <a:solidFill>
+                        <a:srgbClr val="D5DCDA"/>
+                      </a:solidFill>
+                      <a:prstDash val="solid"/>
+                      <a:round/>
+                      <a:headEnd type="none" w="med" len="med"/>
+                      <a:tailEnd type="none" w="med" len="med"/>
+                    </a:lnL>
+                    <a:lnR w="9525" cap="flat" cmpd="sng" algn="ctr">
+                      <a:solidFill>
+                        <a:srgbClr val="D5DCDA"/>
+                      </a:solidFill>
+                      <a:prstDash val="solid"/>
+                      <a:round/>
+                      <a:headEnd type="none" w="med" len="med"/>
+                      <a:tailEnd type="none" w="med" len="med"/>
+                    </a:lnR>
+                    <a:lnT w="9525" cap="flat" cmpd="sng" algn="ctr">
+                      <a:solidFill>
+                        <a:srgbClr val="D5DCDA"/>
+                      </a:solidFill>
+                      <a:prstDash val="solid"/>
+                      <a:round/>
+                      <a:headEnd type="none" w="med" len="med"/>
+                      <a:tailEnd type="none" w="med" len="med"/>
+                    </a:lnT>
+                    <a:lnB w="9525" cap="flat" cmpd="sng" algn="ctr">
+                      <a:solidFill>
+                        <a:srgbClr val="D5DCDA"/>
+                      </a:solidFill>
+                      <a:prstDash val="solid"/>
+                      <a:round/>
+                      <a:headEnd type="none" w="med" len="med"/>
+                      <a:tailEnd type="none" w="med" len="med"/>
+                    </a:lnB>
+                  </a:tcPr>
+                </a:tc>
+              </a:tr>
+              <a:tr h="731520">
+                <a:tc>
+                  <a:txBody>
+                    <a:bodyPr/>
+                    <a:lstStyle/>
+                    <a:p>
+                      <a:pPr algn="ctr" indent="0" marL="0">
+                        <a:buNone/>
+                      </a:pPr>
+                      <a:r>
+                        <a:rPr lang="en-US" sz="1600" b="1" dirty="0">
+                          <a:solidFill>
+                            <a:schemeClr val="accent1"/>
+                          </a:solidFill>
+                        </a:rPr>
+                        <a:t>03</a:t>
+                      </a:r>
+                      <a:endParaRPr lang="en-US" sz="1600" dirty="0"/>
+                    </a:p>
+                  </a:txBody>
+                  <a:tcPr marL="109728" marR="109728" marT="36576" marB="36576" anchor="ctr">
+                    <a:lnL w="9525" cap="flat" cmpd="sng" algn="ctr">
+                      <a:solidFill>
+                        <a:srgbClr val="D5DCDA"/>
+                      </a:solidFill>
+                      <a:prstDash val="solid"/>
+                      <a:round/>
+                      <a:headEnd type="none" w="med" len="med"/>
+                      <a:tailEnd type="none" w="med" len="med"/>
+                    </a:lnL>
+                    <a:lnR w="9525" cap="flat" cmpd="sng" algn="ctr">
+                      <a:solidFill>
+                        <a:srgbClr val="D5DCDA"/>
+                      </a:solidFill>
+                      <a:prstDash val="solid"/>
+                      <a:round/>
+                      <a:headEnd type="none" w="med" len="med"/>
+                      <a:tailEnd type="none" w="med" len="med"/>
+                    </a:lnR>
+                    <a:lnT w="9525" cap="flat" cmpd="sng" algn="ctr">
+                      <a:solidFill>
+                        <a:srgbClr val="D5DCDA"/>
+                      </a:solidFill>
+                      <a:prstDash val="solid"/>
+                      <a:round/>
+                      <a:headEnd type="none" w="med" len="med"/>
+                      <a:tailEnd type="none" w="med" len="med"/>
+                    </a:lnT>
+                    <a:lnB w="9525" cap="flat" cmpd="sng" algn="ctr">
+                      <a:solidFill>
+                        <a:srgbClr val="D5DCDA"/>
+                      </a:solidFill>
+                      <a:prstDash val="solid"/>
+                      <a:round/>
+                      <a:headEnd type="none" w="med" len="med"/>
+                      <a:tailEnd type="none" w="med" len="med"/>
+                    </a:lnB>
+                  </a:tcPr>
+                </a:tc>
+                <a:tc>
+                  <a:txBody>
+                    <a:bodyPr/>
+                    <a:lstStyle/>
+                    <a:p>
+                      <a:pPr indent="0" marL="0">
+                        <a:buNone/>
+                      </a:pPr>
+                      <a:r>
+                        <a:rPr lang="en-US" sz="1300" b="1" dirty="0">
+                          <a:solidFill>
+                            <a:schemeClr val="tx1"/>
+                          </a:solidFill>
+                        </a:rPr>
+                        <a:t>PMI責任者が決まらない案件は買わない</a:t>
+                      </a:r>
+                      <a:endParaRPr lang="en-US" sz="1300" dirty="0"/>
+                    </a:p>
+                  </a:txBody>
+                  <a:tcPr marL="109728" marR="109728" marT="36576" marB="36576" anchor="ctr">
+                    <a:lnL w="9525" cap="flat" cmpd="sng" algn="ctr">
+                      <a:solidFill>
+                        <a:srgbClr val="D5DCDA"/>
+                      </a:solidFill>
+                      <a:prstDash val="solid"/>
+                      <a:round/>
+                      <a:headEnd type="none" w="med" len="med"/>
+                      <a:tailEnd type="none" w="med" len="med"/>
+                    </a:lnL>
+                    <a:lnR w="9525" cap="flat" cmpd="sng" algn="ctr">
+                      <a:solidFill>
+                        <a:srgbClr val="D5DCDA"/>
+                      </a:solidFill>
+                      <a:prstDash val="solid"/>
+                      <a:round/>
+                      <a:headEnd type="none" w="med" len="med"/>
+                      <a:tailEnd type="none" w="med" len="med"/>
+                    </a:lnR>
+                    <a:lnT w="9525" cap="flat" cmpd="sng" algn="ctr">
+                      <a:solidFill>
+                        <a:srgbClr val="D5DCDA"/>
+                      </a:solidFill>
+                      <a:prstDash val="solid"/>
+                      <a:round/>
+                      <a:headEnd type="none" w="med" len="med"/>
+                      <a:tailEnd type="none" w="med" len="med"/>
+                    </a:lnT>
+                    <a:lnB w="9525" cap="flat" cmpd="sng" algn="ctr">
+                      <a:solidFill>
+                        <a:srgbClr val="D5DCDA"/>
+                      </a:solidFill>
+                      <a:prstDash val="solid"/>
+                      <a:round/>
+                      <a:headEnd type="none" w="med" len="med"/>
+                      <a:tailEnd type="none" w="med" len="med"/>
+                    </a:lnB>
+                  </a:tcPr>
+                </a:tc>
+                <a:tc>
+                  <a:txBody>
+                    <a:bodyPr/>
+                    <a:lstStyle/>
+                    <a:p>
+                      <a:pPr indent="0" marL="0">
+                        <a:buNone/>
+                      </a:pPr>
+                      <a:r>
+                        <a:rPr lang="en-US" sz="1300" dirty="0">
+                          <a:solidFill>
+                            <a:schemeClr val="accent4"/>
+                          </a:solidFill>
+                        </a:rPr>
+                        <a:t>同じポータル事業で5.0億円の差</a:t>
+                      </a:r>
+                      <a:endParaRPr lang="en-US" sz="1300" dirty="0"/>
+                    </a:p>
+                  </a:txBody>
+                  <a:tcPr marL="109728" marR="109728" marT="36576" marB="36576" anchor="ctr">
+                    <a:lnL w="9525" cap="flat" cmpd="sng" algn="ctr">
+                      <a:solidFill>
+                        <a:srgbClr val="D5DCDA"/>
+                      </a:solidFill>
+                      <a:prstDash val="solid"/>
+                      <a:round/>
+                      <a:headEnd type="none" w="med" len="med"/>
+                      <a:tailEnd type="none" w="med" len="med"/>
+                    </a:lnL>
+                    <a:lnR w="9525" cap="flat" cmpd="sng" algn="ctr">
+                      <a:solidFill>
+                        <a:srgbClr val="D5DCDA"/>
+                      </a:solidFill>
+                      <a:prstDash val="solid"/>
+                      <a:round/>
+                      <a:headEnd type="none" w="med" len="med"/>
+                      <a:tailEnd type="none" w="med" len="med"/>
+                    </a:lnR>
+                    <a:lnT w="9525" cap="flat" cmpd="sng" algn="ctr">
+                      <a:solidFill>
+                        <a:srgbClr val="D5DCDA"/>
+                      </a:solidFill>
+                      <a:prstDash val="solid"/>
+                      <a:round/>
+                      <a:headEnd type="none" w="med" len="med"/>
+                      <a:tailEnd type="none" w="med" len="med"/>
+                    </a:lnT>
+                    <a:lnB w="9525" cap="flat" cmpd="sng" algn="ctr">
+                      <a:solidFill>
+                        <a:srgbClr val="D5DCDA"/>
+                      </a:solidFill>
+                      <a:prstDash val="solid"/>
+                      <a:round/>
+                      <a:headEnd type="none" w="med" len="med"/>
+                      <a:tailEnd type="none" w="med" len="med"/>
+                    </a:lnB>
+                  </a:tcPr>
+                </a:tc>
+                <a:tc>
+                  <a:txBody>
+                    <a:bodyPr/>
+                    <a:lstStyle/>
+                    <a:p>
+                      <a:pPr indent="0" marL="0">
+                        <a:buNone/>
+                      </a:pPr>
+                      <a:r>
+                        <a:rPr lang="en-US" sz="1300" dirty="0">
+                          <a:solidFill>
+                            <a:schemeClr val="tx1"/>
+                          </a:solidFill>
+                        </a:rPr>
+                        <a:t>基本合意の前に「PMI責任者の指名」を必須チェックに</a:t>
+                      </a:r>
+                      <a:endParaRPr lang="en-US" sz="1300" dirty="0"/>
+                    </a:p>
+                  </a:txBody>
+                  <a:tcPr marL="109728" marR="109728" marT="36576" marB="36576" anchor="ctr">
+                    <a:lnL w="9525" cap="flat" cmpd="sng" algn="ctr">
+                      <a:solidFill>
+                        <a:srgbClr val="D5DCDA"/>
+                      </a:solidFill>
+                      <a:prstDash val="solid"/>
+                      <a:round/>
+                      <a:headEnd type="none" w="med" len="med"/>
+                      <a:tailEnd type="none" w="med" len="med"/>
+                    </a:lnL>
+                    <a:lnR w="9525" cap="flat" cmpd="sng" algn="ctr">
+                      <a:solidFill>
+                        <a:srgbClr val="D5DCDA"/>
+                      </a:solidFill>
+                      <a:prstDash val="solid"/>
+                      <a:round/>
+                      <a:headEnd type="none" w="med" len="med"/>
+                      <a:tailEnd type="none" w="med" len="med"/>
+                    </a:lnR>
+                    <a:lnT w="9525" cap="flat" cmpd="sng" algn="ctr">
+                      <a:solidFill>
+                        <a:srgbClr val="D5DCDA"/>
+                      </a:solidFill>
+                      <a:prstDash val="solid"/>
+                      <a:round/>
+                      <a:headEnd type="none" w="med" len="med"/>
+                      <a:tailEnd type="none" w="med" len="med"/>
+                    </a:lnT>
+                    <a:lnB w="9525" cap="flat" cmpd="sng" algn="ctr">
+                      <a:solidFill>
+                        <a:srgbClr val="D5DCDA"/>
+                      </a:solidFill>
+                      <a:prstDash val="solid"/>
+                      <a:round/>
+                      <a:headEnd type="none" w="med" len="med"/>
+                      <a:tailEnd type="none" w="med" len="med"/>
+                    </a:lnB>
+                  </a:tcPr>
+                </a:tc>
+              </a:tr>
+              <a:tr h="731520">
+                <a:tc>
+                  <a:txBody>
+                    <a:bodyPr/>
+                    <a:lstStyle/>
+                    <a:p>
+                      <a:pPr algn="ctr" indent="0" marL="0">
+                        <a:buNone/>
+                      </a:pPr>
+                      <a:r>
+                        <a:rPr lang="en-US" sz="1600" b="1" dirty="0">
+                          <a:solidFill>
+                            <a:schemeClr val="accent1"/>
+                          </a:solidFill>
+                        </a:rPr>
+                        <a:t>04</a:t>
+                      </a:r>
+                      <a:endParaRPr lang="en-US" sz="1600" dirty="0"/>
+                    </a:p>
+                  </a:txBody>
+                  <a:tcPr marL="109728" marR="109728" marT="36576" marB="36576" anchor="ctr">
+                    <a:lnL w="9525" cap="flat" cmpd="sng" algn="ctr">
+                      <a:solidFill>
+                        <a:srgbClr val="D5DCDA"/>
+                      </a:solidFill>
+                      <a:prstDash val="solid"/>
+                      <a:round/>
+                      <a:headEnd type="none" w="med" len="med"/>
+                      <a:tailEnd type="none" w="med" len="med"/>
+                    </a:lnL>
+                    <a:lnR w="9525" cap="flat" cmpd="sng" algn="ctr">
+                      <a:solidFill>
+                        <a:srgbClr val="D5DCDA"/>
+                      </a:solidFill>
+                      <a:prstDash val="solid"/>
+                      <a:round/>
+                      <a:headEnd type="none" w="med" len="med"/>
+                      <a:tailEnd type="none" w="med" len="med"/>
+                    </a:lnR>
+                    <a:lnT w="9525" cap="flat" cmpd="sng" algn="ctr">
+                      <a:solidFill>
+                        <a:srgbClr val="D5DCDA"/>
+                      </a:solidFill>
+                      <a:prstDash val="solid"/>
+                      <a:round/>
+                      <a:headEnd type="none" w="med" len="med"/>
+                      <a:tailEnd type="none" w="med" len="med"/>
+                    </a:lnT>
+                    <a:lnB w="9525" cap="flat" cmpd="sng" algn="ctr">
+                      <a:solidFill>
+                        <a:srgbClr val="D5DCDA"/>
+                      </a:solidFill>
+                      <a:prstDash val="solid"/>
+                      <a:round/>
+                      <a:headEnd type="none" w="med" len="med"/>
+                      <a:tailEnd type="none" w="med" len="med"/>
+                    </a:lnB>
+                  </a:tcPr>
+                </a:tc>
+                <a:tc>
+                  <a:txBody>
+                    <a:bodyPr/>
+                    <a:lstStyle/>
+                    <a:p>
+                      <a:pPr indent="0" marL="0">
+                        <a:buNone/>
+                      </a:pPr>
+                      <a:r>
+                        <a:rPr lang="en-US" sz="1300" b="1" dirty="0">
+                          <a:solidFill>
+                            <a:schemeClr val="tx1"/>
+                          </a:solidFill>
+                        </a:rPr>
+                        <a:t>本業の外は、買わずに自分で作る</a:t>
+                      </a:r>
+                      <a:endParaRPr lang="en-US" sz="1300" dirty="0"/>
+                    </a:p>
+                  </a:txBody>
+                  <a:tcPr marL="109728" marR="109728" marT="36576" marB="36576" anchor="ctr">
+                    <a:lnL w="9525" cap="flat" cmpd="sng" algn="ctr">
+                      <a:solidFill>
+                        <a:srgbClr val="D5DCDA"/>
+                      </a:solidFill>
+                      <a:prstDash val="solid"/>
+                      <a:round/>
+                      <a:headEnd type="none" w="med" len="med"/>
+                      <a:tailEnd type="none" w="med" len="med"/>
+                    </a:lnL>
+                    <a:lnR w="9525" cap="flat" cmpd="sng" algn="ctr">
+                      <a:solidFill>
+                        <a:srgbClr val="D5DCDA"/>
+                      </a:solidFill>
+                      <a:prstDash val="solid"/>
+                      <a:round/>
+                      <a:headEnd type="none" w="med" len="med"/>
+                      <a:tailEnd type="none" w="med" len="med"/>
+                    </a:lnR>
+                    <a:lnT w="9525" cap="flat" cmpd="sng" algn="ctr">
+                      <a:solidFill>
+                        <a:srgbClr val="D5DCDA"/>
+                      </a:solidFill>
+                      <a:prstDash val="solid"/>
+                      <a:round/>
+                      <a:headEnd type="none" w="med" len="med"/>
+                      <a:tailEnd type="none" w="med" len="med"/>
+                    </a:lnT>
+                    <a:lnB w="9525" cap="flat" cmpd="sng" algn="ctr">
+                      <a:solidFill>
+                        <a:srgbClr val="D5DCDA"/>
+                      </a:solidFill>
+                      <a:prstDash val="solid"/>
+                      <a:round/>
+                      <a:headEnd type="none" w="med" len="med"/>
+                      <a:tailEnd type="none" w="med" len="med"/>
+                    </a:lnB>
+                  </a:tcPr>
+                </a:tc>
+                <a:tc>
+                  <a:txBody>
+                    <a:bodyPr/>
+                    <a:lstStyle/>
+                    <a:p>
+                      <a:pPr indent="0" marL="0">
+                        <a:buNone/>
+                      </a:pPr>
+                      <a:r>
+                        <a:rPr lang="en-US" sz="1300" dirty="0">
+                          <a:solidFill>
+                            <a:schemeClr val="accent4"/>
+                          </a:solidFill>
+                        </a:rPr>
+                        <a:t>買った本業外は全敗</a:t>
+                      </a:r>
+                      <a:endParaRPr lang="en-US" sz="1300" dirty="0"/>
+                    </a:p>
+                  </a:txBody>
+                  <a:tcPr marL="109728" marR="109728" marT="36576" marB="36576" anchor="ctr">
+                    <a:lnL w="9525" cap="flat" cmpd="sng" algn="ctr">
+                      <a:solidFill>
+                        <a:srgbClr val="D5DCDA"/>
+                      </a:solidFill>
+                      <a:prstDash val="solid"/>
+                      <a:round/>
+                      <a:headEnd type="none" w="med" len="med"/>
+                      <a:tailEnd type="none" w="med" len="med"/>
+                    </a:lnL>
+                    <a:lnR w="9525" cap="flat" cmpd="sng" algn="ctr">
+                      <a:solidFill>
+                        <a:srgbClr val="D5DCDA"/>
+                      </a:solidFill>
+                      <a:prstDash val="solid"/>
+                      <a:round/>
+                      <a:headEnd type="none" w="med" len="med"/>
+                      <a:tailEnd type="none" w="med" len="med"/>
+                    </a:lnR>
+                    <a:lnT w="9525" cap="flat" cmpd="sng" algn="ctr">
+                      <a:solidFill>
+                        <a:srgbClr val="D5DCDA"/>
+                      </a:solidFill>
+                      <a:prstDash val="solid"/>
+                      <a:round/>
+                      <a:headEnd type="none" w="med" len="med"/>
+                      <a:tailEnd type="none" w="med" len="med"/>
+                    </a:lnT>
+                    <a:lnB w="9525" cap="flat" cmpd="sng" algn="ctr">
+                      <a:solidFill>
+                        <a:srgbClr val="D5DCDA"/>
+                      </a:solidFill>
+                      <a:prstDash val="solid"/>
+                      <a:round/>
+                      <a:headEnd type="none" w="med" len="med"/>
+                      <a:tailEnd type="none" w="med" len="med"/>
+                    </a:lnB>
+                  </a:tcPr>
+                </a:tc>
+                <a:tc>
+                  <a:txBody>
+                    <a:bodyPr/>
+                    <a:lstStyle/>
+                    <a:p>
+                      <a:pPr indent="0" marL="0">
+                        <a:buNone/>
+                      </a:pPr>
+                      <a:r>
+                        <a:rPr lang="en-US" sz="1300" dirty="0">
+                          <a:solidFill>
+                            <a:schemeClr val="tx1"/>
+                          </a:solidFill>
+                        </a:rPr>
+                        <a:t>買収戦略の段階で、本業外の案件を候補から外す</a:t>
+                      </a:r>
+                      <a:endParaRPr lang="en-US" sz="1300" dirty="0"/>
+                    </a:p>
+                  </a:txBody>
+                  <a:tcPr marL="109728" marR="109728" marT="36576" marB="36576" anchor="ctr">
+                    <a:lnL w="9525" cap="flat" cmpd="sng" algn="ctr">
+                      <a:solidFill>
+                        <a:srgbClr val="D5DCDA"/>
+                      </a:solidFill>
+                      <a:prstDash val="solid"/>
+                      <a:round/>
+                      <a:headEnd type="none" w="med" len="med"/>
+                      <a:tailEnd type="none" w="med" len="med"/>
+                    </a:lnL>
+                    <a:lnR w="9525" cap="flat" cmpd="sng" algn="ctr">
+                      <a:solidFill>
+                        <a:srgbClr val="D5DCDA"/>
+                      </a:solidFill>
+                      <a:prstDash val="solid"/>
+                      <a:round/>
+                      <a:headEnd type="none" w="med" len="med"/>
+                      <a:tailEnd type="none" w="med" len="med"/>
+                    </a:lnR>
+                    <a:lnT w="9525" cap="flat" cmpd="sng" algn="ctr">
+                      <a:solidFill>
+                        <a:srgbClr val="D5DCDA"/>
+                      </a:solidFill>
+                      <a:prstDash val="solid"/>
+                      <a:round/>
+                      <a:headEnd type="none" w="med" len="med"/>
+                      <a:tailEnd type="none" w="med" len="med"/>
+                    </a:lnT>
+                    <a:lnB w="9525" cap="flat" cmpd="sng" algn="ctr">
+                      <a:solidFill>
+                        <a:srgbClr val="D5DCDA"/>
+                      </a:solidFill>
+                      <a:prstDash val="solid"/>
+                      <a:round/>
+                      <a:headEnd type="none" w="med" len="med"/>
+                      <a:tailEnd type="none" w="med" len="med"/>
+                    </a:lnB>
+                  </a:tcPr>
+                </a:tc>
+              </a:tr>
+              <a:tr h="731520">
+                <a:tc>
+                  <a:txBody>
+                    <a:bodyPr/>
+                    <a:lstStyle/>
+                    <a:p>
+                      <a:pPr algn="ctr" indent="0" marL="0">
+                        <a:buNone/>
+                      </a:pPr>
+                      <a:r>
+                        <a:rPr lang="en-US" sz="1600" b="1" dirty="0">
+                          <a:solidFill>
+                            <a:schemeClr val="accent1"/>
+                          </a:solidFill>
+                        </a:rPr>
+                        <a:t>05</a:t>
+                      </a:r>
+                      <a:endParaRPr lang="en-US" sz="1600" dirty="0"/>
+                    </a:p>
+                  </a:txBody>
+                  <a:tcPr marL="109728" marR="109728" marT="36576" marB="36576" anchor="ctr">
+                    <a:lnL w="9525" cap="flat" cmpd="sng" algn="ctr">
+                      <a:solidFill>
+                        <a:srgbClr val="D5DCDA"/>
+                      </a:solidFill>
+                      <a:prstDash val="solid"/>
+                      <a:round/>
+                      <a:headEnd type="none" w="med" len="med"/>
+                      <a:tailEnd type="none" w="med" len="med"/>
+                    </a:lnL>
+                    <a:lnR w="9525" cap="flat" cmpd="sng" algn="ctr">
+                      <a:solidFill>
+                        <a:srgbClr val="D5DCDA"/>
+                      </a:solidFill>
+                      <a:prstDash val="solid"/>
+                      <a:round/>
+                      <a:headEnd type="none" w="med" len="med"/>
+                      <a:tailEnd type="none" w="med" len="med"/>
+                    </a:lnR>
+                    <a:lnT w="9525" cap="flat" cmpd="sng" algn="ctr">
+                      <a:solidFill>
+                        <a:srgbClr val="D5DCDA"/>
+                      </a:solidFill>
+                      <a:prstDash val="solid"/>
+                      <a:round/>
+                      <a:headEnd type="none" w="med" len="med"/>
+                      <a:tailEnd type="none" w="med" len="med"/>
+                    </a:lnT>
+                    <a:lnB w="9525" cap="flat" cmpd="sng" algn="ctr">
+                      <a:solidFill>
+                        <a:srgbClr val="D5DCDA"/>
+                      </a:solidFill>
+                      <a:prstDash val="solid"/>
+                      <a:round/>
+                      <a:headEnd type="none" w="med" len="med"/>
+                      <a:tailEnd type="none" w="med" len="med"/>
+                    </a:lnB>
+                  </a:tcPr>
+                </a:tc>
+                <a:tc>
+                  <a:txBody>
+                    <a:bodyPr/>
+                    <a:lstStyle/>
+                    <a:p>
+                      <a:pPr indent="0" marL="0">
+                        <a:buNone/>
+                      </a:pPr>
+                      <a:r>
+                        <a:rPr lang="en-US" sz="1300" b="1" dirty="0">
+                          <a:solidFill>
+                            <a:schemeClr val="tx1"/>
+                          </a:solidFill>
+                        </a:rPr>
+                        <a:t>売る時期を、買う前に決めておく</a:t>
+                      </a:r>
+                      <a:endParaRPr lang="en-US" sz="1300" dirty="0"/>
+                    </a:p>
+                  </a:txBody>
+                  <a:tcPr marL="109728" marR="109728" marT="36576" marB="36576" anchor="ctr">
+                    <a:lnL w="9525" cap="flat" cmpd="sng" algn="ctr">
+                      <a:solidFill>
+                        <a:srgbClr val="D5DCDA"/>
+                      </a:solidFill>
+                      <a:prstDash val="solid"/>
+                      <a:round/>
+                      <a:headEnd type="none" w="med" len="med"/>
+                      <a:tailEnd type="none" w="med" len="med"/>
+                    </a:lnL>
+                    <a:lnR w="9525" cap="flat" cmpd="sng" algn="ctr">
+                      <a:solidFill>
+                        <a:srgbClr val="D5DCDA"/>
+                      </a:solidFill>
+                      <a:prstDash val="solid"/>
+                      <a:round/>
+                      <a:headEnd type="none" w="med" len="med"/>
+                      <a:tailEnd type="none" w="med" len="med"/>
+                    </a:lnR>
+                    <a:lnT w="9525" cap="flat" cmpd="sng" algn="ctr">
+                      <a:solidFill>
+                        <a:srgbClr val="D5DCDA"/>
+                      </a:solidFill>
+                      <a:prstDash val="solid"/>
+                      <a:round/>
+                      <a:headEnd type="none" w="med" len="med"/>
+                      <a:tailEnd type="none" w="med" len="med"/>
+                    </a:lnT>
+                    <a:lnB w="9525" cap="flat" cmpd="sng" algn="ctr">
+                      <a:solidFill>
+                        <a:srgbClr val="D5DCDA"/>
+                      </a:solidFill>
+                      <a:prstDash val="solid"/>
+                      <a:round/>
+                      <a:headEnd type="none" w="med" len="med"/>
+                      <a:tailEnd type="none" w="med" len="med"/>
+                    </a:lnB>
+                  </a:tcPr>
+                </a:tc>
+                <a:tc>
+                  <a:txBody>
+                    <a:bodyPr/>
+                    <a:lstStyle/>
+                    <a:p>
+                      <a:pPr indent="0" marL="0">
+                        <a:buNone/>
+                      </a:pPr>
+                      <a:r>
+                        <a:rPr lang="en-US" sz="1300" dirty="0">
+                          <a:solidFill>
+                            <a:schemeClr val="accent4"/>
+                          </a:solidFill>
+                        </a:rPr>
+                        <a:t>6年保有で−1.70億円、2ヶ月で30%売却して回収</a:t>
+                      </a:r>
+                      <a:endParaRPr lang="en-US" sz="1300" dirty="0"/>
+                    </a:p>
+                  </a:txBody>
+                  <a:tcPr marL="109728" marR="109728" marT="36576" marB="36576" anchor="ctr">
+                    <a:lnL w="9525" cap="flat" cmpd="sng" algn="ctr">
+                      <a:solidFill>
+                        <a:srgbClr val="D5DCDA"/>
+                      </a:solidFill>
+                      <a:prstDash val="solid"/>
+                      <a:round/>
+                      <a:headEnd type="none" w="med" len="med"/>
+                      <a:tailEnd type="none" w="med" len="med"/>
+                    </a:lnL>
+                    <a:lnR w="9525" cap="flat" cmpd="sng" algn="ctr">
+                      <a:solidFill>
+                        <a:srgbClr val="D5DCDA"/>
+                      </a:solidFill>
+                      <a:prstDash val="solid"/>
+                      <a:round/>
+                      <a:headEnd type="none" w="med" len="med"/>
+                      <a:tailEnd type="none" w="med" len="med"/>
+                    </a:lnR>
+                    <a:lnT w="9525" cap="flat" cmpd="sng" algn="ctr">
+                      <a:solidFill>
+                        <a:srgbClr val="D5DCDA"/>
+                      </a:solidFill>
+                      <a:prstDash val="solid"/>
+                      <a:round/>
+                      <a:headEnd type="none" w="med" len="med"/>
+                      <a:tailEnd type="none" w="med" len="med"/>
+                    </a:lnT>
+                    <a:lnB w="9525" cap="flat" cmpd="sng" algn="ctr">
+                      <a:solidFill>
+                        <a:srgbClr val="D5DCDA"/>
+                      </a:solidFill>
+                      <a:prstDash val="solid"/>
+                      <a:round/>
+                      <a:headEnd type="none" w="med" len="med"/>
+                      <a:tailEnd type="none" w="med" len="med"/>
+                    </a:lnB>
+                  </a:tcPr>
+                </a:tc>
+                <a:tc>
+                  <a:txBody>
+                    <a:bodyPr/>
+                    <a:lstStyle/>
+                    <a:p>
+                      <a:pPr indent="0" marL="0">
+                        <a:buNone/>
+                      </a:pPr>
+                      <a:r>
+                        <a:rPr lang="en-US" sz="1300" dirty="0">
+                          <a:solidFill>
+                            <a:schemeClr val="tx1"/>
+                          </a:solidFill>
+                        </a:rPr>
+                        <a:t>撤退ライン（損切り基準）を買収前に文書化して合意</a:t>
+                      </a:r>
+                      <a:endParaRPr lang="en-US" sz="1300" dirty="0"/>
+                    </a:p>
+                  </a:txBody>
+                  <a:tcPr marL="109728" marR="109728" marT="36576" marB="36576" anchor="ctr">
+                    <a:lnL w="9525" cap="flat" cmpd="sng" algn="ctr">
+                      <a:solidFill>
+                        <a:srgbClr val="D5DCDA"/>
+                      </a:solidFill>
+                      <a:prstDash val="solid"/>
+                      <a:round/>
+                      <a:headEnd type="none" w="med" len="med"/>
+                      <a:tailEnd type="none" w="med" len="med"/>
+                    </a:lnL>
+                    <a:lnR w="9525" cap="flat" cmpd="sng" algn="ctr">
+                      <a:solidFill>
+                        <a:srgbClr val="D5DCDA"/>
+                      </a:solidFill>
+                      <a:prstDash val="solid"/>
+                      <a:round/>
+                      <a:headEnd type="none" w="med" len="med"/>
+                      <a:tailEnd type="none" w="med" len="med"/>
+                    </a:lnR>
+                    <a:lnT w="9525" cap="flat" cmpd="sng" algn="ctr">
+                      <a:solidFill>
+                        <a:srgbClr val="D5DCDA"/>
+                      </a:solidFill>
+                      <a:prstDash val="solid"/>
+                      <a:round/>
+                      <a:headEnd type="none" w="med" len="med"/>
+                      <a:tailEnd type="none" w="med" len="med"/>
+                    </a:lnT>
+                    <a:lnB w="9525" cap="flat" cmpd="sng" algn="ctr">
+                      <a:solidFill>
+                        <a:srgbClr val="D5DCDA"/>
+                      </a:solidFill>
+                      <a:prstDash val="solid"/>
+                      <a:round/>
+                      <a:headEnd type="none" w="med" len="med"/>
+                      <a:tailEnd type="none" w="med" len="med"/>
+                    </a:lnB>
+                  </a:tcPr>
+                </a:tc>
+              </a:tr>
+            </a:tbl>
+          </a:graphicData>
+        </a:graphic>
+      </p:graphicFrame>
+      <p:sp>
+        <p:nvSpPr>
+          <p:cNvPr id="25" name="Slide Number Placeholder 0"/>
+          <p:cNvSpPr>
+            <a:spLocks noGrp="1"/>
+          </p:cNvSpPr>
+          <p:nvPr>
+            <p:ph type="sldNum" sz="quarter" idx="4294967295"/>
+          </p:nvPr>
+        </p:nvSpPr>
+        <p:spPr>
+          <a:xfrm>
+            <a:off x="11155680" y="6419088"/>
+            <a:ext cx="457200" cy="274320"/>
+          </a:xfrm>
+          <a:prstGeom prst="rect">
+            <a:avLst/>
+          </a:prstGeom>
+          <a:extLst>
+            <a:ext uri="{C572A759-6A51-4108-AA02-DFA0A04FC94B}">
+              <ma14:wrappingTextBoxFlag xmlns:ma14="http://schemas.microsoft.com/office/mac/drawingml/2011/main" val="0"/>
+            </a:ext>
+          </a:extLst>
+        </p:spPr>
+        <p:txBody>
+          <a:bodyPr/>
+          <a:lstStyle>
+            <a:lvl1pPr>
+              <a:defRPr sz="900">
+                <a:solidFill>
+                  <a:schemeClr val="accent4"/>
+                </a:solidFill>
+              </a:defRPr>
+            </a:lvl1pPr>
+          </a:lstStyle>
+          <a:p>
+            <a:pPr algn="r"/>
+            <a:fld id="{F7021451-1387-4CA6-816F-3879F97B5CBC}" type="slidenum">
+              <a:rPr b="0" lang="en-US"/>
+              <a:t>28</a:t>
+            </a:fld>
+            <a:endParaRPr lang="en-US"/>
+          </a:p>
+        </p:txBody>
+      </p:sp>
+    </p:spTree>
+  </p:cSld>
+  <p:clrMapOvr>
+    <a:masterClrMapping/>
+  </p:clrMapOvr>
+</p:sld>
+</file>
+
+<file path=ppt/slides/slide29.xml><?xml version="1.0" encoding="utf-8"?>
+<p:sld xmlns:a="http://schemas.openxmlformats.org/drawingml/2006/main" xmlns:r="http://schemas.openxmlformats.org/officeDocument/2006/relationships" xmlns:p="http://schemas.openxmlformats.org/presentationml/2006/main">
+  <p:cSld name="Slide 29">
+    <p:spTree>
+      <p:nvGrpSpPr>
+        <p:cNvPr id="1" name=""/>
+        <p:cNvGrpSpPr/>
+        <p:nvPr/>
+      </p:nvGrpSpPr>
+      <p:grpSpPr>
+        <a:xfrm>
+          <a:off x="0" y="0"/>
+          <a:ext cx="0" cy="0"/>
+          <a:chOff x="0" y="0"/>
+          <a:chExt cx="0" cy="0"/>
+        </a:xfrm>
+      </p:grpSpPr>
+      <p:sp>
+        <p:nvSpPr>
+          <p:cNvPr id="2" name="Text 0"/>
+          <p:cNvSpPr/>
+          <p:nvPr>
+            <p:ph idx="100" type="title" hasCustomPrompt="1"/>
+          </p:nvPr>
+        </p:nvSpPr>
+        <p:spPr>
+          <a:xfrm>
+            <a:off x="548640" y="320040"/>
+            <a:ext cx="11064240" cy="685800"/>
+          </a:xfrm>
+          <a:prstGeom prst="rect">
+            <a:avLst/>
+          </a:prstGeom>
+          <a:noFill/>
+          <a:ln/>
+        </p:spPr>
+        <p:txBody>
+          <a:bodyPr wrap="square" lIns="0" tIns="0" rIns="0" bIns="0" rtlCol="0" anchor="ctr"/>
+          <a:lstStyle/>
+          <a:p>
+            <a:pPr algn="l" indent="0" marL="0">
+              <a:buNone/>
+            </a:pPr>
+            <a:r>
+              <a:rPr lang="en-US" sz="2600" b="1" dirty="0">
+                <a:solidFill>
+                  <a:schemeClr val="tx2"/>
+                </a:solidFill>
+              </a:rPr>
+              <a:t>指導型サービスの設計：12ヶ月で「自社で買える会社」にする</a:t>
+            </a:r>
+            <a:endParaRPr lang="en-US" sz="2600" dirty="0"/>
+          </a:p>
+        </p:txBody>
+      </p:sp>
+      <p:sp>
+        <p:nvSpPr>
+          <p:cNvPr id="3" name="Text 0"/>
+          <p:cNvSpPr/>
+          <p:nvPr>
+            <p:ph idx="101" type="body" hasCustomPrompt="1"/>
+          </p:nvPr>
+        </p:nvSpPr>
+        <p:spPr>
+          <a:xfrm>
+            <a:off x="548640" y="1005840"/>
+            <a:ext cx="11064240" cy="411480"/>
+          </a:xfrm>
+          <a:prstGeom prst="rect">
+            <a:avLst/>
+          </a:prstGeom>
+          <a:noFill/>
+          <a:ln/>
+        </p:spPr>
+        <p:txBody>
+          <a:bodyPr wrap="square" lIns="0" tIns="0" rIns="0" bIns="0" rtlCol="0" anchor="t"/>
+          <a:lstStyle/>
+          <a:p>
+            <a:pPr indent="0" marL="0">
+              <a:buNone/>
+            </a:pPr>
+            <a:r>
+              <a:rPr lang="en-US" sz="1500" dirty="0">
+                <a:solidFill>
+                  <a:schemeClr val="accent4"/>
+                </a:solidFill>
+              </a:rPr>
+              <a:t>コンサルタントが案件を進めながら、担当者に手順を移植する。成果は「成約」と「人が育つこと」の両方</a:t>
+            </a:r>
+            <a:endParaRPr lang="en-US" sz="1500" dirty="0"/>
+          </a:p>
+        </p:txBody>
+      </p:sp>
+      <p:sp>
+        <p:nvSpPr>
+          <p:cNvPr id="4" name="timeline 1"/>
+          <p:cNvSpPr/>
+          <p:nvPr/>
+        </p:nvSpPr>
+        <p:spPr>
+          <a:xfrm>
+            <a:off x="548640" y="1645920"/>
+            <a:ext cx="2697480" cy="685800"/>
+          </a:xfrm>
+          <a:prstGeom prst="chevron">
+            <a:avLst/>
+          </a:prstGeom>
+          <a:solidFill>
+            <a:schemeClr val="tx2"/>
+          </a:solidFill>
+          <a:ln w="12700">
+            <a:solidFill>
+              <a:schemeClr val="tx2"/>
+            </a:solidFill>
+            <a:prstDash val="solid"/>
+          </a:ln>
+        </p:spPr>
+      </p:sp>
+      <p:sp>
+        <p:nvSpPr>
+          <p:cNvPr id="5" name="Text 3"/>
+          <p:cNvSpPr txBox="1"/>
+          <p:nvPr/>
+        </p:nvSpPr>
+        <p:spPr>
+          <a:xfrm>
+            <a:off x="822960" y="1645920"/>
+            <a:ext cx="2194560" cy="685800"/>
+          </a:xfrm>
+          <a:prstGeom prst="rect">
+            <a:avLst/>
+          </a:prstGeom>
+          <a:noFill/>
+          <a:ln/>
+        </p:spPr>
+        <p:txBody>
+          <a:bodyPr wrap="square" lIns="0" tIns="0" rIns="0" bIns="0" rtlCol="0" anchor="ctr"/>
+          <a:lstStyle/>
+          <a:p>
+            <a:pPr algn="ctr" indent="0" marL="0">
+              <a:buNone/>
+            </a:pPr>
+            <a:r>
+              <a:rPr lang="en-US" sz="1500" b="1" dirty="0">
+                <a:solidFill>
+                  <a:schemeClr val="bg1"/>
+                </a:solidFill>
+              </a:rPr>
+              <a:t>1〜2ヶ月</a:t>
+            </a:r>
+            <a:endParaRPr lang="en-US" sz="1500" dirty="0"/>
+          </a:p>
+        </p:txBody>
+      </p:sp>
+      <p:sp>
+        <p:nvSpPr>
+          <p:cNvPr id="6" name="timeline body 1"/>
+          <p:cNvSpPr/>
+          <p:nvPr/>
+        </p:nvSpPr>
+        <p:spPr>
+          <a:xfrm>
+            <a:off x="548640" y="2468880"/>
+            <a:ext cx="2606040" cy="2011680"/>
+          </a:xfrm>
+          <a:prstGeom prst="roundRect">
+            <a:avLst>
+              <a:gd name="adj" fmla="val 3636"/>
+            </a:avLst>
+          </a:prstGeom>
+          <a:solidFill>
+            <a:schemeClr val="bg2"/>
+          </a:solidFill>
+          <a:ln w="12700">
+            <a:solidFill>
+              <a:schemeClr val="bg2"/>
+            </a:solidFill>
+            <a:prstDash val="solid"/>
+          </a:ln>
+        </p:spPr>
+      </p:sp>
+      <p:sp>
+        <p:nvSpPr>
+          <p:cNvPr id="7" name="Text 5"/>
+          <p:cNvSpPr txBox="1"/>
+          <p:nvPr/>
+        </p:nvSpPr>
+        <p:spPr>
+          <a:xfrm>
+            <a:off x="731520" y="2578608"/>
+            <a:ext cx="2240280" cy="411480"/>
+          </a:xfrm>
+          <a:prstGeom prst="rect">
+            <a:avLst/>
+          </a:prstGeom>
+          <a:noFill/>
+          <a:ln/>
+        </p:spPr>
+        <p:txBody>
+          <a:bodyPr wrap="square" lIns="0" tIns="0" rIns="0" bIns="0" rtlCol="0" anchor="t"/>
+          <a:lstStyle/>
+          <a:p>
+            <a:pPr indent="0" marL="0">
+              <a:buNone/>
+            </a:pPr>
+            <a:r>
+              <a:rPr lang="en-US" sz="1500" b="1" dirty="0">
+                <a:solidFill>
+                  <a:schemeClr val="tx2"/>
+                </a:solidFill>
+              </a:rPr>
+              <a:t>戦略と値づけ基準</a:t>
+            </a:r>
+            <a:endParaRPr lang="en-US" sz="1500" dirty="0"/>
+          </a:p>
+        </p:txBody>
+      </p:sp>
+      <p:sp>
+        <p:nvSpPr>
+          <p:cNvPr id="8" name="Text 6"/>
+          <p:cNvSpPr txBox="1"/>
+          <p:nvPr/>
+        </p:nvSpPr>
+        <p:spPr>
+          <a:xfrm>
+            <a:off x="731520" y="3017520"/>
+            <a:ext cx="2240280" cy="1371600"/>
+          </a:xfrm>
+          <a:prstGeom prst="rect">
+            <a:avLst/>
+          </a:prstGeom>
+          <a:noFill/>
+          <a:ln/>
+        </p:spPr>
+        <p:txBody>
+          <a:bodyPr wrap="square" lIns="0" tIns="0" rIns="0" bIns="0" rtlCol="0" anchor="t"/>
+          <a:lstStyle/>
+          <a:p>
+            <a:pPr indent="0" marL="0">
+              <a:buNone/>
+            </a:pPr>
+            <a:r>
+              <a:rPr lang="en-US" sz="1200" dirty="0">
+                <a:solidFill>
+                  <a:schemeClr val="tx1"/>
+                </a:solidFill>
+              </a:rPr>
+              <a:t>自社BS/PLをAIで分析し、買う領域・予算・借入余力を決める</a:t>
+            </a:r>
+            <a:endParaRPr lang="en-US" sz="1200" dirty="0"/>
+          </a:p>
+        </p:txBody>
+      </p:sp>
+      <p:sp>
+        <p:nvSpPr>
+          <p:cNvPr id="9" name="timeline goal 1"/>
+          <p:cNvSpPr/>
+          <p:nvPr/>
+        </p:nvSpPr>
+        <p:spPr>
+          <a:xfrm>
+            <a:off x="548640" y="4572000"/>
+            <a:ext cx="2606040" cy="731520"/>
+          </a:xfrm>
+          <a:prstGeom prst="roundRect">
+            <a:avLst>
+              <a:gd name="adj" fmla="val 10000"/>
+            </a:avLst>
+          </a:prstGeom>
+          <a:solidFill>
+            <a:schemeClr val="accent5"/>
+          </a:solidFill>
+          <a:ln w="12700">
+            <a:solidFill>
+              <a:schemeClr val="accent5"/>
+            </a:solidFill>
+            <a:prstDash val="solid"/>
+          </a:ln>
+        </p:spPr>
+      </p:sp>
+      <p:sp>
+        <p:nvSpPr>
+          <p:cNvPr id="10" name="Text 8"/>
+          <p:cNvSpPr txBox="1"/>
+          <p:nvPr/>
+        </p:nvSpPr>
+        <p:spPr>
+          <a:xfrm>
+            <a:off x="731520" y="4572000"/>
+            <a:ext cx="2240280" cy="731520"/>
+          </a:xfrm>
+          <a:prstGeom prst="rect">
+            <a:avLst/>
+          </a:prstGeom>
+          <a:noFill/>
+          <a:ln/>
+        </p:spPr>
+        <p:txBody>
+          <a:bodyPr wrap="square" lIns="0" tIns="0" rIns="0" bIns="0" rtlCol="0" anchor="ctr"/>
+          <a:lstStyle/>
+          <a:p>
+            <a:pPr indent="0" marL="0">
+              <a:buNone/>
+            </a:pPr>
+            <a:r>
+              <a:rPr lang="en-US" sz="1200" b="1" dirty="0">
+                <a:solidFill>
+                  <a:schemeClr val="tx2"/>
+                </a:solidFill>
+              </a:rPr>
+              <a:t>担当者が：</a:t>
+            </a:r>
+            <a:pPr indent="0" marL="0">
+              <a:buNone/>
+            </a:pPr>
+            <a:r>
+              <a:rPr lang="en-US" sz="1200" dirty="0">
+                <a:solidFill>
+                  <a:schemeClr val="tx1"/>
+                </a:solidFill>
+              </a:rPr>
+              <a:t>自社の買収基準を言える</a:t>
+            </a:r>
+            <a:endParaRPr lang="en-US" sz="1200" dirty="0"/>
+          </a:p>
+        </p:txBody>
+      </p:sp>
+      <p:sp>
+        <p:nvSpPr>
+          <p:cNvPr id="11" name="timeline 2"/>
+          <p:cNvSpPr/>
+          <p:nvPr/>
+        </p:nvSpPr>
+        <p:spPr>
+          <a:xfrm>
+            <a:off x="3346704" y="1645920"/>
+            <a:ext cx="2697480" cy="685800"/>
+          </a:xfrm>
+          <a:prstGeom prst="chevron">
+            <a:avLst/>
+          </a:prstGeom>
+          <a:solidFill>
+            <a:schemeClr val="tx2"/>
+          </a:solidFill>
+          <a:ln w="12700">
+            <a:solidFill>
+              <a:schemeClr val="tx2"/>
+            </a:solidFill>
+            <a:prstDash val="solid"/>
+          </a:ln>
+        </p:spPr>
+      </p:sp>
+      <p:sp>
+        <p:nvSpPr>
+          <p:cNvPr id="12" name="Text 10"/>
+          <p:cNvSpPr txBox="1"/>
+          <p:nvPr/>
+        </p:nvSpPr>
+        <p:spPr>
+          <a:xfrm>
+            <a:off x="3621024" y="1645920"/>
+            <a:ext cx="2194560" cy="685800"/>
+          </a:xfrm>
+          <a:prstGeom prst="rect">
+            <a:avLst/>
+          </a:prstGeom>
+          <a:noFill/>
+          <a:ln/>
+        </p:spPr>
+        <p:txBody>
+          <a:bodyPr wrap="square" lIns="0" tIns="0" rIns="0" bIns="0" rtlCol="0" anchor="ctr"/>
+          <a:lstStyle/>
+          <a:p>
+            <a:pPr algn="ctr" indent="0" marL="0">
+              <a:buNone/>
+            </a:pPr>
+            <a:r>
+              <a:rPr lang="en-US" sz="1500" b="1" dirty="0">
+                <a:solidFill>
+                  <a:schemeClr val="bg1"/>
+                </a:solidFill>
+              </a:rPr>
+              <a:t>3〜5ヶ月</a:t>
+            </a:r>
+            <a:endParaRPr lang="en-US" sz="1500" dirty="0"/>
+          </a:p>
+        </p:txBody>
+      </p:sp>
+      <p:sp>
+        <p:nvSpPr>
+          <p:cNvPr id="13" name="timeline body 2"/>
+          <p:cNvSpPr/>
+          <p:nvPr/>
+        </p:nvSpPr>
+        <p:spPr>
+          <a:xfrm>
+            <a:off x="3346704" y="2468880"/>
+            <a:ext cx="2606040" cy="2011680"/>
+          </a:xfrm>
+          <a:prstGeom prst="roundRect">
+            <a:avLst>
+              <a:gd name="adj" fmla="val 3636"/>
+            </a:avLst>
+          </a:prstGeom>
+          <a:solidFill>
+            <a:schemeClr val="bg2"/>
+          </a:solidFill>
+          <a:ln w="12700">
+            <a:solidFill>
+              <a:schemeClr val="bg2"/>
+            </a:solidFill>
+            <a:prstDash val="solid"/>
+          </a:ln>
+        </p:spPr>
+      </p:sp>
+      <p:sp>
+        <p:nvSpPr>
+          <p:cNvPr id="14" name="Text 12"/>
+          <p:cNvSpPr txBox="1"/>
+          <p:nvPr/>
+        </p:nvSpPr>
+        <p:spPr>
+          <a:xfrm>
+            <a:off x="3529584" y="2578608"/>
+            <a:ext cx="2240280" cy="411480"/>
+          </a:xfrm>
+          <a:prstGeom prst="rect">
+            <a:avLst/>
+          </a:prstGeom>
+          <a:noFill/>
+          <a:ln/>
+        </p:spPr>
+        <p:txBody>
+          <a:bodyPr wrap="square" lIns="0" tIns="0" rIns="0" bIns="0" rtlCol="0" anchor="t"/>
+          <a:lstStyle/>
+          <a:p>
+            <a:pPr indent="0" marL="0">
+              <a:buNone/>
+            </a:pPr>
+            <a:r>
+              <a:rPr lang="en-US" sz="1500" b="1" dirty="0">
+                <a:solidFill>
+                  <a:schemeClr val="tx2"/>
+                </a:solidFill>
+              </a:rPr>
+              <a:t>ソーシングとIM読解</a:t>
+            </a:r>
+            <a:endParaRPr lang="en-US" sz="1500" dirty="0"/>
+          </a:p>
+        </p:txBody>
+      </p:sp>
+      <p:sp>
+        <p:nvSpPr>
+          <p:cNvPr id="15" name="Text 13"/>
+          <p:cNvSpPr txBox="1"/>
+          <p:nvPr/>
+        </p:nvSpPr>
+        <p:spPr>
+          <a:xfrm>
+            <a:off x="3529584" y="3017520"/>
+            <a:ext cx="2240280" cy="1371600"/>
+          </a:xfrm>
+          <a:prstGeom prst="rect">
+            <a:avLst/>
+          </a:prstGeom>
+          <a:noFill/>
+          <a:ln/>
+        </p:spPr>
+        <p:txBody>
+          <a:bodyPr wrap="square" lIns="0" tIns="0" rIns="0" bIns="0" rtlCol="0" anchor="t"/>
+          <a:lstStyle/>
+          <a:p>
+            <a:pPr indent="0" marL="0">
+              <a:buNone/>
+            </a:pPr>
+            <a:r>
+              <a:rPr lang="en-US" sz="1200" dirty="0">
+                <a:solidFill>
+                  <a:schemeClr val="tx1"/>
+                </a:solidFill>
+              </a:rPr>
+              <a:t>候補リストを作り打診。IMをAIで読み、足切りと優先順位をつける</a:t>
+            </a:r>
+            <a:endParaRPr lang="en-US" sz="1200" dirty="0"/>
+          </a:p>
+        </p:txBody>
+      </p:sp>
+      <p:sp>
+        <p:nvSpPr>
+          <p:cNvPr id="16" name="timeline goal 2"/>
+          <p:cNvSpPr/>
+          <p:nvPr/>
+        </p:nvSpPr>
+        <p:spPr>
+          <a:xfrm>
+            <a:off x="3346704" y="4572000"/>
+            <a:ext cx="2606040" cy="731520"/>
+          </a:xfrm>
+          <a:prstGeom prst="roundRect">
+            <a:avLst>
+              <a:gd name="adj" fmla="val 10000"/>
+            </a:avLst>
+          </a:prstGeom>
+          <a:solidFill>
+            <a:schemeClr val="accent5"/>
+          </a:solidFill>
+          <a:ln w="12700">
+            <a:solidFill>
+              <a:schemeClr val="accent5"/>
+            </a:solidFill>
+            <a:prstDash val="solid"/>
+          </a:ln>
+        </p:spPr>
+      </p:sp>
+      <p:sp>
+        <p:nvSpPr>
+          <p:cNvPr id="17" name="Text 15"/>
+          <p:cNvSpPr txBox="1"/>
+          <p:nvPr/>
+        </p:nvSpPr>
+        <p:spPr>
+          <a:xfrm>
+            <a:off x="3529584" y="4572000"/>
+            <a:ext cx="2240280" cy="731520"/>
+          </a:xfrm>
+          <a:prstGeom prst="rect">
+            <a:avLst/>
+          </a:prstGeom>
+          <a:noFill/>
+          <a:ln/>
+        </p:spPr>
+        <p:txBody>
+          <a:bodyPr wrap="square" lIns="0" tIns="0" rIns="0" bIns="0" rtlCol="0" anchor="ctr"/>
+          <a:lstStyle/>
+          <a:p>
+            <a:pPr indent="0" marL="0">
+              <a:buNone/>
+            </a:pPr>
+            <a:r>
+              <a:rPr lang="en-US" sz="1200" b="1" dirty="0">
+                <a:solidFill>
+                  <a:schemeClr val="tx2"/>
+                </a:solidFill>
+              </a:rPr>
+              <a:t>担当者が：</a:t>
+            </a:r>
+            <a:pPr indent="0" marL="0">
+              <a:buNone/>
+            </a:pPr>
+            <a:r>
+              <a:rPr lang="en-US" sz="1200" dirty="0">
+                <a:solidFill>
+                  <a:schemeClr val="tx1"/>
+                </a:solidFill>
+              </a:rPr>
+              <a:t>IMを読み、足切りできる</a:t>
+            </a:r>
+            <a:endParaRPr lang="en-US" sz="1200" dirty="0"/>
+          </a:p>
+        </p:txBody>
+      </p:sp>
+      <p:sp>
+        <p:nvSpPr>
+          <p:cNvPr id="18" name="timeline 3"/>
+          <p:cNvSpPr/>
+          <p:nvPr/>
+        </p:nvSpPr>
+        <p:spPr>
+          <a:xfrm>
+            <a:off x="6144768" y="1645920"/>
+            <a:ext cx="2697480" cy="685800"/>
+          </a:xfrm>
+          <a:prstGeom prst="chevron">
+            <a:avLst/>
+          </a:prstGeom>
+          <a:solidFill>
+            <a:schemeClr val="tx2"/>
+          </a:solidFill>
+          <a:ln w="12700">
+            <a:solidFill>
+              <a:schemeClr val="tx2"/>
+            </a:solidFill>
+            <a:prstDash val="solid"/>
+          </a:ln>
+        </p:spPr>
+      </p:sp>
+      <p:sp>
+        <p:nvSpPr>
+          <p:cNvPr id="19" name="Text 17"/>
+          <p:cNvSpPr txBox="1"/>
+          <p:nvPr/>
+        </p:nvSpPr>
+        <p:spPr>
+          <a:xfrm>
+            <a:off x="6419088" y="1645920"/>
+            <a:ext cx="2194560" cy="685800"/>
+          </a:xfrm>
+          <a:prstGeom prst="rect">
+            <a:avLst/>
+          </a:prstGeom>
+          <a:noFill/>
+          <a:ln/>
+        </p:spPr>
+        <p:txBody>
+          <a:bodyPr wrap="square" lIns="0" tIns="0" rIns="0" bIns="0" rtlCol="0" anchor="ctr"/>
+          <a:lstStyle/>
+          <a:p>
+            <a:pPr algn="ctr" indent="0" marL="0">
+              <a:buNone/>
+            </a:pPr>
+            <a:r>
+              <a:rPr lang="en-US" sz="1500" b="1" dirty="0">
+                <a:solidFill>
+                  <a:schemeClr val="bg1"/>
+                </a:solidFill>
+              </a:rPr>
+              <a:t>6〜8ヶ月</a:t>
+            </a:r>
+            <a:endParaRPr lang="en-US" sz="1500" dirty="0"/>
+          </a:p>
+        </p:txBody>
+      </p:sp>
+      <p:sp>
+        <p:nvSpPr>
+          <p:cNvPr id="20" name="timeline body 3"/>
+          <p:cNvSpPr/>
+          <p:nvPr/>
+        </p:nvSpPr>
+        <p:spPr>
+          <a:xfrm>
+            <a:off x="6144768" y="2468880"/>
+            <a:ext cx="2606040" cy="2011680"/>
+          </a:xfrm>
+          <a:prstGeom prst="roundRect">
+            <a:avLst>
+              <a:gd name="adj" fmla="val 3636"/>
+            </a:avLst>
+          </a:prstGeom>
+          <a:solidFill>
+            <a:schemeClr val="bg2"/>
+          </a:solidFill>
+          <a:ln w="12700">
+            <a:solidFill>
+              <a:schemeClr val="bg2"/>
+            </a:solidFill>
+            <a:prstDash val="solid"/>
+          </a:ln>
+        </p:spPr>
+      </p:sp>
+      <p:sp>
+        <p:nvSpPr>
+          <p:cNvPr id="21" name="Text 19"/>
+          <p:cNvSpPr txBox="1"/>
+          <p:nvPr/>
+        </p:nvSpPr>
+        <p:spPr>
+          <a:xfrm>
+            <a:off x="6327648" y="2578608"/>
+            <a:ext cx="2240280" cy="411480"/>
+          </a:xfrm>
+          <a:prstGeom prst="rect">
+            <a:avLst/>
+          </a:prstGeom>
+          <a:noFill/>
+          <a:ln/>
+        </p:spPr>
+        <p:txBody>
+          <a:bodyPr wrap="square" lIns="0" tIns="0" rIns="0" bIns="0" rtlCol="0" anchor="t"/>
+          <a:lstStyle/>
+          <a:p>
+            <a:pPr indent="0" marL="0">
+              <a:buNone/>
+            </a:pPr>
+            <a:r>
+              <a:rPr lang="en-US" sz="1500" b="1" dirty="0">
+                <a:solidFill>
+                  <a:schemeClr val="tx2"/>
+                </a:solidFill>
+              </a:rPr>
+              <a:t>交渉・DD・資金</a:t>
+            </a:r>
+            <a:endParaRPr lang="en-US" sz="1500" dirty="0"/>
+          </a:p>
+        </p:txBody>
+      </p:sp>
+      <p:sp>
+        <p:nvSpPr>
+          <p:cNvPr id="22" name="Text 20"/>
+          <p:cNvSpPr txBox="1"/>
+          <p:nvPr/>
+        </p:nvSpPr>
+        <p:spPr>
+          <a:xfrm>
+            <a:off x="6327648" y="3017520"/>
+            <a:ext cx="2240280" cy="1371600"/>
+          </a:xfrm>
+          <a:prstGeom prst="rect">
+            <a:avLst/>
+          </a:prstGeom>
+          <a:noFill/>
+          <a:ln/>
+        </p:spPr>
+        <p:txBody>
+          <a:bodyPr wrap="square" lIns="0" tIns="0" rIns="0" bIns="0" rtlCol="0" anchor="t"/>
+          <a:lstStyle/>
+          <a:p>
+            <a:pPr indent="0" marL="0">
+              <a:buNone/>
+            </a:pPr>
+            <a:r>
+              <a:rPr lang="en-US" sz="1200" dirty="0">
+                <a:solidFill>
+                  <a:schemeClr val="tx1"/>
+                </a:solidFill>
+              </a:rPr>
+              <a:t>交渉に同席して指導。DDの論点整理と資金調達の設計</a:t>
+            </a:r>
+            <a:endParaRPr lang="en-US" sz="1200" dirty="0"/>
+          </a:p>
+        </p:txBody>
+      </p:sp>
+      <p:sp>
+        <p:nvSpPr>
+          <p:cNvPr id="23" name="timeline goal 3"/>
+          <p:cNvSpPr/>
+          <p:nvPr/>
+        </p:nvSpPr>
+        <p:spPr>
+          <a:xfrm>
+            <a:off x="6144768" y="4572000"/>
+            <a:ext cx="2606040" cy="731520"/>
+          </a:xfrm>
+          <a:prstGeom prst="roundRect">
+            <a:avLst>
+              <a:gd name="adj" fmla="val 10000"/>
+            </a:avLst>
+          </a:prstGeom>
+          <a:solidFill>
+            <a:schemeClr val="accent5"/>
+          </a:solidFill>
+          <a:ln w="12700">
+            <a:solidFill>
+              <a:schemeClr val="accent5"/>
+            </a:solidFill>
+            <a:prstDash val="solid"/>
+          </a:ln>
+        </p:spPr>
+      </p:sp>
+      <p:sp>
+        <p:nvSpPr>
+          <p:cNvPr id="24" name="Text 22"/>
+          <p:cNvSpPr txBox="1"/>
+          <p:nvPr/>
+        </p:nvSpPr>
+        <p:spPr>
+          <a:xfrm>
+            <a:off x="6327648" y="4572000"/>
+            <a:ext cx="2240280" cy="731520"/>
+          </a:xfrm>
+          <a:prstGeom prst="rect">
+            <a:avLst/>
+          </a:prstGeom>
+          <a:noFill/>
+          <a:ln/>
+        </p:spPr>
+        <p:txBody>
+          <a:bodyPr wrap="square" lIns="0" tIns="0" rIns="0" bIns="0" rtlCol="0" anchor="ctr"/>
+          <a:lstStyle/>
+          <a:p>
+            <a:pPr indent="0" marL="0">
+              <a:buNone/>
+            </a:pPr>
+            <a:r>
+              <a:rPr lang="en-US" sz="1200" b="1" dirty="0">
+                <a:solidFill>
+                  <a:schemeClr val="tx2"/>
+                </a:solidFill>
+              </a:rPr>
+              <a:t>担当者が：</a:t>
+            </a:r>
+            <a:pPr indent="0" marL="0">
+              <a:buNone/>
+            </a:pPr>
+            <a:r>
+              <a:rPr lang="en-US" sz="1200" dirty="0">
+                <a:solidFill>
+                  <a:schemeClr val="tx1"/>
+                </a:solidFill>
+              </a:rPr>
+              <a:t>仲介と対等に交渉できる</a:t>
+            </a:r>
+            <a:endParaRPr lang="en-US" sz="1200" dirty="0"/>
+          </a:p>
+        </p:txBody>
+      </p:sp>
+      <p:sp>
+        <p:nvSpPr>
+          <p:cNvPr id="25" name="timeline 4"/>
+          <p:cNvSpPr/>
+          <p:nvPr/>
+        </p:nvSpPr>
+        <p:spPr>
+          <a:xfrm>
+            <a:off x="8942832" y="1645920"/>
+            <a:ext cx="2697480" cy="685800"/>
+          </a:xfrm>
+          <a:prstGeom prst="chevron">
+            <a:avLst/>
+          </a:prstGeom>
+          <a:solidFill>
+            <a:schemeClr val="accent1"/>
+          </a:solidFill>
+          <a:ln w="12700">
+            <a:solidFill>
+              <a:schemeClr val="accent1"/>
+            </a:solidFill>
+            <a:prstDash val="solid"/>
+          </a:ln>
+        </p:spPr>
+      </p:sp>
+      <p:sp>
+        <p:nvSpPr>
+          <p:cNvPr id="26" name="Text 24"/>
+          <p:cNvSpPr txBox="1"/>
+          <p:nvPr/>
+        </p:nvSpPr>
+        <p:spPr>
+          <a:xfrm>
+            <a:off x="9217152" y="1645920"/>
+            <a:ext cx="2194560" cy="685800"/>
+          </a:xfrm>
+          <a:prstGeom prst="rect">
+            <a:avLst/>
+          </a:prstGeom>
+          <a:noFill/>
+          <a:ln/>
+        </p:spPr>
+        <p:txBody>
+          <a:bodyPr wrap="square" lIns="0" tIns="0" rIns="0" bIns="0" rtlCol="0" anchor="ctr"/>
+          <a:lstStyle/>
+          <a:p>
+            <a:pPr algn="ctr" indent="0" marL="0">
+              <a:buNone/>
+            </a:pPr>
+            <a:r>
+              <a:rPr lang="en-US" sz="1500" b="1" dirty="0">
+                <a:solidFill>
+                  <a:schemeClr val="bg1"/>
+                </a:solidFill>
+              </a:rPr>
+              <a:t>9〜12ヶ月</a:t>
+            </a:r>
+            <a:endParaRPr lang="en-US" sz="1500" dirty="0"/>
+          </a:p>
+        </p:txBody>
+      </p:sp>
+      <p:sp>
+        <p:nvSpPr>
+          <p:cNvPr id="27" name="timeline body 4"/>
+          <p:cNvSpPr/>
+          <p:nvPr/>
+        </p:nvSpPr>
+        <p:spPr>
+          <a:xfrm>
+            <a:off x="8942832" y="2468880"/>
+            <a:ext cx="2606040" cy="2011680"/>
+          </a:xfrm>
+          <a:prstGeom prst="roundRect">
+            <a:avLst>
+              <a:gd name="adj" fmla="val 3636"/>
+            </a:avLst>
+          </a:prstGeom>
+          <a:solidFill>
+            <a:schemeClr val="bg2"/>
+          </a:solidFill>
+          <a:ln w="12700">
+            <a:solidFill>
+              <a:schemeClr val="bg2"/>
+            </a:solidFill>
+            <a:prstDash val="solid"/>
+          </a:ln>
+        </p:spPr>
+      </p:sp>
+      <p:sp>
+        <p:nvSpPr>
+          <p:cNvPr id="28" name="Text 26"/>
+          <p:cNvSpPr txBox="1"/>
+          <p:nvPr/>
+        </p:nvSpPr>
+        <p:spPr>
+          <a:xfrm>
+            <a:off x="9125712" y="2578608"/>
+            <a:ext cx="2240280" cy="411480"/>
+          </a:xfrm>
+          <a:prstGeom prst="rect">
+            <a:avLst/>
+          </a:prstGeom>
+          <a:noFill/>
+          <a:ln/>
+        </p:spPr>
+        <p:txBody>
+          <a:bodyPr wrap="square" lIns="0" tIns="0" rIns="0" bIns="0" rtlCol="0" anchor="t"/>
+          <a:lstStyle/>
+          <a:p>
+            <a:pPr indent="0" marL="0">
+              <a:buNone/>
+            </a:pPr>
+            <a:r>
+              <a:rPr lang="en-US" sz="1500" b="1" dirty="0">
+                <a:solidFill>
+                  <a:schemeClr val="tx2"/>
+                </a:solidFill>
+              </a:rPr>
+              <a:t>クロージングとPMI</a:t>
+            </a:r>
+            <a:endParaRPr lang="en-US" sz="1500" dirty="0"/>
+          </a:p>
+        </p:txBody>
+      </p:sp>
+      <p:sp>
+        <p:nvSpPr>
+          <p:cNvPr id="29" name="Text 27"/>
+          <p:cNvSpPr txBox="1"/>
+          <p:nvPr/>
+        </p:nvSpPr>
+        <p:spPr>
+          <a:xfrm>
+            <a:off x="9125712" y="3017520"/>
+            <a:ext cx="2240280" cy="1371600"/>
+          </a:xfrm>
+          <a:prstGeom prst="rect">
+            <a:avLst/>
+          </a:prstGeom>
+          <a:noFill/>
+          <a:ln/>
+        </p:spPr>
+        <p:txBody>
+          <a:bodyPr wrap="square" lIns="0" tIns="0" rIns="0" bIns="0" rtlCol="0" anchor="t"/>
+          <a:lstStyle/>
+          <a:p>
+            <a:pPr indent="0" marL="0">
+              <a:buNone/>
+            </a:pPr>
+            <a:r>
+              <a:rPr lang="en-US" sz="1200" dirty="0">
+                <a:solidFill>
+                  <a:schemeClr val="tx1"/>
+                </a:solidFill>
+              </a:rPr>
+              <a:t>PMI責任者と100日プラン、撤退ラインの設定</a:t>
+            </a:r>
+            <a:endParaRPr lang="en-US" sz="1200" dirty="0"/>
+          </a:p>
+        </p:txBody>
+      </p:sp>
+      <p:sp>
+        <p:nvSpPr>
+          <p:cNvPr id="30" name="timeline goal 4"/>
+          <p:cNvSpPr/>
+          <p:nvPr/>
+        </p:nvSpPr>
+        <p:spPr>
+          <a:xfrm>
+            <a:off x="8942832" y="4572000"/>
+            <a:ext cx="2606040" cy="731520"/>
+          </a:xfrm>
+          <a:prstGeom prst="roundRect">
+            <a:avLst>
+              <a:gd name="adj" fmla="val 10000"/>
+            </a:avLst>
+          </a:prstGeom>
+          <a:solidFill>
+            <a:schemeClr val="accent5"/>
+          </a:solidFill>
+          <a:ln w="12700">
+            <a:solidFill>
+              <a:schemeClr val="accent5"/>
+            </a:solidFill>
+            <a:prstDash val="solid"/>
+          </a:ln>
+        </p:spPr>
+      </p:sp>
+      <p:sp>
+        <p:nvSpPr>
+          <p:cNvPr id="31" name="Text 29"/>
+          <p:cNvSpPr txBox="1"/>
+          <p:nvPr/>
+        </p:nvSpPr>
+        <p:spPr>
+          <a:xfrm>
+            <a:off x="9125712" y="4572000"/>
+            <a:ext cx="2240280" cy="731520"/>
+          </a:xfrm>
+          <a:prstGeom prst="rect">
+            <a:avLst/>
+          </a:prstGeom>
+          <a:noFill/>
+          <a:ln/>
+        </p:spPr>
+        <p:txBody>
+          <a:bodyPr wrap="square" lIns="0" tIns="0" rIns="0" bIns="0" rtlCol="0" anchor="ctr"/>
+          <a:lstStyle/>
+          <a:p>
+            <a:pPr indent="0" marL="0">
+              <a:buNone/>
+            </a:pPr>
+            <a:r>
+              <a:rPr lang="en-US" sz="1200" b="1" dirty="0">
+                <a:solidFill>
+                  <a:schemeClr val="tx2"/>
+                </a:solidFill>
+              </a:rPr>
+              <a:t>担当者が：</a:t>
+            </a:r>
+            <a:pPr indent="0" marL="0">
+              <a:buNone/>
+            </a:pPr>
+            <a:r>
+              <a:rPr lang="en-US" sz="1200" dirty="0">
+                <a:solidFill>
+                  <a:schemeClr val="tx1"/>
+                </a:solidFill>
+              </a:rPr>
+              <a:t>買った後を自走できる</a:t>
+            </a:r>
+            <a:endParaRPr lang="en-US" sz="1200" dirty="0"/>
+          </a:p>
+        </p:txBody>
+      </p:sp>
+      <p:sp>
+        <p:nvSpPr>
+          <p:cNvPr id="32" name="capacity rule"/>
+          <p:cNvSpPr/>
+          <p:nvPr/>
+        </p:nvSpPr>
+        <p:spPr>
+          <a:xfrm>
+            <a:off x="548640" y="5486400"/>
+            <a:ext cx="11064240" cy="731520"/>
+          </a:xfrm>
+          <a:prstGeom prst="roundRect">
+            <a:avLst>
+              <a:gd name="adj" fmla="val 10000"/>
+            </a:avLst>
+          </a:prstGeom>
+          <a:solidFill>
+            <a:schemeClr val="tx2"/>
+          </a:solidFill>
+          <a:ln w="12700">
+            <a:solidFill>
+              <a:schemeClr val="tx2"/>
+            </a:solidFill>
+            <a:prstDash val="solid"/>
+          </a:ln>
+        </p:spPr>
+      </p:sp>
+      <p:sp>
+        <p:nvSpPr>
+          <p:cNvPr id="33" name="Text 31"/>
+          <p:cNvSpPr txBox="1"/>
+          <p:nvPr/>
+        </p:nvSpPr>
+        <p:spPr>
+          <a:xfrm>
+            <a:off x="822960" y="5486400"/>
+            <a:ext cx="10515600" cy="731520"/>
+          </a:xfrm>
+          <a:prstGeom prst="rect">
+            <a:avLst/>
+          </a:prstGeom>
+          <a:noFill/>
+          <a:ln/>
+        </p:spPr>
+        <p:txBody>
+          <a:bodyPr wrap="square" lIns="0" tIns="0" rIns="0" bIns="0" rtlCol="0" anchor="ctr"/>
+          <a:lstStyle/>
+          <a:p>
+            <a:pPr indent="0" marL="0">
+              <a:buNone/>
+            </a:pPr>
+            <a:r>
+              <a:rPr lang="en-US" sz="1400" b="1" dirty="0">
+                <a:solidFill>
+                  <a:schemeClr val="accent3"/>
+                </a:solidFill>
+              </a:rPr>
+              <a:t>体制：</a:t>
+            </a:r>
+            <a:pPr indent="0" marL="0">
+              <a:buNone/>
+            </a:pPr>
+            <a:r>
+              <a:rPr lang="en-US" sz="1400" dirty="0">
+                <a:solidFill>
+                  <a:schemeClr val="bg1"/>
+                </a:solidFill>
+              </a:rPr>
+              <a:t>コンサルタント1人で10社まで（交渉段階は同時に3社まで）。顧客同士の競合を避けるため、同業は1社まで</a:t>
+            </a:r>
+            <a:endParaRPr lang="en-US" sz="1400" dirty="0"/>
+          </a:p>
+        </p:txBody>
+      </p:sp>
+      <p:sp>
+        <p:nvSpPr>
+          <p:cNvPr id="25" name="Slide Number Placeholder 0"/>
+          <p:cNvSpPr>
+            <a:spLocks noGrp="1"/>
+          </p:cNvSpPr>
+          <p:nvPr>
+            <p:ph type="sldNum" sz="quarter" idx="4294967295"/>
+          </p:nvPr>
+        </p:nvSpPr>
+        <p:spPr>
+          <a:xfrm>
+            <a:off x="11155680" y="6419088"/>
+            <a:ext cx="457200" cy="274320"/>
+          </a:xfrm>
+          <a:prstGeom prst="rect">
+            <a:avLst/>
+          </a:prstGeom>
+          <a:extLst>
+            <a:ext uri="{C572A759-6A51-4108-AA02-DFA0A04FC94B}">
+              <ma14:wrappingTextBoxFlag xmlns:ma14="http://schemas.microsoft.com/office/mac/drawingml/2011/main" val="0"/>
+            </a:ext>
+          </a:extLst>
+        </p:spPr>
+        <p:txBody>
+          <a:bodyPr/>
+          <a:lstStyle>
+            <a:lvl1pPr>
+              <a:defRPr sz="900">
+                <a:solidFill>
+                  <a:schemeClr val="accent4"/>
+                </a:solidFill>
+              </a:defRPr>
+            </a:lvl1pPr>
+          </a:lstStyle>
+          <a:p>
+            <a:pPr algn="r"/>
+            <a:fld id="{F7021451-1387-4CA6-816F-3879F97B5CBC}" type="slidenum">
+              <a:rPr b="0" lang="en-US"/>
+              <a:t>29</a:t>
+            </a:fld>
+            <a:endParaRPr lang="en-US"/>
           </a:p>
         </p:txBody>
       </p:sp>
@@ -20400,6 +25393,1817 @@
               <a:t>3</a:t>
             </a:fld>
             <a:endParaRPr lang="en-US"/>
+          </a:p>
+        </p:txBody>
+      </p:sp>
+    </p:spTree>
+  </p:cSld>
+  <p:clrMapOvr>
+    <a:masterClrMapping/>
+  </p:clrMapOvr>
+</p:sld>
+</file>
+
+<file path=ppt/slides/slide30.xml><?xml version="1.0" encoding="utf-8"?>
+<p:sld xmlns:a="http://schemas.openxmlformats.org/drawingml/2006/main" xmlns:r="http://schemas.openxmlformats.org/officeDocument/2006/relationships" xmlns:p="http://schemas.openxmlformats.org/presentationml/2006/main">
+  <p:cSld name="Slide 30">
+    <p:spTree>
+      <p:nvGrpSpPr>
+        <p:cNvPr id="1" name=""/>
+        <p:cNvGrpSpPr/>
+        <p:nvPr/>
+      </p:nvGrpSpPr>
+      <p:grpSpPr>
+        <a:xfrm>
+          <a:off x="0" y="0"/>
+          <a:ext cx="0" cy="0"/>
+          <a:chOff x="0" y="0"/>
+          <a:chExt cx="0" cy="0"/>
+        </a:xfrm>
+      </p:grpSpPr>
+      <p:sp>
+        <p:nvSpPr>
+          <p:cNvPr id="2" name="Text 0"/>
+          <p:cNvSpPr/>
+          <p:nvPr>
+            <p:ph idx="100" type="title" hasCustomPrompt="1"/>
+          </p:nvPr>
+        </p:nvSpPr>
+        <p:spPr>
+          <a:xfrm>
+            <a:off x="548640" y="320040"/>
+            <a:ext cx="11064240" cy="685800"/>
+          </a:xfrm>
+          <a:prstGeom prst="rect">
+            <a:avLst/>
+          </a:prstGeom>
+          <a:noFill/>
+          <a:ln/>
+        </p:spPr>
+        <p:txBody>
+          <a:bodyPr wrap="square" lIns="0" tIns="0" rIns="0" bIns="0" rtlCol="0" anchor="ctr"/>
+          <a:lstStyle/>
+          <a:p>
+            <a:pPr algn="l" indent="0" marL="0">
+              <a:buNone/>
+            </a:pPr>
+            <a:r>
+              <a:rPr lang="en-US" sz="2600" b="1" dirty="0">
+                <a:solidFill>
+                  <a:schemeClr val="tx2"/>
+                </a:solidFill>
+              </a:rPr>
+              <a:t>料金プラン（改訂版）：④中野との壁打ちを上位プランの看板に</a:t>
+            </a:r>
+            <a:endParaRPr lang="en-US" sz="2600" dirty="0"/>
+          </a:p>
+        </p:txBody>
+      </p:sp>
+      <p:sp>
+        <p:nvSpPr>
+          <p:cNvPr id="3" name="Text 0"/>
+          <p:cNvSpPr/>
+          <p:nvPr>
+            <p:ph idx="101" type="body" hasCustomPrompt="1"/>
+          </p:nvPr>
+        </p:nvSpPr>
+        <p:spPr>
+          <a:xfrm>
+            <a:off x="548640" y="1005840"/>
+            <a:ext cx="11064240" cy="411480"/>
+          </a:xfrm>
+          <a:prstGeom prst="rect">
+            <a:avLst/>
+          </a:prstGeom>
+          <a:noFill/>
+          <a:ln/>
+        </p:spPr>
+        <p:txBody>
+          <a:bodyPr wrap="square" lIns="0" tIns="0" rIns="0" bIns="0" rtlCol="0" anchor="t"/>
+          <a:lstStyle/>
+          <a:p>
+            <a:pPr indent="0" marL="0">
+              <a:buNone/>
+            </a:pPr>
+            <a:r>
+              <a:rPr lang="en-US" sz="1500" dirty="0">
+                <a:solidFill>
+                  <a:schemeClr val="accent4"/>
+                </a:solidFill>
+              </a:rPr>
+              <a:t>月額で「育成と伴走」、成功報酬で「成約」に払ってもらう二本立て</a:t>
+            </a:r>
+            <a:endParaRPr lang="en-US" sz="1500" dirty="0"/>
+          </a:p>
+        </p:txBody>
+      </p:sp>
+      <p:graphicFrame>
+        <p:nvGraphicFramePr>
+          <p:cNvPr id="31" name="pricing v2"/>
+          <p:cNvGraphicFramePr>
+            <a:graphicFrameLocks noGrp="1"/>
+          </p:cNvGraphicFramePr>
+          <p:nvPr>
+            <p:extLst>
+              <p:ext uri="{D42A27DB-BD31-4B8C-83A1-F6EECF244321}">
+                <p14:modId xmlns:p14="http://schemas.microsoft.com/office/powerpoint/2010/main" val="1579011935"/>
+              </p:ext>
+            </p:extLst>
+          </p:nvPr>
+        </p:nvGraphicFramePr>
+        <p:xfrm>
+          <a:off x="548640" y="1645920"/>
+          <a:ext cx="11064240" cy="914400"/>
+        </p:xfrm>
+        <a:graphic>
+          <a:graphicData uri="http://schemas.openxmlformats.org/drawingml/2006/table">
+            <a:tbl>
+              <a:tblPr/>
+              <a:tblGrid>
+                <a:gridCol w="1828800"/>
+                <a:gridCol w="2651760"/>
+                <a:gridCol w="6583680"/>
+              </a:tblGrid>
+              <a:tr h="457200">
+                <a:tc>
+                  <a:txBody>
+                    <a:bodyPr/>
+                    <a:lstStyle/>
+                    <a:p>
+                      <a:pPr algn="ctr" indent="0" marL="0">
+                        <a:buNone/>
+                      </a:pPr>
+                      <a:r>
+                        <a:rPr lang="en-US" sz="1400" b="1" dirty="0">
+                          <a:solidFill>
+                            <a:schemeClr val="bg1"/>
+                          </a:solidFill>
+                        </a:rPr>
+                        <a:t>プラン</a:t>
+                      </a:r>
+                      <a:endParaRPr lang="en-US" sz="1400" dirty="0"/>
+                    </a:p>
+                  </a:txBody>
+                  <a:tcPr marL="109728" marR="109728" marT="36576" marB="36576" anchor="ctr">
+                    <a:lnL w="9525" cap="flat" cmpd="sng" algn="ctr">
+                      <a:solidFill>
+                        <a:srgbClr val="D5DCDA"/>
+                      </a:solidFill>
+                      <a:prstDash val="solid"/>
+                      <a:round/>
+                      <a:headEnd type="none" w="med" len="med"/>
+                      <a:tailEnd type="none" w="med" len="med"/>
+                    </a:lnL>
+                    <a:lnR w="9525" cap="flat" cmpd="sng" algn="ctr">
+                      <a:solidFill>
+                        <a:srgbClr val="D5DCDA"/>
+                      </a:solidFill>
+                      <a:prstDash val="solid"/>
+                      <a:round/>
+                      <a:headEnd type="none" w="med" len="med"/>
+                      <a:tailEnd type="none" w="med" len="med"/>
+                    </a:lnR>
+                    <a:lnT w="9525" cap="flat" cmpd="sng" algn="ctr">
+                      <a:solidFill>
+                        <a:srgbClr val="D5DCDA"/>
+                      </a:solidFill>
+                      <a:prstDash val="solid"/>
+                      <a:round/>
+                      <a:headEnd type="none" w="med" len="med"/>
+                      <a:tailEnd type="none" w="med" len="med"/>
+                    </a:lnT>
+                    <a:lnB w="9525" cap="flat" cmpd="sng" algn="ctr">
+                      <a:solidFill>
+                        <a:srgbClr val="D5DCDA"/>
+                      </a:solidFill>
+                      <a:prstDash val="solid"/>
+                      <a:round/>
+                      <a:headEnd type="none" w="med" len="med"/>
+                      <a:tailEnd type="none" w="med" len="med"/>
+                    </a:lnB>
+                    <a:solidFill>
+                      <a:schemeClr val="tx2"/>
+                    </a:solidFill>
+                  </a:tcPr>
+                </a:tc>
+                <a:tc>
+                  <a:txBody>
+                    <a:bodyPr/>
+                    <a:lstStyle/>
+                    <a:p>
+                      <a:pPr algn="ctr" indent="0" marL="0">
+                        <a:buNone/>
+                      </a:pPr>
+                      <a:r>
+                        <a:rPr lang="en-US" sz="1400" b="1" dirty="0">
+                          <a:solidFill>
+                            <a:schemeClr val="bg1"/>
+                          </a:solidFill>
+                        </a:rPr>
+                        <a:t>価格（税別・仮）</a:t>
+                      </a:r>
+                      <a:endParaRPr lang="en-US" sz="1400" dirty="0"/>
+                    </a:p>
+                  </a:txBody>
+                  <a:tcPr marL="109728" marR="109728" marT="36576" marB="36576" anchor="ctr">
+                    <a:lnL w="9525" cap="flat" cmpd="sng" algn="ctr">
+                      <a:solidFill>
+                        <a:srgbClr val="D5DCDA"/>
+                      </a:solidFill>
+                      <a:prstDash val="solid"/>
+                      <a:round/>
+                      <a:headEnd type="none" w="med" len="med"/>
+                      <a:tailEnd type="none" w="med" len="med"/>
+                    </a:lnL>
+                    <a:lnR w="9525" cap="flat" cmpd="sng" algn="ctr">
+                      <a:solidFill>
+                        <a:srgbClr val="D5DCDA"/>
+                      </a:solidFill>
+                      <a:prstDash val="solid"/>
+                      <a:round/>
+                      <a:headEnd type="none" w="med" len="med"/>
+                      <a:tailEnd type="none" w="med" len="med"/>
+                    </a:lnR>
+                    <a:lnT w="9525" cap="flat" cmpd="sng" algn="ctr">
+                      <a:solidFill>
+                        <a:srgbClr val="D5DCDA"/>
+                      </a:solidFill>
+                      <a:prstDash val="solid"/>
+                      <a:round/>
+                      <a:headEnd type="none" w="med" len="med"/>
+                      <a:tailEnd type="none" w="med" len="med"/>
+                    </a:lnT>
+                    <a:lnB w="9525" cap="flat" cmpd="sng" algn="ctr">
+                      <a:solidFill>
+                        <a:srgbClr val="D5DCDA"/>
+                      </a:solidFill>
+                      <a:prstDash val="solid"/>
+                      <a:round/>
+                      <a:headEnd type="none" w="med" len="med"/>
+                      <a:tailEnd type="none" w="med" len="med"/>
+                    </a:lnB>
+                    <a:solidFill>
+                      <a:schemeClr val="tx2"/>
+                    </a:solidFill>
+                  </a:tcPr>
+                </a:tc>
+                <a:tc>
+                  <a:txBody>
+                    <a:bodyPr/>
+                    <a:lstStyle/>
+                    <a:p>
+                      <a:pPr algn="ctr" indent="0" marL="0">
+                        <a:buNone/>
+                      </a:pPr>
+                      <a:r>
+                        <a:rPr lang="en-US" sz="1400" b="1" dirty="0">
+                          <a:solidFill>
+                            <a:schemeClr val="bg1"/>
+                          </a:solidFill>
+                        </a:rPr>
+                        <a:t>含まれるもの</a:t>
+                      </a:r>
+                      <a:endParaRPr lang="en-US" sz="1400" dirty="0"/>
+                    </a:p>
+                  </a:txBody>
+                  <a:tcPr marL="109728" marR="109728" marT="36576" marB="36576" anchor="ctr">
+                    <a:lnL w="9525" cap="flat" cmpd="sng" algn="ctr">
+                      <a:solidFill>
+                        <a:srgbClr val="D5DCDA"/>
+                      </a:solidFill>
+                      <a:prstDash val="solid"/>
+                      <a:round/>
+                      <a:headEnd type="none" w="med" len="med"/>
+                      <a:tailEnd type="none" w="med" len="med"/>
+                    </a:lnL>
+                    <a:lnR w="9525" cap="flat" cmpd="sng" algn="ctr">
+                      <a:solidFill>
+                        <a:srgbClr val="D5DCDA"/>
+                      </a:solidFill>
+                      <a:prstDash val="solid"/>
+                      <a:round/>
+                      <a:headEnd type="none" w="med" len="med"/>
+                      <a:tailEnd type="none" w="med" len="med"/>
+                    </a:lnR>
+                    <a:lnT w="9525" cap="flat" cmpd="sng" algn="ctr">
+                      <a:solidFill>
+                        <a:srgbClr val="D5DCDA"/>
+                      </a:solidFill>
+                      <a:prstDash val="solid"/>
+                      <a:round/>
+                      <a:headEnd type="none" w="med" len="med"/>
+                      <a:tailEnd type="none" w="med" len="med"/>
+                    </a:lnT>
+                    <a:lnB w="9525" cap="flat" cmpd="sng" algn="ctr">
+                      <a:solidFill>
+                        <a:srgbClr val="D5DCDA"/>
+                      </a:solidFill>
+                      <a:prstDash val="solid"/>
+                      <a:round/>
+                      <a:headEnd type="none" w="med" len="med"/>
+                      <a:tailEnd type="none" w="med" len="med"/>
+                    </a:lnB>
+                    <a:solidFill>
+                      <a:schemeClr val="tx2"/>
+                    </a:solidFill>
+                  </a:tcPr>
+                </a:tc>
+              </a:tr>
+              <a:tr h="1051560">
+                <a:tc>
+                  <a:txBody>
+                    <a:bodyPr/>
+                    <a:lstStyle/>
+                    <a:p>
+                      <a:pPr algn="ctr" indent="0" marL="0">
+                        <a:buNone/>
+                      </a:pPr>
+                      <a:r>
+                        <a:rPr lang="en-US" sz="1300" b="1" dirty="0">
+                          <a:solidFill>
+                            <a:schemeClr val="accent1"/>
+                          </a:solidFill>
+                        </a:rPr>
+                        <a:t>スタンダード</a:t>
+                      </a:r>
+                      <a:endParaRPr lang="en-US" sz="1300" dirty="0"/>
+                    </a:p>
+                  </a:txBody>
+                  <a:tcPr marL="109728" marR="109728" marT="36576" marB="36576" anchor="ctr">
+                    <a:lnL w="9525" cap="flat" cmpd="sng" algn="ctr">
+                      <a:solidFill>
+                        <a:srgbClr val="D5DCDA"/>
+                      </a:solidFill>
+                      <a:prstDash val="solid"/>
+                      <a:round/>
+                      <a:headEnd type="none" w="med" len="med"/>
+                      <a:tailEnd type="none" w="med" len="med"/>
+                    </a:lnL>
+                    <a:lnR w="9525" cap="flat" cmpd="sng" algn="ctr">
+                      <a:solidFill>
+                        <a:srgbClr val="D5DCDA"/>
+                      </a:solidFill>
+                      <a:prstDash val="solid"/>
+                      <a:round/>
+                      <a:headEnd type="none" w="med" len="med"/>
+                      <a:tailEnd type="none" w="med" len="med"/>
+                    </a:lnR>
+                    <a:lnT w="9525" cap="flat" cmpd="sng" algn="ctr">
+                      <a:solidFill>
+                        <a:srgbClr val="D5DCDA"/>
+                      </a:solidFill>
+                      <a:prstDash val="solid"/>
+                      <a:round/>
+                      <a:headEnd type="none" w="med" len="med"/>
+                      <a:tailEnd type="none" w="med" len="med"/>
+                    </a:lnT>
+                    <a:lnB w="9525" cap="flat" cmpd="sng" algn="ctr">
+                      <a:solidFill>
+                        <a:srgbClr val="D5DCDA"/>
+                      </a:solidFill>
+                      <a:prstDash val="solid"/>
+                      <a:round/>
+                      <a:headEnd type="none" w="med" len="med"/>
+                      <a:tailEnd type="none" w="med" len="med"/>
+                    </a:lnB>
+                  </a:tcPr>
+                </a:tc>
+                <a:tc>
+                  <a:txBody>
+                    <a:bodyPr/>
+                    <a:lstStyle/>
+                    <a:p>
+                      <a:pPr algn="ctr" indent="0" marL="0">
+                        <a:buNone/>
+                      </a:pPr>
+                      <a:r>
+                        <a:rPr lang="en-US" sz="1300" b="1" dirty="0">
+                          <a:solidFill>
+                            <a:schemeClr val="tx1"/>
+                          </a:solidFill>
+                        </a:rPr>
+                        <a:t>月50万円</a:t>
+                      </a:r>
+                      <a:endParaRPr lang="en-US" sz="1300" dirty="0"/>
+                    </a:p>
+                    <a:p>
+                      <a:pPr algn="ctr" indent="0" marL="0">
+                        <a:buNone/>
+                      </a:pPr>
+                      <a:r>
+                        <a:rPr lang="en-US" sz="1300" b="1" dirty="0">
+                          <a:solidFill>
+                            <a:schemeClr val="tx1"/>
+                          </a:solidFill>
+                        </a:rPr>
+                        <a:t>12ヶ月（6ヶ月から可）</a:t>
+                      </a:r>
+                      <a:endParaRPr lang="en-US" sz="1300" dirty="0"/>
+                    </a:p>
+                  </a:txBody>
+                  <a:tcPr marL="109728" marR="109728" marT="36576" marB="36576" anchor="ctr">
+                    <a:lnL w="9525" cap="flat" cmpd="sng" algn="ctr">
+                      <a:solidFill>
+                        <a:srgbClr val="D5DCDA"/>
+                      </a:solidFill>
+                      <a:prstDash val="solid"/>
+                      <a:round/>
+                      <a:headEnd type="none" w="med" len="med"/>
+                      <a:tailEnd type="none" w="med" len="med"/>
+                    </a:lnL>
+                    <a:lnR w="9525" cap="flat" cmpd="sng" algn="ctr">
+                      <a:solidFill>
+                        <a:srgbClr val="D5DCDA"/>
+                      </a:solidFill>
+                      <a:prstDash val="solid"/>
+                      <a:round/>
+                      <a:headEnd type="none" w="med" len="med"/>
+                      <a:tailEnd type="none" w="med" len="med"/>
+                    </a:lnR>
+                    <a:lnT w="9525" cap="flat" cmpd="sng" algn="ctr">
+                      <a:solidFill>
+                        <a:srgbClr val="D5DCDA"/>
+                      </a:solidFill>
+                      <a:prstDash val="solid"/>
+                      <a:round/>
+                      <a:headEnd type="none" w="med" len="med"/>
+                      <a:tailEnd type="none" w="med" len="med"/>
+                    </a:lnT>
+                    <a:lnB w="9525" cap="flat" cmpd="sng" algn="ctr">
+                      <a:solidFill>
+                        <a:srgbClr val="D5DCDA"/>
+                      </a:solidFill>
+                      <a:prstDash val="solid"/>
+                      <a:round/>
+                      <a:headEnd type="none" w="med" len="med"/>
+                      <a:tailEnd type="none" w="med" len="med"/>
+                    </a:lnB>
+                  </a:tcPr>
+                </a:tc>
+                <a:tc>
+                  <a:txBody>
+                    <a:bodyPr/>
+                    <a:lstStyle/>
+                    <a:p>
+                      <a:pPr indent="0" marL="0">
+                        <a:buNone/>
+                      </a:pPr>
+                      <a:r>
+                        <a:rPr lang="en-US" sz="1300" dirty="0">
+                          <a:solidFill>
+                            <a:schemeClr val="tx1"/>
+                          </a:solidFill>
+                        </a:rPr>
+                        <a:t>①AI分析・シナジー試算、担当者の育成カリキュラム、ソーシング、IM受領と読解、②資金調達の設計、③交渉への同席と指導</a:t>
+                      </a:r>
+                      <a:endParaRPr lang="en-US" sz="1300" dirty="0"/>
+                    </a:p>
+                  </a:txBody>
+                  <a:tcPr marL="109728" marR="109728" marT="36576" marB="36576" anchor="ctr">
+                    <a:lnL w="9525" cap="flat" cmpd="sng" algn="ctr">
+                      <a:solidFill>
+                        <a:srgbClr val="D5DCDA"/>
+                      </a:solidFill>
+                      <a:prstDash val="solid"/>
+                      <a:round/>
+                      <a:headEnd type="none" w="med" len="med"/>
+                      <a:tailEnd type="none" w="med" len="med"/>
+                    </a:lnL>
+                    <a:lnR w="9525" cap="flat" cmpd="sng" algn="ctr">
+                      <a:solidFill>
+                        <a:srgbClr val="D5DCDA"/>
+                      </a:solidFill>
+                      <a:prstDash val="solid"/>
+                      <a:round/>
+                      <a:headEnd type="none" w="med" len="med"/>
+                      <a:tailEnd type="none" w="med" len="med"/>
+                    </a:lnR>
+                    <a:lnT w="9525" cap="flat" cmpd="sng" algn="ctr">
+                      <a:solidFill>
+                        <a:srgbClr val="D5DCDA"/>
+                      </a:solidFill>
+                      <a:prstDash val="solid"/>
+                      <a:round/>
+                      <a:headEnd type="none" w="med" len="med"/>
+                      <a:tailEnd type="none" w="med" len="med"/>
+                    </a:lnT>
+                    <a:lnB w="9525" cap="flat" cmpd="sng" algn="ctr">
+                      <a:solidFill>
+                        <a:srgbClr val="D5DCDA"/>
+                      </a:solidFill>
+                      <a:prstDash val="solid"/>
+                      <a:round/>
+                      <a:headEnd type="none" w="med" len="med"/>
+                      <a:tailEnd type="none" w="med" len="med"/>
+                    </a:lnB>
+                  </a:tcPr>
+                </a:tc>
+              </a:tr>
+              <a:tr h="1051560">
+                <a:tc>
+                  <a:txBody>
+                    <a:bodyPr/>
+                    <a:lstStyle/>
+                    <a:p>
+                      <a:pPr algn="ctr" indent="0" marL="0">
+                        <a:buNone/>
+                      </a:pPr>
+                      <a:r>
+                        <a:rPr lang="en-US" sz="1300" b="1" dirty="0">
+                          <a:solidFill>
+                            <a:schemeClr val="accent2"/>
+                          </a:solidFill>
+                        </a:rPr>
+                        <a:t>プレミアム</a:t>
+                      </a:r>
+                      <a:endParaRPr lang="en-US" sz="1300" dirty="0"/>
+                    </a:p>
+                  </a:txBody>
+                  <a:tcPr marL="109728" marR="109728" marT="36576" marB="36576" anchor="ctr">
+                    <a:lnL w="9525" cap="flat" cmpd="sng" algn="ctr">
+                      <a:solidFill>
+                        <a:srgbClr val="D5DCDA"/>
+                      </a:solidFill>
+                      <a:prstDash val="solid"/>
+                      <a:round/>
+                      <a:headEnd type="none" w="med" len="med"/>
+                      <a:tailEnd type="none" w="med" len="med"/>
+                    </a:lnL>
+                    <a:lnR w="9525" cap="flat" cmpd="sng" algn="ctr">
+                      <a:solidFill>
+                        <a:srgbClr val="D5DCDA"/>
+                      </a:solidFill>
+                      <a:prstDash val="solid"/>
+                      <a:round/>
+                      <a:headEnd type="none" w="med" len="med"/>
+                      <a:tailEnd type="none" w="med" len="med"/>
+                    </a:lnR>
+                    <a:lnT w="9525" cap="flat" cmpd="sng" algn="ctr">
+                      <a:solidFill>
+                        <a:srgbClr val="D5DCDA"/>
+                      </a:solidFill>
+                      <a:prstDash val="solid"/>
+                      <a:round/>
+                      <a:headEnd type="none" w="med" len="med"/>
+                      <a:tailEnd type="none" w="med" len="med"/>
+                    </a:lnT>
+                    <a:lnB w="9525" cap="flat" cmpd="sng" algn="ctr">
+                      <a:solidFill>
+                        <a:srgbClr val="D5DCDA"/>
+                      </a:solidFill>
+                      <a:prstDash val="solid"/>
+                      <a:round/>
+                      <a:headEnd type="none" w="med" len="med"/>
+                      <a:tailEnd type="none" w="med" len="med"/>
+                    </a:lnB>
+                  </a:tcPr>
+                </a:tc>
+                <a:tc>
+                  <a:txBody>
+                    <a:bodyPr/>
+                    <a:lstStyle/>
+                    <a:p>
+                      <a:pPr algn="ctr" indent="0" marL="0">
+                        <a:buNone/>
+                      </a:pPr>
+                      <a:r>
+                        <a:rPr lang="en-US" sz="1300" b="1" dirty="0">
+                          <a:solidFill>
+                            <a:schemeClr val="tx1"/>
+                          </a:solidFill>
+                        </a:rPr>
+                        <a:t>月80万円</a:t>
+                      </a:r>
+                      <a:endParaRPr lang="en-US" sz="1300" dirty="0"/>
+                    </a:p>
+                  </a:txBody>
+                  <a:tcPr marL="109728" marR="109728" marT="36576" marB="36576" anchor="ctr">
+                    <a:lnL w="9525" cap="flat" cmpd="sng" algn="ctr">
+                      <a:solidFill>
+                        <a:srgbClr val="D5DCDA"/>
+                      </a:solidFill>
+                      <a:prstDash val="solid"/>
+                      <a:round/>
+                      <a:headEnd type="none" w="med" len="med"/>
+                      <a:tailEnd type="none" w="med" len="med"/>
+                    </a:lnL>
+                    <a:lnR w="9525" cap="flat" cmpd="sng" algn="ctr">
+                      <a:solidFill>
+                        <a:srgbClr val="D5DCDA"/>
+                      </a:solidFill>
+                      <a:prstDash val="solid"/>
+                      <a:round/>
+                      <a:headEnd type="none" w="med" len="med"/>
+                      <a:tailEnd type="none" w="med" len="med"/>
+                    </a:lnR>
+                    <a:lnT w="9525" cap="flat" cmpd="sng" algn="ctr">
+                      <a:solidFill>
+                        <a:srgbClr val="D5DCDA"/>
+                      </a:solidFill>
+                      <a:prstDash val="solid"/>
+                      <a:round/>
+                      <a:headEnd type="none" w="med" len="med"/>
+                      <a:tailEnd type="none" w="med" len="med"/>
+                    </a:lnT>
+                    <a:lnB w="9525" cap="flat" cmpd="sng" algn="ctr">
+                      <a:solidFill>
+                        <a:srgbClr val="D5DCDA"/>
+                      </a:solidFill>
+                      <a:prstDash val="solid"/>
+                      <a:round/>
+                      <a:headEnd type="none" w="med" len="med"/>
+                      <a:tailEnd type="none" w="med" len="med"/>
+                    </a:lnB>
+                  </a:tcPr>
+                </a:tc>
+                <a:tc>
+                  <a:txBody>
+                    <a:bodyPr/>
+                    <a:lstStyle/>
+                    <a:p>
+                      <a:pPr indent="0" marL="0">
+                        <a:buNone/>
+                      </a:pPr>
+                      <a:r>
+                        <a:rPr lang="en-US" sz="1300" dirty="0">
+                          <a:solidFill>
+                            <a:schemeClr val="tx1"/>
+                          </a:solidFill>
+                        </a:rPr>
+                        <a:t>スタンダードの全内容＋④中野との月1時間の壁打ち（49戦の判断基準でのフィードバック）＋③交渉の代行</a:t>
+                      </a:r>
+                      <a:endParaRPr lang="en-US" sz="1300" dirty="0"/>
+                    </a:p>
+                  </a:txBody>
+                  <a:tcPr marL="109728" marR="109728" marT="36576" marB="36576" anchor="ctr">
+                    <a:lnL w="9525" cap="flat" cmpd="sng" algn="ctr">
+                      <a:solidFill>
+                        <a:srgbClr val="D5DCDA"/>
+                      </a:solidFill>
+                      <a:prstDash val="solid"/>
+                      <a:round/>
+                      <a:headEnd type="none" w="med" len="med"/>
+                      <a:tailEnd type="none" w="med" len="med"/>
+                    </a:lnL>
+                    <a:lnR w="9525" cap="flat" cmpd="sng" algn="ctr">
+                      <a:solidFill>
+                        <a:srgbClr val="D5DCDA"/>
+                      </a:solidFill>
+                      <a:prstDash val="solid"/>
+                      <a:round/>
+                      <a:headEnd type="none" w="med" len="med"/>
+                      <a:tailEnd type="none" w="med" len="med"/>
+                    </a:lnR>
+                    <a:lnT w="9525" cap="flat" cmpd="sng" algn="ctr">
+                      <a:solidFill>
+                        <a:srgbClr val="D5DCDA"/>
+                      </a:solidFill>
+                      <a:prstDash val="solid"/>
+                      <a:round/>
+                      <a:headEnd type="none" w="med" len="med"/>
+                      <a:tailEnd type="none" w="med" len="med"/>
+                    </a:lnT>
+                    <a:lnB w="9525" cap="flat" cmpd="sng" algn="ctr">
+                      <a:solidFill>
+                        <a:srgbClr val="D5DCDA"/>
+                      </a:solidFill>
+                      <a:prstDash val="solid"/>
+                      <a:round/>
+                      <a:headEnd type="none" w="med" len="med"/>
+                      <a:tailEnd type="none" w="med" len="med"/>
+                    </a:lnB>
+                  </a:tcPr>
+                </a:tc>
+              </a:tr>
+              <a:tr h="1051560">
+                <a:tc>
+                  <a:txBody>
+                    <a:bodyPr/>
+                    <a:lstStyle/>
+                    <a:p>
+                      <a:pPr algn="ctr" indent="0" marL="0">
+                        <a:buNone/>
+                      </a:pPr>
+                      <a:r>
+                        <a:rPr lang="en-US" sz="1300" b="1" dirty="0">
+                          <a:solidFill>
+                            <a:schemeClr val="tx2"/>
+                          </a:solidFill>
+                        </a:rPr>
+                        <a:t>成功報酬</a:t>
+                      </a:r>
+                      <a:endParaRPr lang="en-US" sz="1300" dirty="0"/>
+                    </a:p>
+                  </a:txBody>
+                  <a:tcPr marL="109728" marR="109728" marT="36576" marB="36576" anchor="ctr">
+                    <a:lnL w="9525" cap="flat" cmpd="sng" algn="ctr">
+                      <a:solidFill>
+                        <a:srgbClr val="D5DCDA"/>
+                      </a:solidFill>
+                      <a:prstDash val="solid"/>
+                      <a:round/>
+                      <a:headEnd type="none" w="med" len="med"/>
+                      <a:tailEnd type="none" w="med" len="med"/>
+                    </a:lnL>
+                    <a:lnR w="9525" cap="flat" cmpd="sng" algn="ctr">
+                      <a:solidFill>
+                        <a:srgbClr val="D5DCDA"/>
+                      </a:solidFill>
+                      <a:prstDash val="solid"/>
+                      <a:round/>
+                      <a:headEnd type="none" w="med" len="med"/>
+                      <a:tailEnd type="none" w="med" len="med"/>
+                    </a:lnR>
+                    <a:lnT w="9525" cap="flat" cmpd="sng" algn="ctr">
+                      <a:solidFill>
+                        <a:srgbClr val="D5DCDA"/>
+                      </a:solidFill>
+                      <a:prstDash val="solid"/>
+                      <a:round/>
+                      <a:headEnd type="none" w="med" len="med"/>
+                      <a:tailEnd type="none" w="med" len="med"/>
+                    </a:lnT>
+                    <a:lnB w="9525" cap="flat" cmpd="sng" algn="ctr">
+                      <a:solidFill>
+                        <a:srgbClr val="D5DCDA"/>
+                      </a:solidFill>
+                      <a:prstDash val="solid"/>
+                      <a:round/>
+                      <a:headEnd type="none" w="med" len="med"/>
+                      <a:tailEnd type="none" w="med" len="med"/>
+                    </a:lnB>
+                  </a:tcPr>
+                </a:tc>
+                <a:tc>
+                  <a:txBody>
+                    <a:bodyPr/>
+                    <a:lstStyle/>
+                    <a:p>
+                      <a:pPr algn="ctr" indent="0" marL="0">
+                        <a:buNone/>
+                      </a:pPr>
+                      <a:r>
+                        <a:rPr lang="en-US" sz="1300" b="1" dirty="0">
+                          <a:solidFill>
+                            <a:schemeClr val="tx1"/>
+                          </a:solidFill>
+                        </a:rPr>
+                        <a:t>譲渡価格×2〜3%</a:t>
+                      </a:r>
+                      <a:endParaRPr lang="en-US" sz="1300" dirty="0"/>
+                    </a:p>
+                    <a:p>
+                      <a:pPr algn="ctr" indent="0" marL="0">
+                        <a:buNone/>
+                      </a:pPr>
+                      <a:r>
+                        <a:rPr lang="en-US" sz="1300" b="1" dirty="0">
+                          <a:solidFill>
+                            <a:schemeClr val="tx1"/>
+                          </a:solidFill>
+                        </a:rPr>
+                        <a:t>（最低500万円）</a:t>
+                      </a:r>
+                      <a:endParaRPr lang="en-US" sz="1300" dirty="0"/>
+                    </a:p>
+                  </a:txBody>
+                  <a:tcPr marL="109728" marR="109728" marT="36576" marB="36576" anchor="ctr">
+                    <a:lnL w="9525" cap="flat" cmpd="sng" algn="ctr">
+                      <a:solidFill>
+                        <a:srgbClr val="D5DCDA"/>
+                      </a:solidFill>
+                      <a:prstDash val="solid"/>
+                      <a:round/>
+                      <a:headEnd type="none" w="med" len="med"/>
+                      <a:tailEnd type="none" w="med" len="med"/>
+                    </a:lnL>
+                    <a:lnR w="9525" cap="flat" cmpd="sng" algn="ctr">
+                      <a:solidFill>
+                        <a:srgbClr val="D5DCDA"/>
+                      </a:solidFill>
+                      <a:prstDash val="solid"/>
+                      <a:round/>
+                      <a:headEnd type="none" w="med" len="med"/>
+                      <a:tailEnd type="none" w="med" len="med"/>
+                    </a:lnR>
+                    <a:lnT w="9525" cap="flat" cmpd="sng" algn="ctr">
+                      <a:solidFill>
+                        <a:srgbClr val="D5DCDA"/>
+                      </a:solidFill>
+                      <a:prstDash val="solid"/>
+                      <a:round/>
+                      <a:headEnd type="none" w="med" len="med"/>
+                      <a:tailEnd type="none" w="med" len="med"/>
+                    </a:lnT>
+                    <a:lnB w="9525" cap="flat" cmpd="sng" algn="ctr">
+                      <a:solidFill>
+                        <a:srgbClr val="D5DCDA"/>
+                      </a:solidFill>
+                      <a:prstDash val="solid"/>
+                      <a:round/>
+                      <a:headEnd type="none" w="med" len="med"/>
+                      <a:tailEnd type="none" w="med" len="med"/>
+                    </a:lnB>
+                  </a:tcPr>
+                </a:tc>
+                <a:tc>
+                  <a:txBody>
+                    <a:bodyPr/>
+                    <a:lstStyle/>
+                    <a:p>
+                      <a:pPr indent="0" marL="0">
+                        <a:buNone/>
+                      </a:pPr>
+                      <a:r>
+                        <a:rPr lang="en-US" sz="1300" dirty="0">
+                          <a:solidFill>
+                            <a:schemeClr val="tx1"/>
+                          </a:solidFill>
+                        </a:rPr>
+                        <a:t>成約時のみ。買い手FAとしてクロージングまで。支払済み月額の50%を充当し、二重取りにしない</a:t>
+                      </a:r>
+                      <a:endParaRPr lang="en-US" sz="1300" dirty="0"/>
+                    </a:p>
+                  </a:txBody>
+                  <a:tcPr marL="109728" marR="109728" marT="36576" marB="36576" anchor="ctr">
+                    <a:lnL w="9525" cap="flat" cmpd="sng" algn="ctr">
+                      <a:solidFill>
+                        <a:srgbClr val="D5DCDA"/>
+                      </a:solidFill>
+                      <a:prstDash val="solid"/>
+                      <a:round/>
+                      <a:headEnd type="none" w="med" len="med"/>
+                      <a:tailEnd type="none" w="med" len="med"/>
+                    </a:lnL>
+                    <a:lnR w="9525" cap="flat" cmpd="sng" algn="ctr">
+                      <a:solidFill>
+                        <a:srgbClr val="D5DCDA"/>
+                      </a:solidFill>
+                      <a:prstDash val="solid"/>
+                      <a:round/>
+                      <a:headEnd type="none" w="med" len="med"/>
+                      <a:tailEnd type="none" w="med" len="med"/>
+                    </a:lnR>
+                    <a:lnT w="9525" cap="flat" cmpd="sng" algn="ctr">
+                      <a:solidFill>
+                        <a:srgbClr val="D5DCDA"/>
+                      </a:solidFill>
+                      <a:prstDash val="solid"/>
+                      <a:round/>
+                      <a:headEnd type="none" w="med" len="med"/>
+                      <a:tailEnd type="none" w="med" len="med"/>
+                    </a:lnT>
+                    <a:lnB w="9525" cap="flat" cmpd="sng" algn="ctr">
+                      <a:solidFill>
+                        <a:srgbClr val="D5DCDA"/>
+                      </a:solidFill>
+                      <a:prstDash val="solid"/>
+                      <a:round/>
+                      <a:headEnd type="none" w="med" len="med"/>
+                      <a:tailEnd type="none" w="med" len="med"/>
+                    </a:lnB>
+                  </a:tcPr>
+                </a:tc>
+              </a:tr>
+            </a:tbl>
+          </a:graphicData>
+        </a:graphic>
+      </p:graphicFrame>
+      <p:sp>
+        <p:nvSpPr>
+          <p:cNvPr id="5" name="pricing anchor"/>
+          <p:cNvSpPr/>
+          <p:nvPr/>
+        </p:nvSpPr>
+        <p:spPr>
+          <a:xfrm>
+            <a:off x="548640" y="5486400"/>
+            <a:ext cx="11064240" cy="731520"/>
+          </a:xfrm>
+          <a:prstGeom prst="roundRect">
+            <a:avLst>
+              <a:gd name="adj" fmla="val 10000"/>
+            </a:avLst>
+          </a:prstGeom>
+          <a:solidFill>
+            <a:schemeClr val="bg2"/>
+          </a:solidFill>
+          <a:ln w="12700">
+            <a:solidFill>
+              <a:schemeClr val="bg2"/>
+            </a:solidFill>
+            <a:prstDash val="solid"/>
+          </a:ln>
+        </p:spPr>
+      </p:sp>
+      <p:sp>
+        <p:nvSpPr>
+          <p:cNvPr id="6" name="Text 3"/>
+          <p:cNvSpPr txBox="1"/>
+          <p:nvPr/>
+        </p:nvSpPr>
+        <p:spPr>
+          <a:xfrm>
+            <a:off x="822960" y="5486400"/>
+            <a:ext cx="10515600" cy="731520"/>
+          </a:xfrm>
+          <a:prstGeom prst="rect">
+            <a:avLst/>
+          </a:prstGeom>
+          <a:noFill/>
+          <a:ln/>
+        </p:spPr>
+        <p:txBody>
+          <a:bodyPr wrap="square" lIns="0" tIns="0" rIns="0" bIns="0" rtlCol="0" anchor="ctr"/>
+          <a:lstStyle/>
+          <a:p>
+            <a:pPr indent="0" marL="0">
+              <a:buNone/>
+            </a:pPr>
+            <a:r>
+              <a:rPr lang="en-US" sz="1400" b="1" dirty="0">
+                <a:solidFill>
+                  <a:schemeClr val="accent1"/>
+                </a:solidFill>
+              </a:rPr>
+              <a:t>価格の物差し：</a:t>
+            </a:r>
+            <a:pPr indent="0" marL="0">
+              <a:buNone/>
+            </a:pPr>
+            <a:r>
+              <a:rPr lang="en-US" sz="1400" dirty="0">
+                <a:solidFill>
+                  <a:schemeClr val="tx1"/>
+                </a:solidFill>
+              </a:rPr>
+              <a:t>M&amp;A担当を1人採用すると年収800〜1,500万円＋採用費。スタンダード12ヶ月（600万円）はそれより安く、しかも社内に人が育つ</a:t>
+            </a:r>
+            <a:endParaRPr lang="en-US" sz="1400" dirty="0"/>
+          </a:p>
+        </p:txBody>
+      </p:sp>
+      <p:sp>
+        <p:nvSpPr>
+          <p:cNvPr id="25" name="Slide Number Placeholder 0"/>
+          <p:cNvSpPr>
+            <a:spLocks noGrp="1"/>
+          </p:cNvSpPr>
+          <p:nvPr>
+            <p:ph type="sldNum" sz="quarter" idx="4294967295"/>
+          </p:nvPr>
+        </p:nvSpPr>
+        <p:spPr>
+          <a:xfrm>
+            <a:off x="11155680" y="6419088"/>
+            <a:ext cx="457200" cy="274320"/>
+          </a:xfrm>
+          <a:prstGeom prst="rect">
+            <a:avLst/>
+          </a:prstGeom>
+          <a:extLst>
+            <a:ext uri="{C572A759-6A51-4108-AA02-DFA0A04FC94B}">
+              <ma14:wrappingTextBoxFlag xmlns:ma14="http://schemas.microsoft.com/office/mac/drawingml/2011/main" val="0"/>
+            </a:ext>
+          </a:extLst>
+        </p:spPr>
+        <p:txBody>
+          <a:bodyPr/>
+          <a:lstStyle>
+            <a:lvl1pPr>
+              <a:defRPr sz="900">
+                <a:solidFill>
+                  <a:schemeClr val="accent4"/>
+                </a:solidFill>
+              </a:defRPr>
+            </a:lvl1pPr>
+          </a:lstStyle>
+          <a:p>
+            <a:pPr algn="r"/>
+            <a:fld id="{F7021451-1387-4CA6-816F-3879F97B5CBC}" type="slidenum">
+              <a:rPr b="0" lang="en-US"/>
+              <a:t>30</a:t>
+            </a:fld>
+            <a:endParaRPr lang="en-US"/>
+          </a:p>
+        </p:txBody>
+      </p:sp>
+    </p:spTree>
+  </p:cSld>
+  <p:clrMapOvr>
+    <a:masterClrMapping/>
+  </p:clrMapOvr>
+</p:sld>
+</file>
+
+<file path=ppt/slides/slide31.xml><?xml version="1.0" encoding="utf-8"?>
+<p:sld xmlns:a="http://schemas.openxmlformats.org/drawingml/2006/main" xmlns:r="http://schemas.openxmlformats.org/officeDocument/2006/relationships" xmlns:p="http://schemas.openxmlformats.org/presentationml/2006/main">
+  <p:cSld name="Slide 31">
+    <p:spTree>
+      <p:nvGrpSpPr>
+        <p:cNvPr id="1" name=""/>
+        <p:cNvGrpSpPr/>
+        <p:nvPr/>
+      </p:nvGrpSpPr>
+      <p:grpSpPr>
+        <a:xfrm>
+          <a:off x="0" y="0"/>
+          <a:ext cx="0" cy="0"/>
+          <a:chOff x="0" y="0"/>
+          <a:chExt cx="0" cy="0"/>
+        </a:xfrm>
+      </p:grpSpPr>
+      <p:sp>
+        <p:nvSpPr>
+          <p:cNvPr id="2" name="Text 0"/>
+          <p:cNvSpPr/>
+          <p:nvPr>
+            <p:ph idx="100" type="title" hasCustomPrompt="1"/>
+          </p:nvPr>
+        </p:nvSpPr>
+        <p:spPr>
+          <a:xfrm>
+            <a:off x="548640" y="320040"/>
+            <a:ext cx="11064240" cy="685800"/>
+          </a:xfrm>
+          <a:prstGeom prst="rect">
+            <a:avLst/>
+          </a:prstGeom>
+          <a:noFill/>
+          <a:ln/>
+        </p:spPr>
+        <p:txBody>
+          <a:bodyPr wrap="square" lIns="0" tIns="0" rIns="0" bIns="0" rtlCol="0" anchor="ctr"/>
+          <a:lstStyle/>
+          <a:p>
+            <a:pPr algn="l" indent="0" marL="0">
+              <a:buNone/>
+            </a:pPr>
+            <a:r>
+              <a:rPr lang="en-US" sz="2600" b="1" dirty="0">
+                <a:solidFill>
+                  <a:schemeClr val="tx2"/>
+                </a:solidFill>
+              </a:rPr>
+              <a:t>採算：コンサルタント1人あたり年8,000万円</a:t>
+            </a:r>
+            <a:endParaRPr lang="en-US" sz="2600" dirty="0"/>
+          </a:p>
+        </p:txBody>
+      </p:sp>
+      <p:sp>
+        <p:nvSpPr>
+          <p:cNvPr id="3" name="Text 0"/>
+          <p:cNvSpPr/>
+          <p:nvPr>
+            <p:ph idx="101" type="body" hasCustomPrompt="1"/>
+          </p:nvPr>
+        </p:nvSpPr>
+        <p:spPr>
+          <a:xfrm>
+            <a:off x="548640" y="1005840"/>
+            <a:ext cx="11064240" cy="411480"/>
+          </a:xfrm>
+          <a:prstGeom prst="rect">
+            <a:avLst/>
+          </a:prstGeom>
+          <a:noFill/>
+          <a:ln/>
+        </p:spPr>
+        <p:txBody>
+          <a:bodyPr wrap="square" lIns="0" tIns="0" rIns="0" bIns="0" rtlCol="0" anchor="t"/>
+          <a:lstStyle/>
+          <a:p>
+            <a:pPr indent="0" marL="0">
+              <a:buNone/>
+            </a:pPr>
+            <a:r>
+              <a:rPr lang="en-US" sz="1500" dirty="0">
+                <a:solidFill>
+                  <a:schemeClr val="accent4"/>
+                </a:solidFill>
+              </a:rPr>
+              <a:t>前提：10社を担当（うち2社がプレミアム）、年3件成約。いずれも仮説</a:t>
+            </a:r>
+            <a:endParaRPr lang="en-US" sz="1500" dirty="0"/>
+          </a:p>
+        </p:txBody>
+      </p:sp>
+      <p:sp>
+        <p:nvSpPr>
+          <p:cNvPr id="4" name="unit econ 1"/>
+          <p:cNvSpPr/>
+          <p:nvPr/>
+        </p:nvSpPr>
+        <p:spPr>
+          <a:xfrm>
+            <a:off x="548640" y="1645920"/>
+            <a:ext cx="2606040" cy="2103120"/>
+          </a:xfrm>
+          <a:prstGeom prst="roundRect">
+            <a:avLst>
+              <a:gd name="adj" fmla="val 3478"/>
+            </a:avLst>
+          </a:prstGeom>
+          <a:solidFill>
+            <a:schemeClr val="bg2"/>
+          </a:solidFill>
+          <a:ln w="12700">
+            <a:solidFill>
+              <a:schemeClr val="bg2"/>
+            </a:solidFill>
+            <a:prstDash val="solid"/>
+          </a:ln>
+        </p:spPr>
+      </p:sp>
+      <p:sp>
+        <p:nvSpPr>
+          <p:cNvPr id="5" name="Text 3"/>
+          <p:cNvSpPr txBox="1"/>
+          <p:nvPr/>
+        </p:nvSpPr>
+        <p:spPr>
+          <a:xfrm>
+            <a:off x="685800" y="1783080"/>
+            <a:ext cx="2331720" cy="914400"/>
+          </a:xfrm>
+          <a:prstGeom prst="rect">
+            <a:avLst/>
+          </a:prstGeom>
+          <a:noFill/>
+          <a:ln/>
+        </p:spPr>
+        <p:txBody>
+          <a:bodyPr wrap="square" lIns="0" tIns="0" rIns="0" bIns="0" rtlCol="0" anchor="ctr"/>
+          <a:lstStyle/>
+          <a:p>
+            <a:pPr algn="ctr" indent="0" marL="0">
+              <a:buNone/>
+            </a:pPr>
+            <a:r>
+              <a:rPr lang="en-US" sz="3400" b="1" dirty="0">
+                <a:solidFill>
+                  <a:schemeClr val="tx2"/>
+                </a:solidFill>
+              </a:rPr>
+              <a:t>560</a:t>
+            </a:r>
+            <a:pPr algn="ctr" indent="0" marL="0">
+              <a:buNone/>
+            </a:pPr>
+            <a:r>
+              <a:rPr lang="en-US" sz="1300" b="1" dirty="0">
+                <a:solidFill>
+                  <a:schemeClr val="tx2"/>
+                </a:solidFill>
+              </a:rPr>
+              <a:t>万円/月</a:t>
+            </a:r>
+            <a:endParaRPr lang="en-US" sz="1400" dirty="0"/>
+          </a:p>
+        </p:txBody>
+      </p:sp>
+      <p:sp>
+        <p:nvSpPr>
+          <p:cNvPr id="6" name="Text 4"/>
+          <p:cNvSpPr txBox="1"/>
+          <p:nvPr/>
+        </p:nvSpPr>
+        <p:spPr>
+          <a:xfrm>
+            <a:off x="731520" y="2743200"/>
+            <a:ext cx="2240280" cy="868680"/>
+          </a:xfrm>
+          <a:prstGeom prst="rect">
+            <a:avLst/>
+          </a:prstGeom>
+          <a:noFill/>
+          <a:ln/>
+        </p:spPr>
+        <p:txBody>
+          <a:bodyPr wrap="square" lIns="0" tIns="0" rIns="0" bIns="0" rtlCol="0" anchor="t"/>
+          <a:lstStyle/>
+          <a:p>
+            <a:pPr algn="ctr" indent="0" marL="0">
+              <a:buNone/>
+            </a:pPr>
+            <a:r>
+              <a:rPr lang="en-US" sz="1200" dirty="0">
+                <a:solidFill>
+                  <a:schemeClr val="accent4"/>
+                </a:solidFill>
+              </a:rPr>
+              <a:t>月額収入（50万×8社＋80万×2社）</a:t>
+            </a:r>
+            <a:endParaRPr lang="en-US" sz="1200" dirty="0"/>
+          </a:p>
+        </p:txBody>
+      </p:sp>
+      <p:sp>
+        <p:nvSpPr>
+          <p:cNvPr id="7" name="unit econ 2"/>
+          <p:cNvSpPr/>
+          <p:nvPr/>
+        </p:nvSpPr>
+        <p:spPr>
+          <a:xfrm>
+            <a:off x="3346704" y="1645920"/>
+            <a:ext cx="2606040" cy="2103120"/>
+          </a:xfrm>
+          <a:prstGeom prst="roundRect">
+            <a:avLst>
+              <a:gd name="adj" fmla="val 3478"/>
+            </a:avLst>
+          </a:prstGeom>
+          <a:solidFill>
+            <a:schemeClr val="bg2"/>
+          </a:solidFill>
+          <a:ln w="12700">
+            <a:solidFill>
+              <a:schemeClr val="bg2"/>
+            </a:solidFill>
+            <a:prstDash val="solid"/>
+          </a:ln>
+        </p:spPr>
+      </p:sp>
+      <p:sp>
+        <p:nvSpPr>
+          <p:cNvPr id="8" name="Text 6"/>
+          <p:cNvSpPr txBox="1"/>
+          <p:nvPr/>
+        </p:nvSpPr>
+        <p:spPr>
+          <a:xfrm>
+            <a:off x="3483864" y="1783080"/>
+            <a:ext cx="2331720" cy="914400"/>
+          </a:xfrm>
+          <a:prstGeom prst="rect">
+            <a:avLst/>
+          </a:prstGeom>
+          <a:noFill/>
+          <a:ln/>
+        </p:spPr>
+        <p:txBody>
+          <a:bodyPr wrap="square" lIns="0" tIns="0" rIns="0" bIns="0" rtlCol="0" anchor="ctr"/>
+          <a:lstStyle/>
+          <a:p>
+            <a:pPr algn="ctr" indent="0" marL="0">
+              <a:buNone/>
+            </a:pPr>
+            <a:r>
+              <a:rPr lang="en-US" sz="3400" b="1" dirty="0">
+                <a:solidFill>
+                  <a:schemeClr val="tx2"/>
+                </a:solidFill>
+              </a:rPr>
+              <a:t>6,720</a:t>
+            </a:r>
+            <a:pPr algn="ctr" indent="0" marL="0">
+              <a:buNone/>
+            </a:pPr>
+            <a:r>
+              <a:rPr lang="en-US" sz="1300" b="1" dirty="0">
+                <a:solidFill>
+                  <a:schemeClr val="tx2"/>
+                </a:solidFill>
+              </a:rPr>
+              <a:t>万円/年</a:t>
+            </a:r>
+            <a:endParaRPr lang="en-US" sz="1400" dirty="0"/>
+          </a:p>
+        </p:txBody>
+      </p:sp>
+      <p:sp>
+        <p:nvSpPr>
+          <p:cNvPr id="9" name="Text 7"/>
+          <p:cNvSpPr txBox="1"/>
+          <p:nvPr/>
+        </p:nvSpPr>
+        <p:spPr>
+          <a:xfrm>
+            <a:off x="3529584" y="2743200"/>
+            <a:ext cx="2240280" cy="868680"/>
+          </a:xfrm>
+          <a:prstGeom prst="rect">
+            <a:avLst/>
+          </a:prstGeom>
+          <a:noFill/>
+          <a:ln/>
+        </p:spPr>
+        <p:txBody>
+          <a:bodyPr wrap="square" lIns="0" tIns="0" rIns="0" bIns="0" rtlCol="0" anchor="t"/>
+          <a:lstStyle/>
+          <a:p>
+            <a:pPr algn="ctr" indent="0" marL="0">
+              <a:buNone/>
+            </a:pPr>
+            <a:r>
+              <a:rPr lang="en-US" sz="1200" dirty="0">
+                <a:solidFill>
+                  <a:schemeClr val="accent4"/>
+                </a:solidFill>
+              </a:rPr>
+              <a:t>月額収入の年間合計</a:t>
+            </a:r>
+            <a:endParaRPr lang="en-US" sz="1200" dirty="0"/>
+          </a:p>
+        </p:txBody>
+      </p:sp>
+      <p:sp>
+        <p:nvSpPr>
+          <p:cNvPr id="10" name="unit econ 3"/>
+          <p:cNvSpPr/>
+          <p:nvPr/>
+        </p:nvSpPr>
+        <p:spPr>
+          <a:xfrm>
+            <a:off x="6144768" y="1645920"/>
+            <a:ext cx="2606040" cy="2103120"/>
+          </a:xfrm>
+          <a:prstGeom prst="roundRect">
+            <a:avLst>
+              <a:gd name="adj" fmla="val 3478"/>
+            </a:avLst>
+          </a:prstGeom>
+          <a:solidFill>
+            <a:schemeClr val="bg2"/>
+          </a:solidFill>
+          <a:ln w="12700">
+            <a:solidFill>
+              <a:schemeClr val="bg2"/>
+            </a:solidFill>
+            <a:prstDash val="solid"/>
+          </a:ln>
+        </p:spPr>
+      </p:sp>
+      <p:sp>
+        <p:nvSpPr>
+          <p:cNvPr id="11" name="Text 9"/>
+          <p:cNvSpPr txBox="1"/>
+          <p:nvPr/>
+        </p:nvSpPr>
+        <p:spPr>
+          <a:xfrm>
+            <a:off x="6281928" y="1783080"/>
+            <a:ext cx="2331720" cy="914400"/>
+          </a:xfrm>
+          <a:prstGeom prst="rect">
+            <a:avLst/>
+          </a:prstGeom>
+          <a:noFill/>
+          <a:ln/>
+        </p:spPr>
+        <p:txBody>
+          <a:bodyPr wrap="square" lIns="0" tIns="0" rIns="0" bIns="0" rtlCol="0" anchor="ctr"/>
+          <a:lstStyle/>
+          <a:p>
+            <a:pPr algn="ctr" indent="0" marL="0">
+              <a:buNone/>
+            </a:pPr>
+            <a:r>
+              <a:rPr lang="en-US" sz="3400" b="1" dirty="0">
+                <a:solidFill>
+                  <a:schemeClr val="tx2"/>
+                </a:solidFill>
+              </a:rPr>
+              <a:t>1,800</a:t>
+            </a:r>
+            <a:pPr algn="ctr" indent="0" marL="0">
+              <a:buNone/>
+            </a:pPr>
+            <a:r>
+              <a:rPr lang="en-US" sz="1300" b="1" dirty="0">
+                <a:solidFill>
+                  <a:schemeClr val="tx2"/>
+                </a:solidFill>
+              </a:rPr>
+              <a:t>万円/年</a:t>
+            </a:r>
+            <a:endParaRPr lang="en-US" sz="1400" dirty="0"/>
+          </a:p>
+        </p:txBody>
+      </p:sp>
+      <p:sp>
+        <p:nvSpPr>
+          <p:cNvPr id="12" name="Text 10"/>
+          <p:cNvSpPr txBox="1"/>
+          <p:nvPr/>
+        </p:nvSpPr>
+        <p:spPr>
+          <a:xfrm>
+            <a:off x="6327648" y="2743200"/>
+            <a:ext cx="2240280" cy="868680"/>
+          </a:xfrm>
+          <a:prstGeom prst="rect">
+            <a:avLst/>
+          </a:prstGeom>
+          <a:noFill/>
+          <a:ln/>
+        </p:spPr>
+        <p:txBody>
+          <a:bodyPr wrap="square" lIns="0" tIns="0" rIns="0" bIns="0" rtlCol="0" anchor="t"/>
+          <a:lstStyle/>
+          <a:p>
+            <a:pPr algn="ctr" indent="0" marL="0">
+              <a:buNone/>
+            </a:pPr>
+            <a:r>
+              <a:rPr lang="en-US" sz="1200" dirty="0">
+                <a:solidFill>
+                  <a:schemeClr val="accent4"/>
+                </a:solidFill>
+              </a:rPr>
+              <a:t>成功報酬（3件×600万円、充当前）</a:t>
+            </a:r>
+            <a:endParaRPr lang="en-US" sz="1200" dirty="0"/>
+          </a:p>
+        </p:txBody>
+      </p:sp>
+      <p:sp>
+        <p:nvSpPr>
+          <p:cNvPr id="13" name="unit econ 4"/>
+          <p:cNvSpPr/>
+          <p:nvPr/>
+        </p:nvSpPr>
+        <p:spPr>
+          <a:xfrm>
+            <a:off x="8942832" y="1645920"/>
+            <a:ext cx="2606040" cy="2103120"/>
+          </a:xfrm>
+          <a:prstGeom prst="roundRect">
+            <a:avLst>
+              <a:gd name="adj" fmla="val 3478"/>
+            </a:avLst>
+          </a:prstGeom>
+          <a:solidFill>
+            <a:schemeClr val="tx2"/>
+          </a:solidFill>
+          <a:ln w="12700">
+            <a:solidFill>
+              <a:schemeClr val="tx2"/>
+            </a:solidFill>
+            <a:prstDash val="solid"/>
+          </a:ln>
+        </p:spPr>
+      </p:sp>
+      <p:sp>
+        <p:nvSpPr>
+          <p:cNvPr id="14" name="Text 12"/>
+          <p:cNvSpPr txBox="1"/>
+          <p:nvPr/>
+        </p:nvSpPr>
+        <p:spPr>
+          <a:xfrm>
+            <a:off x="9079992" y="1783080"/>
+            <a:ext cx="2331720" cy="914400"/>
+          </a:xfrm>
+          <a:prstGeom prst="rect">
+            <a:avLst/>
+          </a:prstGeom>
+          <a:noFill/>
+          <a:ln/>
+        </p:spPr>
+        <p:txBody>
+          <a:bodyPr wrap="square" lIns="0" tIns="0" rIns="0" bIns="0" rtlCol="0" anchor="ctr"/>
+          <a:lstStyle/>
+          <a:p>
+            <a:pPr algn="ctr" indent="0" marL="0">
+              <a:buNone/>
+            </a:pPr>
+            <a:r>
+              <a:rPr lang="en-US" sz="3400" b="1" dirty="0">
+                <a:solidFill>
+                  <a:schemeClr val="accent3"/>
+                </a:solidFill>
+              </a:rPr>
+              <a:t>約8,000</a:t>
+            </a:r>
+            <a:pPr algn="ctr" indent="0" marL="0">
+              <a:buNone/>
+            </a:pPr>
+            <a:r>
+              <a:rPr lang="en-US" sz="1300" b="1" dirty="0">
+                <a:solidFill>
+                  <a:schemeClr val="accent3"/>
+                </a:solidFill>
+              </a:rPr>
+              <a:t>万円</a:t>
+            </a:r>
+            <a:endParaRPr lang="en-US" sz="1400" dirty="0"/>
+          </a:p>
+        </p:txBody>
+      </p:sp>
+      <p:sp>
+        <p:nvSpPr>
+          <p:cNvPr id="15" name="Text 13"/>
+          <p:cNvSpPr txBox="1"/>
+          <p:nvPr/>
+        </p:nvSpPr>
+        <p:spPr>
+          <a:xfrm>
+            <a:off x="9125712" y="2743200"/>
+            <a:ext cx="2240280" cy="868680"/>
+          </a:xfrm>
+          <a:prstGeom prst="rect">
+            <a:avLst/>
+          </a:prstGeom>
+          <a:noFill/>
+          <a:ln/>
+        </p:spPr>
+        <p:txBody>
+          <a:bodyPr wrap="square" lIns="0" tIns="0" rIns="0" bIns="0" rtlCol="0" anchor="t"/>
+          <a:lstStyle/>
+          <a:p>
+            <a:pPr algn="ctr" indent="0" marL="0">
+              <a:buNone/>
+            </a:pPr>
+            <a:r>
+              <a:rPr lang="en-US" sz="1200" dirty="0">
+                <a:solidFill>
+                  <a:schemeClr val="bg2"/>
+                </a:solidFill>
+              </a:rPr>
+              <a:t>コンサルタント1人あたり年間売上</a:t>
+            </a:r>
+            <a:endParaRPr lang="en-US" sz="1200" dirty="0"/>
+          </a:p>
+        </p:txBody>
+      </p:sp>
+      <p:sp>
+        <p:nvSpPr>
+          <p:cNvPr id="16" name="Text 14"/>
+          <p:cNvSpPr txBox="1"/>
+          <p:nvPr/>
+        </p:nvSpPr>
+        <p:spPr>
+          <a:xfrm>
+            <a:off x="548640" y="4023360"/>
+            <a:ext cx="11064240" cy="2194560"/>
+          </a:xfrm>
+          <a:prstGeom prst="rect">
+            <a:avLst/>
+          </a:prstGeom>
+          <a:noFill/>
+          <a:ln/>
+        </p:spPr>
+        <p:txBody>
+          <a:bodyPr wrap="square" lIns="0" tIns="0" rIns="0" bIns="0" rtlCol="0" anchor="t"/>
+          <a:lstStyle/>
+          <a:p>
+            <a:pPr marL="177800" indent="-177800">
+              <a:spcAft>
+                <a:spcPts val="800"/>
+              </a:spcAft>
+              <a:buSzPct val="100000"/>
+              <a:buChar char="•"/>
+            </a:pPr>
+            <a:r>
+              <a:rPr lang="en-US" sz="1400" dirty="0">
+                <a:solidFill>
+                  <a:schemeClr val="tx1"/>
+                </a:solidFill>
+              </a:rPr>
+              <a:t>人件費1,500万円前後のコンサルタントでも、粗利率は十分に取れる</a:t>
+            </a:r>
+            <a:endParaRPr lang="en-US" sz="1400" dirty="0"/>
+          </a:p>
+          <a:p>
+            <a:pPr marL="177800" indent="-177800">
+              <a:spcAft>
+                <a:spcPts val="800"/>
+              </a:spcAft>
+              <a:buSzPct val="100000"/>
+              <a:buChar char="•"/>
+            </a:pPr>
+            <a:r>
+              <a:rPr lang="en-US" sz="1400" dirty="0">
+                <a:solidFill>
+                  <a:schemeClr val="tx1"/>
+                </a:solidFill>
+              </a:rPr>
+              <a:t>コンサルタント5人体制で年4億円規模。AIで1人あたりの担当社数を増やすほど利益が伸びる</a:t>
+            </a:r>
+            <a:endParaRPr lang="en-US" sz="1400" dirty="0"/>
+          </a:p>
+          <a:p>
+            <a:pPr marL="177800" indent="-177800">
+              <a:spcAft>
+                <a:spcPts val="800"/>
+              </a:spcAft>
+              <a:buSzPct val="100000"/>
+              <a:buChar char="•"/>
+            </a:pPr>
+            <a:r>
+              <a:rPr lang="en-US" sz="1400" dirty="0">
+                <a:solidFill>
+                  <a:schemeClr val="tx1"/>
+                </a:solidFill>
+              </a:rPr>
+              <a:t>ボトルネックは④中野本人の時間。プレミアムは枠を絞り、価格を上げる余地がある</a:t>
+            </a:r>
+            <a:endParaRPr lang="en-US" sz="1400" dirty="0"/>
+          </a:p>
+          <a:p>
+            <a:pPr marL="177800" indent="-177800">
+              <a:spcAft>
+                <a:spcPts val="800"/>
+              </a:spcAft>
+              <a:buSzPct val="100000"/>
+              <a:buChar char="•"/>
+            </a:pPr>
+            <a:r>
+              <a:rPr lang="en-US" sz="1400" dirty="0">
+                <a:solidFill>
+                  <a:schemeClr val="tx1"/>
+                </a:solidFill>
+              </a:rPr>
+              <a:t>要確認：②投資家紹介（金融商品取引法・貸金業法）、③交渉代行（弁護士法72条）、M&amp;A支援機関登録と補助金（事業承継・引継ぎ補助金の専門家活用枠）</a:t>
+            </a:r>
+            <a:endParaRPr lang="en-US" sz="1400" dirty="0"/>
+          </a:p>
+        </p:txBody>
+      </p:sp>
+      <p:sp>
+        <p:nvSpPr>
+          <p:cNvPr id="25" name="Slide Number Placeholder 0"/>
+          <p:cNvSpPr>
+            <a:spLocks noGrp="1"/>
+          </p:cNvSpPr>
+          <p:nvPr>
+            <p:ph type="sldNum" sz="quarter" idx="4294967295"/>
+          </p:nvPr>
+        </p:nvSpPr>
+        <p:spPr>
+          <a:xfrm>
+            <a:off x="11155680" y="6419088"/>
+            <a:ext cx="457200" cy="274320"/>
+          </a:xfrm>
+          <a:prstGeom prst="rect">
+            <a:avLst/>
+          </a:prstGeom>
+          <a:extLst>
+            <a:ext uri="{C572A759-6A51-4108-AA02-DFA0A04FC94B}">
+              <ma14:wrappingTextBoxFlag xmlns:ma14="http://schemas.microsoft.com/office/mac/drawingml/2011/main" val="0"/>
+            </a:ext>
+          </a:extLst>
+        </p:spPr>
+        <p:txBody>
+          <a:bodyPr/>
+          <a:lstStyle>
+            <a:lvl1pPr>
+              <a:defRPr sz="900">
+                <a:solidFill>
+                  <a:schemeClr val="accent4"/>
+                </a:solidFill>
+              </a:defRPr>
+            </a:lvl1pPr>
+          </a:lstStyle>
+          <a:p>
+            <a:pPr algn="r"/>
+            <a:fld id="{F7021451-1387-4CA6-816F-3879F97B5CBC}" type="slidenum">
+              <a:rPr b="0" lang="en-US"/>
+              <a:t>31</a:t>
+            </a:fld>
+            <a:endParaRPr lang="en-US"/>
+          </a:p>
+        </p:txBody>
+      </p:sp>
+    </p:spTree>
+  </p:cSld>
+  <p:clrMapOvr>
+    <a:masterClrMapping/>
+  </p:clrMapOvr>
+</p:sld>
+</file>
+
+<file path=ppt/slides/slide32.xml><?xml version="1.0" encoding="utf-8"?>
+<p:sld xmlns:a="http://schemas.openxmlformats.org/drawingml/2006/main" xmlns:r="http://schemas.openxmlformats.org/officeDocument/2006/relationships" xmlns:p="http://schemas.openxmlformats.org/presentationml/2006/main">
+  <p:cSld name="Slide 32">
+    <p:spTree>
+      <p:nvGrpSpPr>
+        <p:cNvPr id="1" name=""/>
+        <p:cNvGrpSpPr/>
+        <p:nvPr/>
+      </p:nvGrpSpPr>
+      <p:grpSpPr>
+        <a:xfrm>
+          <a:off x="0" y="0"/>
+          <a:ext cx="0" cy="0"/>
+          <a:chOff x="0" y="0"/>
+          <a:chExt cx="0" cy="0"/>
+        </a:xfrm>
+      </p:grpSpPr>
+      <p:sp>
+        <p:nvSpPr>
+          <p:cNvPr id="2" name="Text 0"/>
+          <p:cNvSpPr/>
+          <p:nvPr>
+            <p:ph idx="100" type="title" hasCustomPrompt="1"/>
+          </p:nvPr>
+        </p:nvSpPr>
+        <p:spPr>
+          <a:xfrm>
+            <a:off x="731520" y="1920240"/>
+            <a:ext cx="10698480" cy="1554480"/>
+          </a:xfrm>
+          <a:prstGeom prst="rect">
+            <a:avLst/>
+          </a:prstGeom>
+          <a:noFill/>
+          <a:ln/>
+        </p:spPr>
+        <p:txBody>
+          <a:bodyPr wrap="square" lIns="0" tIns="0" rIns="0" bIns="0" rtlCol="0" anchor="b"/>
+          <a:lstStyle/>
+          <a:p>
+            <a:pPr algn="l" indent="0" marL="0">
+              <a:buNone/>
+            </a:pPr>
+            <a:r>
+              <a:rPr lang="en-US" sz="4000" b="1" dirty="0">
+                <a:solidFill>
+                  <a:schemeClr val="bg1"/>
+                </a:solidFill>
+              </a:rPr>
+              <a:t>情報を売るな、成果を売れ。</a:t>
+            </a:r>
+            <a:endParaRPr lang="en-US" sz="4000" dirty="0"/>
+          </a:p>
+        </p:txBody>
+      </p:sp>
+      <p:sp>
+        <p:nvSpPr>
+          <p:cNvPr id="3" name="Text 0"/>
+          <p:cNvSpPr/>
+          <p:nvPr>
+            <p:ph idx="101" type="body" hasCustomPrompt="1"/>
+          </p:nvPr>
+        </p:nvSpPr>
+        <p:spPr>
+          <a:xfrm>
+            <a:off x="731520" y="3657600"/>
+            <a:ext cx="10698480" cy="1005840"/>
+          </a:xfrm>
+          <a:prstGeom prst="rect">
+            <a:avLst/>
+          </a:prstGeom>
+          <a:noFill/>
+          <a:ln/>
+        </p:spPr>
+        <p:txBody>
+          <a:bodyPr wrap="square" lIns="0" tIns="0" rIns="0" bIns="0" rtlCol="0" anchor="t"/>
+          <a:lstStyle/>
+          <a:p>
+            <a:pPr indent="0" marL="0">
+              <a:buNone/>
+            </a:pPr>
+            <a:r>
+              <a:rPr lang="en-US" sz="2000" dirty="0">
+                <a:solidFill>
+                  <a:schemeClr val="accent5"/>
+                </a:solidFill>
+              </a:rPr>
+              <a:t>買い手の味方として、良い会社を適正価格で買い、成果を出すところまで</a:t>
+            </a:r>
+            <a:endParaRPr lang="en-US" sz="2000" dirty="0"/>
+          </a:p>
+        </p:txBody>
+      </p:sp>
+      <p:sp>
+        <p:nvSpPr>
+          <p:cNvPr id="4" name="Text 0"/>
+          <p:cNvSpPr/>
+          <p:nvPr>
+            <p:ph idx="102" type="body" hasCustomPrompt="1"/>
+          </p:nvPr>
+        </p:nvSpPr>
+        <p:spPr>
+          <a:xfrm>
+            <a:off x="731520" y="5760720"/>
+            <a:ext cx="10698480" cy="457200"/>
+          </a:xfrm>
+          <a:prstGeom prst="rect">
+            <a:avLst/>
+          </a:prstGeom>
+          <a:noFill/>
+          <a:ln/>
+        </p:spPr>
+        <p:txBody>
+          <a:bodyPr wrap="square" lIns="0" tIns="0" rIns="0" bIns="0" rtlCol="0"/>
+          <a:lstStyle/>
+          <a:p>
+            <a:pPr indent="0" marL="0">
+              <a:buNone/>
+            </a:pPr>
+            <a:r>
+              <a:rPr lang="en-US" sz="1200" dirty="0">
+                <a:solidFill>
+                  <a:schemeClr val="bg2"/>
+                </a:solidFill>
+              </a:rPr>
+              <a:t>Confidential｜検討用ドラフト</a:t>
+            </a:r>
+            <a:endParaRPr lang="en-US" sz="1200" dirty="0"/>
           </a:p>
         </p:txBody>
       </p:sp>
